--- a/8주차/한국어/게임엔진기초_8주차_오프라인_과제안내.pptx
+++ b/8주차/한국어/게임엔진기초_8주차_오프라인_과제안내.pptx
@@ -113,7 +113,7 @@
   <p:extLst>
     <p:ext uri="{521415D9-36F7-43E2-AB2F-B90AF26B5E84}">
       <p14:sectionLst xmlns:p14="http://schemas.microsoft.com/office/powerpoint/2010/main">
-        <p14:section name="과제" id="{84d3507a-2ac7-8e5a-0677-34d1507cebab}">
+        <p14:section name="과제" id="{0529a611-c645-d4bb-cd68-42984fda1e38}">
           <p14:sldIdLst>
             <p14:sldId id="256"/>
             <p14:sldId id="257"/>

--- a/8주차/한국어/게임엔진기초_8주차_오프라인_과제안내.pptx
+++ b/8주차/한국어/게임엔진기초_8주차_오프라인_과제안내.pptx
@@ -12,9 +12,10 @@
     <p:sldId id="260" r:id="rId6"/>
     <p:sldId id="261" r:id="rId7"/>
     <p:sldId id="262" r:id="rId8"/>
+    <p:sldId id="263" r:id="rId9"/>
   </p:sldIdLst>
   <p:notesMasterIdLst>
-    <p:notesMasterId r:id="rId9"/>
+    <p:notesMasterId r:id="rId10"/>
   </p:notesMasterIdLst>
   <p:sldSz cx="12192000" cy="6858000"/>
   <p:notesSz cx="6858000" cy="12192000"/>
@@ -113,7 +114,7 @@
   <p:extLst>
     <p:ext uri="{521415D9-36F7-43E2-AB2F-B90AF26B5E84}">
       <p14:sectionLst xmlns:p14="http://schemas.microsoft.com/office/powerpoint/2010/main">
-        <p14:section name="과제" id="{0529a611-c645-d4bb-cd68-42984fda1e38}">
+        <p14:section name="과제" id="{f81f21bf-e809-4657-79c7-4683813c0671}">
           <p14:sldIdLst>
             <p14:sldId id="256"/>
             <p14:sldId id="257"/>
@@ -122,6 +123,7 @@
             <p14:sldId id="260"/>
             <p14:sldId id="261"/>
             <p14:sldId id="262"/>
+            <p14:sldId id="263"/>
           </p14:sldIdLst>
         </p14:section>
       </p14:sectionLst>
@@ -1080,6 +1082,94 @@
             <a:fld id="{F7021451-1387-4CA6-816F-3879F97B5CBC}" type="slidenum">
               <a:rPr lang="en-US"/>
               <a:t>7</a:t>
+            </a:fld>
+            <a:endParaRPr lang="en-US"/>
+          </a:p>
+        </p:txBody>
+      </p:sp>
+    </p:spTree>
+    <p:extLst>
+      <p:ext uri="{BB962C8B-B14F-4D97-AF65-F5344CB8AC3E}">
+        <p14:creationId xmlns:p14="http://schemas.microsoft.com/office/powerpoint/2010/main" val="1024086991"/>
+      </p:ext>
+    </p:extLst>
+  </p:cSld>
+  <p:clrMapOvr>
+    <a:masterClrMapping/>
+  </p:clrMapOvr>
+</p:notes>
+</file>
+
+<file path=ppt/notesSlides/notesSlide8.xml><?xml version="1.0" encoding="utf-8"?>
+<p:notes xmlns:a="http://schemas.openxmlformats.org/drawingml/2006/main" xmlns:r="http://schemas.openxmlformats.org/officeDocument/2006/relationships" xmlns:p="http://schemas.openxmlformats.org/presentationml/2006/main">
+  <p:cSld>
+    <p:spTree>
+      <p:nvGrpSpPr>
+        <p:cNvPr id="1" name=""/>
+        <p:cNvGrpSpPr/>
+        <p:nvPr/>
+      </p:nvGrpSpPr>
+      <p:grpSpPr>
+        <a:xfrm>
+          <a:off x="0" y="0"/>
+          <a:ext cx="0" cy="0"/>
+          <a:chOff x="0" y="0"/>
+          <a:chExt cx="0" cy="0"/>
+        </a:xfrm>
+      </p:grpSpPr>
+      <p:sp>
+        <p:nvSpPr>
+          <p:cNvPr id="2" name="Slide Image Placeholder 1"/>
+          <p:cNvSpPr>
+            <a:spLocks noGrp="1" noRot="1" noChangeAspect="1"/>
+          </p:cNvSpPr>
+          <p:nvPr>
+            <p:ph type="sldImg"/>
+          </p:nvPr>
+        </p:nvSpPr>
+        <p:spPr/>
+      </p:sp>
+      <p:sp>
+        <p:nvSpPr>
+          <p:cNvPr id="3" name="Notes Placeholder 2"/>
+          <p:cNvSpPr>
+            <a:spLocks noGrp="1"/>
+          </p:cNvSpPr>
+          <p:nvPr>
+            <p:ph type="body" idx="1"/>
+          </p:nvPr>
+        </p:nvSpPr>
+        <p:spPr/>
+        <p:txBody>
+          <a:bodyPr/>
+          <a:lstStyle/>
+          <a:p>
+            <a:r>
+              <a:rPr lang="en-US" dirty="0"/>
+              <a:t/>
+            </a:r>
+            <a:endParaRPr lang="en-US" dirty="0"/>
+          </a:p>
+        </p:txBody>
+      </p:sp>
+      <p:sp>
+        <p:nvSpPr>
+          <p:cNvPr id="4" name="Slide Number Placeholder 3"/>
+          <p:cNvSpPr>
+            <a:spLocks noGrp="1"/>
+          </p:cNvSpPr>
+          <p:nvPr>
+            <p:ph type="sldNum" sz="quarter" idx="10"/>
+          </p:nvPr>
+        </p:nvSpPr>
+        <p:spPr/>
+        <p:txBody>
+          <a:bodyPr/>
+          <a:lstStyle/>
+          <a:p>
+            <a:fld id="{F7021451-1387-4CA6-816F-3879F97B5CBC}" type="slidenum">
+              <a:rPr lang="en-US"/>
+              <a:t>8</a:t>
             </a:fld>
             <a:endParaRPr lang="en-US"/>
           </a:p>
@@ -2428,8 +2518,8 @@
         </p:nvSpPr>
         <p:spPr>
           <a:xfrm>
-            <a:off x="731520" y="1920240"/>
-            <a:ext cx="7498080" cy="822960"/>
+            <a:off x="731520" y="1783080"/>
+            <a:ext cx="7498080" cy="731520"/>
           </a:xfrm>
           <a:prstGeom prst="rect">
             <a:avLst/>
@@ -2448,7 +2538,7 @@
               <a:buNone/>
             </a:pPr>
             <a:r>
-              <a:rPr lang="en-US" sz="4000" b="1" dirty="0">
+              <a:rPr lang="en-US" sz="3600" b="1" dirty="0">
                 <a:solidFill>
                   <a:srgbClr val="FFFFFF"/>
                 </a:solidFill>
@@ -2456,9 +2546,9 @@
                 <a:ea typeface="Noto Sans KR" pitchFamily="34" charset="-122"/>
                 <a:cs typeface="Noto Sans KR" pitchFamily="34" charset="-120"/>
               </a:rPr>
-              <a:t>기말 프로젝트 1단계</a:t>
+              <a:t>오늘부터 시작.</a:t>
             </a:r>
-            <a:endParaRPr lang="en-US" sz="4000" dirty="0"/>
+            <a:endParaRPr lang="en-US" sz="3600" dirty="0"/>
           </a:p>
         </p:txBody>
       </p:sp>
@@ -2470,8 +2560,70 @@
         </p:nvSpPr>
         <p:spPr>
           <a:xfrm>
-            <a:off x="731520" y="2697480"/>
-            <a:ext cx="7498080" cy="822960"/>
+            <a:off x="731520" y="2514600"/>
+            <a:ext cx="7315200" cy="1188720"/>
+          </a:xfrm>
+          <a:prstGeom prst="rect">
+            <a:avLst/>
+          </a:prstGeom>
+          <a:noFill/>
+          <a:ln/>
+        </p:spPr>
+        <p:txBody>
+          <a:bodyPr wrap="square" lIns="0" tIns="0" rIns="0" bIns="0" rtlCol="0" anchor="t"/>
+          <a:lstStyle/>
+          <a:p>
+            <a:pPr algn="l" indent="0" marL="0">
+              <a:lnSpc>
+                <a:spcPct val="105000"/>
+              </a:lnSpc>
+              <a:buNone/>
+            </a:pPr>
+            <a:r>
+              <a:rPr lang="en-US" sz="3000" b="1" dirty="0">
+                <a:solidFill>
+                  <a:srgbClr val="E07A2E"/>
+                </a:solidFill>
+                <a:latin typeface="Noto Sans KR" pitchFamily="34" charset="0"/>
+                <a:ea typeface="Noto Sans KR" pitchFamily="34" charset="-122"/>
+                <a:cs typeface="Noto Sans KR" pitchFamily="34" charset="-120"/>
+              </a:rPr>
+              <a:t>AI와 에셋으로 한 달간</a:t>
+            </a:r>
+            <a:endParaRPr lang="en-US" sz="3000" dirty="0"/>
+          </a:p>
+          <a:p>
+            <a:pPr algn="l" indent="0" marL="0">
+              <a:lnSpc>
+                <a:spcPct val="105000"/>
+              </a:lnSpc>
+              <a:buNone/>
+            </a:pPr>
+            <a:r>
+              <a:rPr lang="en-US" sz="3000" b="1" dirty="0">
+                <a:solidFill>
+                  <a:srgbClr val="E07A2E"/>
+                </a:solidFill>
+                <a:latin typeface="Noto Sans KR" pitchFamily="34" charset="0"/>
+                <a:ea typeface="Noto Sans KR" pitchFamily="34" charset="-122"/>
+                <a:cs typeface="Noto Sans KR" pitchFamily="34" charset="-120"/>
+              </a:rPr>
+              <a:t>만들어 보는 게임 프로젝트</a:t>
+            </a:r>
+            <a:endParaRPr lang="en-US" sz="3000" dirty="0"/>
+          </a:p>
+        </p:txBody>
+      </p:sp>
+      <p:sp>
+        <p:nvSpPr>
+          <p:cNvPr id="26" name="Text 24"/>
+          <p:cNvSpPr txBox="1"/>
+          <p:nvPr/>
+        </p:nvSpPr>
+        <p:spPr>
+          <a:xfrm>
+            <a:off x="731520" y="3931920"/>
+            <a:ext cx="7132320" cy="731520"/>
           </a:xfrm>
           <a:prstGeom prst="rect">
             <a:avLst/>
@@ -2490,49 +2642,7 @@
               <a:buNone/>
             </a:pPr>
             <a:r>
-              <a:rPr lang="en-US" sz="4000" b="1" dirty="0">
-                <a:solidFill>
-                  <a:srgbClr val="E07A2E"/>
-                </a:solidFill>
-                <a:latin typeface="Noto Sans KR" pitchFamily="34" charset="0"/>
-                <a:ea typeface="Noto Sans KR" pitchFamily="34" charset="-122"/>
-                <a:cs typeface="Noto Sans KR" pitchFamily="34" charset="-120"/>
-              </a:rPr>
-              <a:t>기획 · 키 비주얼 · 첫 조작</a:t>
-            </a:r>
-            <a:endParaRPr lang="en-US" sz="4000" dirty="0"/>
-          </a:p>
-        </p:txBody>
-      </p:sp>
-      <p:sp>
-        <p:nvSpPr>
-          <p:cNvPr id="26" name="Text 24"/>
-          <p:cNvSpPr txBox="1"/>
-          <p:nvPr/>
-        </p:nvSpPr>
-        <p:spPr>
-          <a:xfrm>
-            <a:off x="731520" y="3657600"/>
-            <a:ext cx="7132320" cy="731520"/>
-          </a:xfrm>
-          <a:prstGeom prst="rect">
-            <a:avLst/>
-          </a:prstGeom>
-          <a:noFill/>
-          <a:ln/>
-        </p:spPr>
-        <p:txBody>
-          <a:bodyPr wrap="square" lIns="0" tIns="0" rIns="0" bIns="0" rtlCol="0" anchor="t"/>
-          <a:lstStyle/>
-          <a:p>
-            <a:pPr algn="l" indent="0" marL="0">
-              <a:lnSpc>
-                <a:spcPct val="115000"/>
-              </a:lnSpc>
-              <a:buNone/>
-            </a:pPr>
-            <a:r>
-              <a:rPr lang="en-US" sz="1700" dirty="0">
+              <a:rPr lang="en-US" sz="1600" dirty="0">
                 <a:solidFill>
                   <a:srgbClr val="D5DBE2"/>
                 </a:solidFill>
@@ -2540,9 +2650,9 @@
                 <a:ea typeface="Noto Sans KR" pitchFamily="34" charset="-122"/>
                 <a:cs typeface="Noto Sans KR" pitchFamily="34" charset="-120"/>
               </a:rPr>
-              <a:t>다음 수업(11/9) 시작 전까지. 기말 시연은 12/21(월)</a:t>
+              <a:t>과제 안내 · 1단계: 기획 · 키 비주얼 · 첫 조작 — 11/9(월) 수업 전까지</a:t>
             </a:r>
-            <a:endParaRPr lang="en-US" sz="1700" dirty="0"/>
+            <a:endParaRPr lang="en-US" sz="1600" dirty="0"/>
           </a:p>
         </p:txBody>
       </p:sp>
@@ -4395,6 +4505,1429 @@
                   <a:srgbClr val="1E242B"/>
                 </a:solidFill>
               </a:rPr>
+              <a:t>단순한 게임일수록 더 예쁘게 만들 수 있다</a:t>
+            </a:r>
+            <a:endParaRPr lang="en-US" sz="2800" dirty="0"/>
+          </a:p>
+        </p:txBody>
+      </p:sp>
+      <p:sp>
+        <p:nvSpPr>
+          <p:cNvPr id="4" name="Text 0"/>
+          <p:cNvSpPr/>
+          <p:nvPr>
+            <p:ph idx="102" type="body" hasCustomPrompt="1"/>
+          </p:nvPr>
+        </p:nvSpPr>
+        <p:spPr>
+          <a:xfrm>
+            <a:off x="548640" y="1170432"/>
+            <a:ext cx="11064240" cy="347472"/>
+          </a:xfrm>
+          <a:prstGeom prst="rect">
+            <a:avLst/>
+          </a:prstGeom>
+          <a:noFill/>
+          <a:ln/>
+        </p:spPr>
+        <p:txBody>
+          <a:bodyPr wrap="square" lIns="0" tIns="0" rIns="0" bIns="0" rtlCol="0" anchor="ctr"/>
+          <a:lstStyle/>
+          <a:p>
+            <a:pPr indent="0" marL="0">
+              <a:buNone/>
+            </a:pPr>
+            <a:r>
+              <a:rPr lang="en-US" sz="1500" dirty="0">
+                <a:solidFill>
+                  <a:srgbClr val="5F6B78"/>
+                </a:solidFill>
+              </a:rPr>
+              <a:t>시간은 정해져 있습니다. 규칙에 쓰지 않은 시간이 '꾸미는 시간'이 됩니다</a:t>
+            </a:r>
+            <a:endParaRPr lang="en-US" sz="1500" dirty="0"/>
+          </a:p>
+        </p:txBody>
+      </p:sp>
+      <p:sp>
+        <p:nvSpPr>
+          <p:cNvPr id="5" name="Text 3"/>
+          <p:cNvSpPr txBox="1"/>
+          <p:nvPr/>
+        </p:nvSpPr>
+        <p:spPr>
+          <a:xfrm>
+            <a:off x="548640" y="1737360"/>
+            <a:ext cx="5486400" cy="320040"/>
+          </a:xfrm>
+          <a:prstGeom prst="rect">
+            <a:avLst/>
+          </a:prstGeom>
+          <a:noFill/>
+          <a:ln/>
+        </p:spPr>
+        <p:txBody>
+          <a:bodyPr wrap="square" lIns="0" tIns="0" rIns="0" bIns="0" rtlCol="0" anchor="t"/>
+          <a:lstStyle/>
+          <a:p>
+            <a:pPr algn="l" indent="0" marL="0">
+              <a:lnSpc>
+                <a:spcPct val="115000"/>
+              </a:lnSpc>
+              <a:buNone/>
+            </a:pPr>
+            <a:r>
+              <a:rPr lang="en-US" sz="1300" b="1" dirty="0">
+                <a:solidFill>
+                  <a:srgbClr val="5F6B78"/>
+                </a:solidFill>
+                <a:latin typeface="Noto Sans KR" pitchFamily="34" charset="0"/>
+                <a:ea typeface="Noto Sans KR" pitchFamily="34" charset="-122"/>
+                <a:cs typeface="Noto Sans KR" pitchFamily="34" charset="-120"/>
+              </a:rPr>
+              <a:t>6주를 쓰는 방법 (예시)</a:t>
+            </a:r>
+            <a:endParaRPr lang="en-US" sz="1300" dirty="0"/>
+          </a:p>
+        </p:txBody>
+      </p:sp>
+      <p:sp>
+        <p:nvSpPr>
+          <p:cNvPr id="6" name="Text 4"/>
+          <p:cNvSpPr txBox="1"/>
+          <p:nvPr/>
+        </p:nvSpPr>
+        <p:spPr>
+          <a:xfrm>
+            <a:off x="1645920" y="2057400"/>
+            <a:ext cx="1371600" cy="274320"/>
+          </a:xfrm>
+          <a:prstGeom prst="rect">
+            <a:avLst/>
+          </a:prstGeom>
+          <a:noFill/>
+          <a:ln/>
+        </p:spPr>
+        <p:txBody>
+          <a:bodyPr wrap="square" lIns="0" tIns="0" rIns="0" bIns="0" rtlCol="0" anchor="t"/>
+          <a:lstStyle/>
+          <a:p>
+            <a:pPr algn="ctr" indent="0" marL="0">
+              <a:lnSpc>
+                <a:spcPct val="115000"/>
+              </a:lnSpc>
+              <a:buNone/>
+            </a:pPr>
+            <a:endParaRPr lang="en-US" dirty="0"/>
+          </a:p>
+        </p:txBody>
+      </p:sp>
+      <p:sp>
+        <p:nvSpPr>
+          <p:cNvPr id="7" name="Text 5"/>
+          <p:cNvSpPr txBox="1"/>
+          <p:nvPr/>
+        </p:nvSpPr>
+        <p:spPr>
+          <a:xfrm>
+            <a:off x="3017520" y="2057400"/>
+            <a:ext cx="1371600" cy="274320"/>
+          </a:xfrm>
+          <a:prstGeom prst="rect">
+            <a:avLst/>
+          </a:prstGeom>
+          <a:noFill/>
+          <a:ln/>
+        </p:spPr>
+        <p:txBody>
+          <a:bodyPr wrap="square" lIns="0" tIns="0" rIns="0" bIns="0" rtlCol="0" anchor="t"/>
+          <a:lstStyle/>
+          <a:p>
+            <a:pPr algn="ctr" indent="0" marL="0">
+              <a:lnSpc>
+                <a:spcPct val="115000"/>
+              </a:lnSpc>
+              <a:buNone/>
+            </a:pPr>
+            <a:r>
+              <a:rPr lang="en-US" sz="1100" dirty="0">
+                <a:solidFill>
+                  <a:srgbClr val="5F6B78"/>
+                </a:solidFill>
+                <a:latin typeface="Noto Sans KR" pitchFamily="34" charset="0"/>
+                <a:ea typeface="Noto Sans KR" pitchFamily="34" charset="-122"/>
+                <a:cs typeface="Noto Sans KR" pitchFamily="34" charset="-120"/>
+              </a:rPr>
+              <a:t>1주</a:t>
+            </a:r>
+            <a:endParaRPr lang="en-US" sz="1100" dirty="0"/>
+          </a:p>
+        </p:txBody>
+      </p:sp>
+      <p:sp>
+        <p:nvSpPr>
+          <p:cNvPr id="8" name="Text 6"/>
+          <p:cNvSpPr txBox="1"/>
+          <p:nvPr/>
+        </p:nvSpPr>
+        <p:spPr>
+          <a:xfrm>
+            <a:off x="4389120" y="2057400"/>
+            <a:ext cx="1371600" cy="274320"/>
+          </a:xfrm>
+          <a:prstGeom prst="rect">
+            <a:avLst/>
+          </a:prstGeom>
+          <a:noFill/>
+          <a:ln/>
+        </p:spPr>
+        <p:txBody>
+          <a:bodyPr wrap="square" lIns="0" tIns="0" rIns="0" bIns="0" rtlCol="0" anchor="t"/>
+          <a:lstStyle/>
+          <a:p>
+            <a:pPr algn="ctr" indent="0" marL="0">
+              <a:lnSpc>
+                <a:spcPct val="115000"/>
+              </a:lnSpc>
+              <a:buNone/>
+            </a:pPr>
+            <a:r>
+              <a:rPr lang="en-US" sz="1100" dirty="0">
+                <a:solidFill>
+                  <a:srgbClr val="5F6B78"/>
+                </a:solidFill>
+                <a:latin typeface="Noto Sans KR" pitchFamily="34" charset="0"/>
+                <a:ea typeface="Noto Sans KR" pitchFamily="34" charset="-122"/>
+                <a:cs typeface="Noto Sans KR" pitchFamily="34" charset="-120"/>
+              </a:rPr>
+              <a:t>2주</a:t>
+            </a:r>
+            <a:endParaRPr lang="en-US" sz="1100" dirty="0"/>
+          </a:p>
+        </p:txBody>
+      </p:sp>
+      <p:sp>
+        <p:nvSpPr>
+          <p:cNvPr id="9" name="Text 7"/>
+          <p:cNvSpPr txBox="1"/>
+          <p:nvPr/>
+        </p:nvSpPr>
+        <p:spPr>
+          <a:xfrm>
+            <a:off x="5760720" y="2057400"/>
+            <a:ext cx="1371600" cy="274320"/>
+          </a:xfrm>
+          <a:prstGeom prst="rect">
+            <a:avLst/>
+          </a:prstGeom>
+          <a:noFill/>
+          <a:ln/>
+        </p:spPr>
+        <p:txBody>
+          <a:bodyPr wrap="square" lIns="0" tIns="0" rIns="0" bIns="0" rtlCol="0" anchor="t"/>
+          <a:lstStyle/>
+          <a:p>
+            <a:pPr algn="ctr" indent="0" marL="0">
+              <a:lnSpc>
+                <a:spcPct val="115000"/>
+              </a:lnSpc>
+              <a:buNone/>
+            </a:pPr>
+            <a:r>
+              <a:rPr lang="en-US" sz="1100" dirty="0">
+                <a:solidFill>
+                  <a:srgbClr val="5F6B78"/>
+                </a:solidFill>
+                <a:latin typeface="Noto Sans KR" pitchFamily="34" charset="0"/>
+                <a:ea typeface="Noto Sans KR" pitchFamily="34" charset="-122"/>
+                <a:cs typeface="Noto Sans KR" pitchFamily="34" charset="-120"/>
+              </a:rPr>
+              <a:t>3주</a:t>
+            </a:r>
+            <a:endParaRPr lang="en-US" sz="1100" dirty="0"/>
+          </a:p>
+        </p:txBody>
+      </p:sp>
+      <p:sp>
+        <p:nvSpPr>
+          <p:cNvPr id="10" name="Text 8"/>
+          <p:cNvSpPr txBox="1"/>
+          <p:nvPr/>
+        </p:nvSpPr>
+        <p:spPr>
+          <a:xfrm>
+            <a:off x="7132320" y="2057400"/>
+            <a:ext cx="1371600" cy="274320"/>
+          </a:xfrm>
+          <a:prstGeom prst="rect">
+            <a:avLst/>
+          </a:prstGeom>
+          <a:noFill/>
+          <a:ln/>
+        </p:spPr>
+        <p:txBody>
+          <a:bodyPr wrap="square" lIns="0" tIns="0" rIns="0" bIns="0" rtlCol="0" anchor="t"/>
+          <a:lstStyle/>
+          <a:p>
+            <a:pPr algn="ctr" indent="0" marL="0">
+              <a:lnSpc>
+                <a:spcPct val="115000"/>
+              </a:lnSpc>
+              <a:buNone/>
+            </a:pPr>
+            <a:r>
+              <a:rPr lang="en-US" sz="1100" dirty="0">
+                <a:solidFill>
+                  <a:srgbClr val="5F6B78"/>
+                </a:solidFill>
+                <a:latin typeface="Noto Sans KR" pitchFamily="34" charset="0"/>
+                <a:ea typeface="Noto Sans KR" pitchFamily="34" charset="-122"/>
+                <a:cs typeface="Noto Sans KR" pitchFamily="34" charset="-120"/>
+              </a:rPr>
+              <a:t>4주</a:t>
+            </a:r>
+            <a:endParaRPr lang="en-US" sz="1100" dirty="0"/>
+          </a:p>
+        </p:txBody>
+      </p:sp>
+      <p:sp>
+        <p:nvSpPr>
+          <p:cNvPr id="11" name="Text 9"/>
+          <p:cNvSpPr txBox="1"/>
+          <p:nvPr/>
+        </p:nvSpPr>
+        <p:spPr>
+          <a:xfrm>
+            <a:off x="8503920" y="2057400"/>
+            <a:ext cx="1371600" cy="274320"/>
+          </a:xfrm>
+          <a:prstGeom prst="rect">
+            <a:avLst/>
+          </a:prstGeom>
+          <a:noFill/>
+          <a:ln/>
+        </p:spPr>
+        <p:txBody>
+          <a:bodyPr wrap="square" lIns="0" tIns="0" rIns="0" bIns="0" rtlCol="0" anchor="t"/>
+          <a:lstStyle/>
+          <a:p>
+            <a:pPr algn="ctr" indent="0" marL="0">
+              <a:lnSpc>
+                <a:spcPct val="115000"/>
+              </a:lnSpc>
+              <a:buNone/>
+            </a:pPr>
+            <a:r>
+              <a:rPr lang="en-US" sz="1100" dirty="0">
+                <a:solidFill>
+                  <a:srgbClr val="5F6B78"/>
+                </a:solidFill>
+                <a:latin typeface="Noto Sans KR" pitchFamily="34" charset="0"/>
+                <a:ea typeface="Noto Sans KR" pitchFamily="34" charset="-122"/>
+                <a:cs typeface="Noto Sans KR" pitchFamily="34" charset="-120"/>
+              </a:rPr>
+              <a:t>5주</a:t>
+            </a:r>
+            <a:endParaRPr lang="en-US" sz="1100" dirty="0"/>
+          </a:p>
+        </p:txBody>
+      </p:sp>
+      <p:sp>
+        <p:nvSpPr>
+          <p:cNvPr id="12" name="Text 10"/>
+          <p:cNvSpPr txBox="1"/>
+          <p:nvPr/>
+        </p:nvSpPr>
+        <p:spPr>
+          <a:xfrm>
+            <a:off x="9875520" y="2057400"/>
+            <a:ext cx="1371600" cy="274320"/>
+          </a:xfrm>
+          <a:prstGeom prst="rect">
+            <a:avLst/>
+          </a:prstGeom>
+          <a:noFill/>
+          <a:ln/>
+        </p:spPr>
+        <p:txBody>
+          <a:bodyPr wrap="square" lIns="0" tIns="0" rIns="0" bIns="0" rtlCol="0" anchor="t"/>
+          <a:lstStyle/>
+          <a:p>
+            <a:pPr algn="ctr" indent="0" marL="0">
+              <a:lnSpc>
+                <a:spcPct val="115000"/>
+              </a:lnSpc>
+              <a:buNone/>
+            </a:pPr>
+            <a:r>
+              <a:rPr lang="en-US" sz="1100" dirty="0">
+                <a:solidFill>
+                  <a:srgbClr val="5F6B78"/>
+                </a:solidFill>
+                <a:latin typeface="Noto Sans KR" pitchFamily="34" charset="0"/>
+                <a:ea typeface="Noto Sans KR" pitchFamily="34" charset="-122"/>
+                <a:cs typeface="Noto Sans KR" pitchFamily="34" charset="-120"/>
+              </a:rPr>
+              <a:t>6주</a:t>
+            </a:r>
+            <a:endParaRPr lang="en-US" sz="1100" dirty="0"/>
+          </a:p>
+        </p:txBody>
+      </p:sp>
+      <p:sp>
+        <p:nvSpPr>
+          <p:cNvPr id="13" name="Text 11"/>
+          <p:cNvSpPr txBox="1"/>
+          <p:nvPr/>
+        </p:nvSpPr>
+        <p:spPr>
+          <a:xfrm>
+            <a:off x="548640" y="2377440"/>
+            <a:ext cx="2377440" cy="566928"/>
+          </a:xfrm>
+          <a:prstGeom prst="rect">
+            <a:avLst/>
+          </a:prstGeom>
+          <a:noFill/>
+          <a:ln/>
+        </p:spPr>
+        <p:txBody>
+          <a:bodyPr wrap="square" lIns="0" tIns="0" rIns="0" bIns="0" rtlCol="0" anchor="ctr"/>
+          <a:lstStyle/>
+          <a:p>
+            <a:pPr algn="l" indent="0" marL="0">
+              <a:lnSpc>
+                <a:spcPct val="115000"/>
+              </a:lnSpc>
+              <a:buNone/>
+            </a:pPr>
+            <a:r>
+              <a:rPr lang="en-US" sz="1500" b="1" dirty="0">
+                <a:solidFill>
+                  <a:srgbClr val="1E242B"/>
+                </a:solidFill>
+                <a:latin typeface="Noto Sans KR" pitchFamily="34" charset="0"/>
+                <a:ea typeface="Noto Sans KR" pitchFamily="34" charset="-122"/>
+                <a:cs typeface="Noto Sans KR" pitchFamily="34" charset="-120"/>
+              </a:rPr>
+              <a:t>복잡한 기획</a:t>
+            </a:r>
+            <a:endParaRPr lang="en-US" sz="1500" dirty="0"/>
+          </a:p>
+        </p:txBody>
+      </p:sp>
+      <p:sp>
+        <p:nvSpPr>
+          <p:cNvPr id="14" name="Shape 12"/>
+          <p:cNvSpPr/>
+          <p:nvPr/>
+        </p:nvSpPr>
+        <p:spPr>
+          <a:xfrm>
+            <a:off x="3017520" y="2377440"/>
+            <a:ext cx="6858000" cy="566928"/>
+          </a:xfrm>
+          <a:prstGeom prst="rect">
+            <a:avLst/>
+          </a:prstGeom>
+          <a:solidFill>
+            <a:srgbClr val="A8B0B9"/>
+          </a:solidFill>
+          <a:ln/>
+        </p:spPr>
+      </p:sp>
+      <p:sp>
+        <p:nvSpPr>
+          <p:cNvPr id="15" name="Text 13"/>
+          <p:cNvSpPr txBox="1"/>
+          <p:nvPr/>
+        </p:nvSpPr>
+        <p:spPr>
+          <a:xfrm>
+            <a:off x="3017520" y="2377440"/>
+            <a:ext cx="6858000" cy="566928"/>
+          </a:xfrm>
+          <a:prstGeom prst="rect">
+            <a:avLst/>
+          </a:prstGeom>
+          <a:noFill/>
+          <a:ln/>
+        </p:spPr>
+        <p:txBody>
+          <a:bodyPr wrap="square" lIns="0" tIns="0" rIns="0" bIns="0" rtlCol="0" anchor="ctr"/>
+          <a:lstStyle/>
+          <a:p>
+            <a:pPr algn="ctr" indent="0" marL="0">
+              <a:lnSpc>
+                <a:spcPct val="115000"/>
+              </a:lnSpc>
+              <a:buNone/>
+            </a:pPr>
+            <a:r>
+              <a:rPr lang="en-US" sz="1300" b="1" dirty="0">
+                <a:solidFill>
+                  <a:srgbClr val="FFFFFF"/>
+                </a:solidFill>
+                <a:latin typeface="Noto Sans KR" pitchFamily="34" charset="0"/>
+                <a:ea typeface="Noto Sans KR" pitchFamily="34" charset="-122"/>
+                <a:cs typeface="Noto Sans KR" pitchFamily="34" charset="-120"/>
+              </a:rPr>
+              <a:t>규칙 · 버그</a:t>
+            </a:r>
+            <a:endParaRPr lang="en-US" sz="1300" dirty="0"/>
+          </a:p>
+        </p:txBody>
+      </p:sp>
+      <p:sp>
+        <p:nvSpPr>
+          <p:cNvPr id="16" name="Shape 14"/>
+          <p:cNvSpPr/>
+          <p:nvPr/>
+        </p:nvSpPr>
+        <p:spPr>
+          <a:xfrm>
+            <a:off x="9875520" y="2377440"/>
+            <a:ext cx="1371600" cy="566928"/>
+          </a:xfrm>
+          <a:prstGeom prst="rect">
+            <a:avLst/>
+          </a:prstGeom>
+          <a:solidFill>
+            <a:srgbClr val="E07A2E"/>
+          </a:solidFill>
+          <a:ln/>
+        </p:spPr>
+      </p:sp>
+      <p:sp>
+        <p:nvSpPr>
+          <p:cNvPr id="17" name="Text 15"/>
+          <p:cNvSpPr txBox="1"/>
+          <p:nvPr/>
+        </p:nvSpPr>
+        <p:spPr>
+          <a:xfrm>
+            <a:off x="9875520" y="2377440"/>
+            <a:ext cx="1371600" cy="566928"/>
+          </a:xfrm>
+          <a:prstGeom prst="rect">
+            <a:avLst/>
+          </a:prstGeom>
+          <a:noFill/>
+          <a:ln/>
+        </p:spPr>
+        <p:txBody>
+          <a:bodyPr wrap="square" lIns="0" tIns="0" rIns="0" bIns="0" rtlCol="0" anchor="ctr"/>
+          <a:lstStyle/>
+          <a:p>
+            <a:pPr algn="ctr" indent="0" marL="0">
+              <a:lnSpc>
+                <a:spcPct val="115000"/>
+              </a:lnSpc>
+              <a:buNone/>
+            </a:pPr>
+            <a:r>
+              <a:rPr lang="en-US" sz="1300" b="1" dirty="0">
+                <a:solidFill>
+                  <a:srgbClr val="FFFFFF"/>
+                </a:solidFill>
+                <a:latin typeface="Noto Sans KR" pitchFamily="34" charset="0"/>
+                <a:ea typeface="Noto Sans KR" pitchFamily="34" charset="-122"/>
+                <a:cs typeface="Noto Sans KR" pitchFamily="34" charset="-120"/>
+              </a:rPr>
+              <a:t>꾸미기</a:t>
+            </a:r>
+            <a:endParaRPr lang="en-US" sz="1300" dirty="0"/>
+          </a:p>
+        </p:txBody>
+      </p:sp>
+      <p:sp>
+        <p:nvSpPr>
+          <p:cNvPr id="18" name="Text 16"/>
+          <p:cNvSpPr txBox="1"/>
+          <p:nvPr/>
+        </p:nvSpPr>
+        <p:spPr>
+          <a:xfrm>
+            <a:off x="3017520" y="2980944"/>
+            <a:ext cx="8229600" cy="274320"/>
+          </a:xfrm>
+          <a:prstGeom prst="rect">
+            <a:avLst/>
+          </a:prstGeom>
+          <a:noFill/>
+          <a:ln/>
+        </p:spPr>
+        <p:txBody>
+          <a:bodyPr wrap="square" lIns="0" tIns="0" rIns="0" bIns="0" rtlCol="0" anchor="t"/>
+          <a:lstStyle/>
+          <a:p>
+            <a:pPr algn="l" indent="0" marL="0">
+              <a:lnSpc>
+                <a:spcPct val="115000"/>
+              </a:lnSpc>
+              <a:buNone/>
+            </a:pPr>
+            <a:r>
+              <a:rPr lang="en-US" sz="1200" dirty="0">
+                <a:solidFill>
+                  <a:srgbClr val="5F6B78"/>
+                </a:solidFill>
+                <a:latin typeface="Noto Sans KR" pitchFamily="34" charset="0"/>
+                <a:ea typeface="Noto Sans KR" pitchFamily="34" charset="-122"/>
+                <a:cs typeface="Noto Sans KR" pitchFamily="34" charset="-120"/>
+              </a:rPr>
+              <a:t>규칙 다섯 개 · 적 여러 종류 · 스테이지 여러 개 → 회색 화면으로 시연</a:t>
+            </a:r>
+            <a:endParaRPr lang="en-US" sz="1200" dirty="0"/>
+          </a:p>
+        </p:txBody>
+      </p:sp>
+      <p:sp>
+        <p:nvSpPr>
+          <p:cNvPr id="19" name="Text 17"/>
+          <p:cNvSpPr txBox="1"/>
+          <p:nvPr/>
+        </p:nvSpPr>
+        <p:spPr>
+          <a:xfrm>
+            <a:off x="548640" y="3337560"/>
+            <a:ext cx="2377440" cy="566928"/>
+          </a:xfrm>
+          <a:prstGeom prst="rect">
+            <a:avLst/>
+          </a:prstGeom>
+          <a:noFill/>
+          <a:ln/>
+        </p:spPr>
+        <p:txBody>
+          <a:bodyPr wrap="square" lIns="0" tIns="0" rIns="0" bIns="0" rtlCol="0" anchor="ctr"/>
+          <a:lstStyle/>
+          <a:p>
+            <a:pPr algn="l" indent="0" marL="0">
+              <a:lnSpc>
+                <a:spcPct val="115000"/>
+              </a:lnSpc>
+              <a:buNone/>
+            </a:pPr>
+            <a:r>
+              <a:rPr lang="en-US" sz="1500" b="1" dirty="0">
+                <a:solidFill>
+                  <a:srgbClr val="1E242B"/>
+                </a:solidFill>
+                <a:latin typeface="Noto Sans KR" pitchFamily="34" charset="0"/>
+                <a:ea typeface="Noto Sans KR" pitchFamily="34" charset="-122"/>
+                <a:cs typeface="Noto Sans KR" pitchFamily="34" charset="-120"/>
+              </a:rPr>
+              <a:t>단순한 기획</a:t>
+            </a:r>
+            <a:endParaRPr lang="en-US" sz="1500" dirty="0"/>
+          </a:p>
+        </p:txBody>
+      </p:sp>
+      <p:sp>
+        <p:nvSpPr>
+          <p:cNvPr id="20" name="Shape 18"/>
+          <p:cNvSpPr/>
+          <p:nvPr/>
+        </p:nvSpPr>
+        <p:spPr>
+          <a:xfrm>
+            <a:off x="3017520" y="3337560"/>
+            <a:ext cx="2743200" cy="566928"/>
+          </a:xfrm>
+          <a:prstGeom prst="rect">
+            <a:avLst/>
+          </a:prstGeom>
+          <a:solidFill>
+            <a:srgbClr val="A8B0B9"/>
+          </a:solidFill>
+          <a:ln/>
+        </p:spPr>
+      </p:sp>
+      <p:sp>
+        <p:nvSpPr>
+          <p:cNvPr id="21" name="Text 19"/>
+          <p:cNvSpPr txBox="1"/>
+          <p:nvPr/>
+        </p:nvSpPr>
+        <p:spPr>
+          <a:xfrm>
+            <a:off x="3017520" y="3337560"/>
+            <a:ext cx="2743200" cy="566928"/>
+          </a:xfrm>
+          <a:prstGeom prst="rect">
+            <a:avLst/>
+          </a:prstGeom>
+          <a:noFill/>
+          <a:ln/>
+        </p:spPr>
+        <p:txBody>
+          <a:bodyPr wrap="square" lIns="0" tIns="0" rIns="0" bIns="0" rtlCol="0" anchor="ctr"/>
+          <a:lstStyle/>
+          <a:p>
+            <a:pPr algn="ctr" indent="0" marL="0">
+              <a:lnSpc>
+                <a:spcPct val="115000"/>
+              </a:lnSpc>
+              <a:buNone/>
+            </a:pPr>
+            <a:r>
+              <a:rPr lang="en-US" sz="1300" b="1" dirty="0">
+                <a:solidFill>
+                  <a:srgbClr val="FFFFFF"/>
+                </a:solidFill>
+                <a:latin typeface="Noto Sans KR" pitchFamily="34" charset="0"/>
+                <a:ea typeface="Noto Sans KR" pitchFamily="34" charset="-122"/>
+                <a:cs typeface="Noto Sans KR" pitchFamily="34" charset="-120"/>
+              </a:rPr>
+              <a:t>규칙 · 버그</a:t>
+            </a:r>
+            <a:endParaRPr lang="en-US" sz="1300" dirty="0"/>
+          </a:p>
+        </p:txBody>
+      </p:sp>
+      <p:sp>
+        <p:nvSpPr>
+          <p:cNvPr id="22" name="Shape 20"/>
+          <p:cNvSpPr/>
+          <p:nvPr/>
+        </p:nvSpPr>
+        <p:spPr>
+          <a:xfrm>
+            <a:off x="5760720" y="3337560"/>
+            <a:ext cx="5486400" cy="566928"/>
+          </a:xfrm>
+          <a:prstGeom prst="rect">
+            <a:avLst/>
+          </a:prstGeom>
+          <a:solidFill>
+            <a:srgbClr val="E07A2E"/>
+          </a:solidFill>
+          <a:ln/>
+        </p:spPr>
+      </p:sp>
+      <p:sp>
+        <p:nvSpPr>
+          <p:cNvPr id="23" name="Text 21"/>
+          <p:cNvSpPr txBox="1"/>
+          <p:nvPr/>
+        </p:nvSpPr>
+        <p:spPr>
+          <a:xfrm>
+            <a:off x="5760720" y="3337560"/>
+            <a:ext cx="5486400" cy="566928"/>
+          </a:xfrm>
+          <a:prstGeom prst="rect">
+            <a:avLst/>
+          </a:prstGeom>
+          <a:noFill/>
+          <a:ln/>
+        </p:spPr>
+        <p:txBody>
+          <a:bodyPr wrap="square" lIns="0" tIns="0" rIns="0" bIns="0" rtlCol="0" anchor="ctr"/>
+          <a:lstStyle/>
+          <a:p>
+            <a:pPr algn="ctr" indent="0" marL="0">
+              <a:lnSpc>
+                <a:spcPct val="115000"/>
+              </a:lnSpc>
+              <a:buNone/>
+            </a:pPr>
+            <a:r>
+              <a:rPr lang="en-US" sz="1300" b="1" dirty="0">
+                <a:solidFill>
+                  <a:srgbClr val="FFFFFF"/>
+                </a:solidFill>
+                <a:latin typeface="Noto Sans KR" pitchFamily="34" charset="0"/>
+                <a:ea typeface="Noto Sans KR" pitchFamily="34" charset="-122"/>
+                <a:cs typeface="Noto Sans KR" pitchFamily="34" charset="-120"/>
+              </a:rPr>
+              <a:t>꾸미기</a:t>
+            </a:r>
+            <a:endParaRPr lang="en-US" sz="1300" dirty="0"/>
+          </a:p>
+        </p:txBody>
+      </p:sp>
+      <p:sp>
+        <p:nvSpPr>
+          <p:cNvPr id="24" name="Text 22"/>
+          <p:cNvSpPr txBox="1"/>
+          <p:nvPr/>
+        </p:nvSpPr>
+        <p:spPr>
+          <a:xfrm>
+            <a:off x="3017520" y="3941064"/>
+            <a:ext cx="8229600" cy="274320"/>
+          </a:xfrm>
+          <a:prstGeom prst="rect">
+            <a:avLst/>
+          </a:prstGeom>
+          <a:noFill/>
+          <a:ln/>
+        </p:spPr>
+        <p:txBody>
+          <a:bodyPr wrap="square" lIns="0" tIns="0" rIns="0" bIns="0" rtlCol="0" anchor="t"/>
+          <a:lstStyle/>
+          <a:p>
+            <a:pPr algn="l" indent="0" marL="0">
+              <a:lnSpc>
+                <a:spcPct val="115000"/>
+              </a:lnSpc>
+              <a:buNone/>
+            </a:pPr>
+            <a:r>
+              <a:rPr lang="en-US" sz="1200" dirty="0">
+                <a:solidFill>
+                  <a:srgbClr val="5F6B78"/>
+                </a:solidFill>
+                <a:latin typeface="Noto Sans KR" pitchFamily="34" charset="0"/>
+                <a:ea typeface="Noto Sans KR" pitchFamily="34" charset="-122"/>
+                <a:cs typeface="Noto Sans KR" pitchFamily="34" charset="-120"/>
+              </a:rPr>
+              <a:t>핵심 동작 하나 · 오브젝트 몇 종류 → 남은 4주로 에셋 · 조명 · 타이틀</a:t>
+            </a:r>
+            <a:endParaRPr lang="en-US" sz="1200" dirty="0"/>
+          </a:p>
+        </p:txBody>
+      </p:sp>
+      <p:sp>
+        <p:nvSpPr>
+          <p:cNvPr id="25" name="Shape 23"/>
+          <p:cNvSpPr/>
+          <p:nvPr/>
+        </p:nvSpPr>
+        <p:spPr>
+          <a:xfrm>
+            <a:off x="548640" y="4343400"/>
+            <a:ext cx="3547872" cy="1097280"/>
+          </a:xfrm>
+          <a:prstGeom prst="roundRect">
+            <a:avLst>
+              <a:gd name="adj" fmla="val 10000"/>
+            </a:avLst>
+          </a:prstGeom>
+          <a:solidFill>
+            <a:srgbClr val="F3F5F7"/>
+          </a:solidFill>
+          <a:ln/>
+        </p:spPr>
+      </p:sp>
+      <p:sp>
+        <p:nvSpPr>
+          <p:cNvPr id="26" name="Text 24"/>
+          <p:cNvSpPr txBox="1"/>
+          <p:nvPr/>
+        </p:nvSpPr>
+        <p:spPr>
+          <a:xfrm>
+            <a:off x="731520" y="4407408"/>
+            <a:ext cx="3200400" cy="365760"/>
+          </a:xfrm>
+          <a:prstGeom prst="rect">
+            <a:avLst/>
+          </a:prstGeom>
+          <a:noFill/>
+          <a:ln/>
+        </p:spPr>
+        <p:txBody>
+          <a:bodyPr wrap="square" lIns="0" tIns="0" rIns="0" bIns="0" rtlCol="0" anchor="t"/>
+          <a:lstStyle/>
+          <a:p>
+            <a:pPr algn="l" indent="0" marL="0">
+              <a:lnSpc>
+                <a:spcPct val="115000"/>
+              </a:lnSpc>
+              <a:buNone/>
+            </a:pPr>
+            <a:r>
+              <a:rPr lang="en-US" sz="1500" b="1" dirty="0">
+                <a:solidFill>
+                  <a:srgbClr val="1E242B"/>
+                </a:solidFill>
+                <a:latin typeface="Noto Sans KR" pitchFamily="34" charset="0"/>
+                <a:ea typeface="Noto Sans KR" pitchFamily="34" charset="-122"/>
+                <a:cs typeface="Noto Sans KR" pitchFamily="34" charset="-120"/>
+              </a:rPr>
+              <a:t>시간이 남는다</a:t>
+            </a:r>
+            <a:endParaRPr lang="en-US" sz="1500" dirty="0"/>
+          </a:p>
+        </p:txBody>
+      </p:sp>
+      <p:sp>
+        <p:nvSpPr>
+          <p:cNvPr id="27" name="Text 25"/>
+          <p:cNvSpPr txBox="1"/>
+          <p:nvPr/>
+        </p:nvSpPr>
+        <p:spPr>
+          <a:xfrm>
+            <a:off x="731520" y="4773168"/>
+            <a:ext cx="3200400" cy="640080"/>
+          </a:xfrm>
+          <a:prstGeom prst="rect">
+            <a:avLst/>
+          </a:prstGeom>
+          <a:noFill/>
+          <a:ln/>
+        </p:spPr>
+        <p:txBody>
+          <a:bodyPr wrap="square" lIns="0" tIns="0" rIns="0" bIns="0" rtlCol="0" anchor="t"/>
+          <a:lstStyle/>
+          <a:p>
+            <a:pPr algn="l" indent="0" marL="0">
+              <a:lnSpc>
+                <a:spcPct val="115000"/>
+              </a:lnSpc>
+              <a:buNone/>
+            </a:pPr>
+            <a:r>
+              <a:rPr lang="en-US" sz="1250" dirty="0">
+                <a:solidFill>
+                  <a:srgbClr val="3A434D"/>
+                </a:solidFill>
+                <a:latin typeface="Noto Sans KR" pitchFamily="34" charset="0"/>
+                <a:ea typeface="Noto Sans KR" pitchFamily="34" charset="-122"/>
+                <a:cs typeface="Noto Sans KR" pitchFamily="34" charset="-120"/>
+              </a:rPr>
+              <a:t>규칙이 일찍 끝나야 꾸밀 시간이 생깁니다</a:t>
+            </a:r>
+            <a:endParaRPr lang="en-US" sz="1250" dirty="0"/>
+          </a:p>
+        </p:txBody>
+      </p:sp>
+      <p:sp>
+        <p:nvSpPr>
+          <p:cNvPr id="28" name="Shape 26"/>
+          <p:cNvSpPr/>
+          <p:nvPr/>
+        </p:nvSpPr>
+        <p:spPr>
+          <a:xfrm>
+            <a:off x="4297680" y="4343400"/>
+            <a:ext cx="3547872" cy="1097280"/>
+          </a:xfrm>
+          <a:prstGeom prst="roundRect">
+            <a:avLst>
+              <a:gd name="adj" fmla="val 10000"/>
+            </a:avLst>
+          </a:prstGeom>
+          <a:solidFill>
+            <a:srgbClr val="F3F5F7"/>
+          </a:solidFill>
+          <a:ln/>
+        </p:spPr>
+      </p:sp>
+      <p:sp>
+        <p:nvSpPr>
+          <p:cNvPr id="29" name="Text 27"/>
+          <p:cNvSpPr txBox="1"/>
+          <p:nvPr/>
+        </p:nvSpPr>
+        <p:spPr>
+          <a:xfrm>
+            <a:off x="4480560" y="4407408"/>
+            <a:ext cx="3200400" cy="365760"/>
+          </a:xfrm>
+          <a:prstGeom prst="rect">
+            <a:avLst/>
+          </a:prstGeom>
+          <a:noFill/>
+          <a:ln/>
+        </p:spPr>
+        <p:txBody>
+          <a:bodyPr wrap="square" lIns="0" tIns="0" rIns="0" bIns="0" rtlCol="0" anchor="t"/>
+          <a:lstStyle/>
+          <a:p>
+            <a:pPr algn="l" indent="0" marL="0">
+              <a:lnSpc>
+                <a:spcPct val="115000"/>
+              </a:lnSpc>
+              <a:buNone/>
+            </a:pPr>
+            <a:r>
+              <a:rPr lang="en-US" sz="1500" b="1" dirty="0">
+                <a:solidFill>
+                  <a:srgbClr val="1E242B"/>
+                </a:solidFill>
+                <a:latin typeface="Noto Sans KR" pitchFamily="34" charset="0"/>
+                <a:ea typeface="Noto Sans KR" pitchFamily="34" charset="-122"/>
+                <a:cs typeface="Noto Sans KR" pitchFamily="34" charset="-120"/>
+              </a:rPr>
+              <a:t>스타일을 맞추기 쉽다</a:t>
+            </a:r>
+            <a:endParaRPr lang="en-US" sz="1500" dirty="0"/>
+          </a:p>
+        </p:txBody>
+      </p:sp>
+      <p:sp>
+        <p:nvSpPr>
+          <p:cNvPr id="30" name="Text 28"/>
+          <p:cNvSpPr txBox="1"/>
+          <p:nvPr/>
+        </p:nvSpPr>
+        <p:spPr>
+          <a:xfrm>
+            <a:off x="4480560" y="4773168"/>
+            <a:ext cx="3200400" cy="640080"/>
+          </a:xfrm>
+          <a:prstGeom prst="rect">
+            <a:avLst/>
+          </a:prstGeom>
+          <a:noFill/>
+          <a:ln/>
+        </p:spPr>
+        <p:txBody>
+          <a:bodyPr wrap="square" lIns="0" tIns="0" rIns="0" bIns="0" rtlCol="0" anchor="t"/>
+          <a:lstStyle/>
+          <a:p>
+            <a:pPr algn="l" indent="0" marL="0">
+              <a:lnSpc>
+                <a:spcPct val="115000"/>
+              </a:lnSpc>
+              <a:buNone/>
+            </a:pPr>
+            <a:r>
+              <a:rPr lang="en-US" sz="1250" dirty="0">
+                <a:solidFill>
+                  <a:srgbClr val="3A434D"/>
+                </a:solidFill>
+                <a:latin typeface="Noto Sans KR" pitchFamily="34" charset="0"/>
+                <a:ea typeface="Noto Sans KR" pitchFamily="34" charset="-122"/>
+                <a:cs typeface="Noto Sans KR" pitchFamily="34" charset="-120"/>
+              </a:rPr>
+              <a:t>등장하는 물체 종류가 적을수록 어울리는 에셋을 찾기 쉽습니다</a:t>
+            </a:r>
+            <a:endParaRPr lang="en-US" sz="1250" dirty="0"/>
+          </a:p>
+        </p:txBody>
+      </p:sp>
+      <p:sp>
+        <p:nvSpPr>
+          <p:cNvPr id="31" name="Shape 29"/>
+          <p:cNvSpPr/>
+          <p:nvPr/>
+        </p:nvSpPr>
+        <p:spPr>
+          <a:xfrm>
+            <a:off x="8046720" y="4343400"/>
+            <a:ext cx="3547872" cy="1097280"/>
+          </a:xfrm>
+          <a:prstGeom prst="roundRect">
+            <a:avLst>
+              <a:gd name="adj" fmla="val 10000"/>
+            </a:avLst>
+          </a:prstGeom>
+          <a:solidFill>
+            <a:srgbClr val="F3F5F7"/>
+          </a:solidFill>
+          <a:ln/>
+        </p:spPr>
+      </p:sp>
+      <p:sp>
+        <p:nvSpPr>
+          <p:cNvPr id="32" name="Text 30"/>
+          <p:cNvSpPr txBox="1"/>
+          <p:nvPr/>
+        </p:nvSpPr>
+        <p:spPr>
+          <a:xfrm>
+            <a:off x="8229600" y="4407408"/>
+            <a:ext cx="3200400" cy="365760"/>
+          </a:xfrm>
+          <a:prstGeom prst="rect">
+            <a:avLst/>
+          </a:prstGeom>
+          <a:noFill/>
+          <a:ln/>
+        </p:spPr>
+        <p:txBody>
+          <a:bodyPr wrap="square" lIns="0" tIns="0" rIns="0" bIns="0" rtlCol="0" anchor="t"/>
+          <a:lstStyle/>
+          <a:p>
+            <a:pPr algn="l" indent="0" marL="0">
+              <a:lnSpc>
+                <a:spcPct val="115000"/>
+              </a:lnSpc>
+              <a:buNone/>
+            </a:pPr>
+            <a:r>
+              <a:rPr lang="en-US" sz="1500" b="1" dirty="0">
+                <a:solidFill>
+                  <a:srgbClr val="1E242B"/>
+                </a:solidFill>
+                <a:latin typeface="Noto Sans KR" pitchFamily="34" charset="0"/>
+                <a:ea typeface="Noto Sans KR" pitchFamily="34" charset="-122"/>
+                <a:cs typeface="Noto Sans KR" pitchFamily="34" charset="-120"/>
+              </a:rPr>
+              <a:t>버그가 적다</a:t>
+            </a:r>
+            <a:endParaRPr lang="en-US" sz="1500" dirty="0"/>
+          </a:p>
+        </p:txBody>
+      </p:sp>
+      <p:sp>
+        <p:nvSpPr>
+          <p:cNvPr id="33" name="Text 31"/>
+          <p:cNvSpPr txBox="1"/>
+          <p:nvPr/>
+        </p:nvSpPr>
+        <p:spPr>
+          <a:xfrm>
+            <a:off x="8229600" y="4773168"/>
+            <a:ext cx="3200400" cy="640080"/>
+          </a:xfrm>
+          <a:prstGeom prst="rect">
+            <a:avLst/>
+          </a:prstGeom>
+          <a:noFill/>
+          <a:ln/>
+        </p:spPr>
+        <p:txBody>
+          <a:bodyPr wrap="square" lIns="0" tIns="0" rIns="0" bIns="0" rtlCol="0" anchor="t"/>
+          <a:lstStyle/>
+          <a:p>
+            <a:pPr algn="l" indent="0" marL="0">
+              <a:lnSpc>
+                <a:spcPct val="115000"/>
+              </a:lnSpc>
+              <a:buNone/>
+            </a:pPr>
+            <a:r>
+              <a:rPr lang="en-US" sz="1250" dirty="0">
+                <a:solidFill>
+                  <a:srgbClr val="3A434D"/>
+                </a:solidFill>
+                <a:latin typeface="Noto Sans KR" pitchFamily="34" charset="0"/>
+                <a:ea typeface="Noto Sans KR" pitchFamily="34" charset="-122"/>
+                <a:cs typeface="Noto Sans KR" pitchFamily="34" charset="-120"/>
+              </a:rPr>
+              <a:t>기능이 적을수록 시연 날 멈출 일이 줄어듭니다</a:t>
+            </a:r>
+            <a:endParaRPr lang="en-US" sz="1250" dirty="0"/>
+          </a:p>
+        </p:txBody>
+      </p:sp>
+      <p:sp>
+        <p:nvSpPr>
+          <p:cNvPr id="34" name="Shape 32"/>
+          <p:cNvSpPr/>
+          <p:nvPr/>
+        </p:nvSpPr>
+        <p:spPr>
+          <a:xfrm>
+            <a:off x="548640" y="5577840"/>
+            <a:ext cx="11091672" cy="640080"/>
+          </a:xfrm>
+          <a:prstGeom prst="roundRect">
+            <a:avLst>
+              <a:gd name="adj" fmla="val 14286"/>
+            </a:avLst>
+          </a:prstGeom>
+          <a:solidFill>
+            <a:srgbClr val="FDF0E4"/>
+          </a:solidFill>
+          <a:ln/>
+        </p:spPr>
+      </p:sp>
+      <p:sp>
+        <p:nvSpPr>
+          <p:cNvPr id="35" name="Text 33"/>
+          <p:cNvSpPr txBox="1"/>
+          <p:nvPr/>
+        </p:nvSpPr>
+        <p:spPr>
+          <a:xfrm>
+            <a:off x="777240" y="5705856"/>
+            <a:ext cx="1463040" cy="292608"/>
+          </a:xfrm>
+          <a:prstGeom prst="rect">
+            <a:avLst/>
+          </a:prstGeom>
+          <a:noFill/>
+          <a:ln/>
+        </p:spPr>
+        <p:txBody>
+          <a:bodyPr wrap="square" lIns="0" tIns="0" rIns="0" bIns="0" rtlCol="0" anchor="t"/>
+          <a:lstStyle/>
+          <a:p>
+            <a:pPr algn="l" indent="0" marL="0">
+              <a:lnSpc>
+                <a:spcPct val="115000"/>
+              </a:lnSpc>
+              <a:buNone/>
+            </a:pPr>
+            <a:r>
+              <a:rPr lang="en-US" sz="1300" b="1" dirty="0">
+                <a:solidFill>
+                  <a:srgbClr val="E07A2E"/>
+                </a:solidFill>
+                <a:latin typeface="Noto Sans KR" pitchFamily="34" charset="0"/>
+                <a:ea typeface="Noto Sans KR" pitchFamily="34" charset="-122"/>
+                <a:cs typeface="Noto Sans KR" pitchFamily="34" charset="-120"/>
+              </a:rPr>
+              <a:t>핵심 요약</a:t>
+            </a:r>
+            <a:endParaRPr lang="en-US" sz="1300" dirty="0"/>
+          </a:p>
+        </p:txBody>
+      </p:sp>
+      <p:sp>
+        <p:nvSpPr>
+          <p:cNvPr id="36" name="Shape 34"/>
+          <p:cNvSpPr/>
+          <p:nvPr/>
+        </p:nvSpPr>
+        <p:spPr>
+          <a:xfrm>
+            <a:off x="2176272" y="5771388"/>
+            <a:ext cx="73152" cy="73152"/>
+          </a:xfrm>
+          <a:prstGeom prst="rect">
+            <a:avLst/>
+          </a:prstGeom>
+          <a:solidFill>
+            <a:srgbClr val="E07A2E"/>
+          </a:solidFill>
+          <a:ln/>
+        </p:spPr>
+      </p:sp>
+      <p:sp>
+        <p:nvSpPr>
+          <p:cNvPr id="37" name="Text 35"/>
+          <p:cNvSpPr txBox="1"/>
+          <p:nvPr/>
+        </p:nvSpPr>
+        <p:spPr>
+          <a:xfrm>
+            <a:off x="2368296" y="5696712"/>
+            <a:ext cx="9089136" cy="469392"/>
+          </a:xfrm>
+          <a:prstGeom prst="rect">
+            <a:avLst/>
+          </a:prstGeom>
+          <a:noFill/>
+          <a:ln/>
+        </p:spPr>
+        <p:txBody>
+          <a:bodyPr wrap="square" lIns="0" tIns="0" rIns="0" bIns="0" rtlCol="0" anchor="t"/>
+          <a:lstStyle/>
+          <a:p>
+            <a:pPr algn="l" indent="0" marL="0">
+              <a:lnSpc>
+                <a:spcPct val="112000"/>
+              </a:lnSpc>
+              <a:buNone/>
+            </a:pPr>
+            <a:r>
+              <a:rPr lang="en-US" sz="1400" b="1" dirty="0">
+                <a:solidFill>
+                  <a:srgbClr val="3A434D"/>
+                </a:solidFill>
+                <a:latin typeface="Noto Sans KR" pitchFamily="34" charset="0"/>
+                <a:ea typeface="Noto Sans KR" pitchFamily="34" charset="-122"/>
+                <a:cs typeface="Noto Sans KR" pitchFamily="34" charset="-120"/>
+              </a:rPr>
+              <a:t>규칙 하나 + 예쁜 화면</a:t>
+            </a:r>
+            <a:pPr algn="l" indent="0" marL="0">
+              <a:lnSpc>
+                <a:spcPct val="112000"/>
+              </a:lnSpc>
+              <a:buNone/>
+            </a:pPr>
+            <a:r>
+              <a:rPr lang="en-US" sz="1400" dirty="0">
+                <a:solidFill>
+                  <a:srgbClr val="3A434D"/>
+                </a:solidFill>
+                <a:latin typeface="Noto Sans KR" pitchFamily="34" charset="0"/>
+                <a:ea typeface="Noto Sans KR" pitchFamily="34" charset="-122"/>
+                <a:cs typeface="Noto Sans KR" pitchFamily="34" charset="-120"/>
+              </a:rPr>
+              <a:t>이 </a:t>
+            </a:r>
+            <a:pPr algn="l" indent="0" marL="0">
+              <a:lnSpc>
+                <a:spcPct val="112000"/>
+              </a:lnSpc>
+              <a:buNone/>
+            </a:pPr>
+            <a:r>
+              <a:rPr lang="en-US" sz="1400" b="1" dirty="0">
+                <a:solidFill>
+                  <a:srgbClr val="3A434D"/>
+                </a:solidFill>
+                <a:latin typeface="Noto Sans KR" pitchFamily="34" charset="0"/>
+                <a:ea typeface="Noto Sans KR" pitchFamily="34" charset="-122"/>
+                <a:cs typeface="Noto Sans KR" pitchFamily="34" charset="-120"/>
+              </a:rPr>
+              <a:t>규칙 다섯 + 회색 화면</a:t>
+            </a:r>
+            <a:pPr algn="l" indent="0" marL="0">
+              <a:lnSpc>
+                <a:spcPct val="112000"/>
+              </a:lnSpc>
+              <a:buNone/>
+            </a:pPr>
+            <a:r>
+              <a:rPr lang="en-US" sz="1400" dirty="0">
+                <a:solidFill>
+                  <a:srgbClr val="3A434D"/>
+                </a:solidFill>
+                <a:latin typeface="Noto Sans KR" pitchFamily="34" charset="0"/>
+                <a:ea typeface="Noto Sans KR" pitchFamily="34" charset="-122"/>
+                <a:cs typeface="Noto Sans KR" pitchFamily="34" charset="-120"/>
+              </a:rPr>
+              <a:t>보다 훨씬 좋은 게임으로 보입니다. 기획은 줄이고, 꾸미기에 시간을 쓰세요.</a:t>
+            </a:r>
+            <a:endParaRPr lang="en-US" sz="1400" dirty="0"/>
+          </a:p>
+        </p:txBody>
+      </p:sp>
+      <p:sp>
+        <p:nvSpPr>
+          <p:cNvPr id="25" name="Slide Number Placeholder 0"/>
+          <p:cNvSpPr>
+            <a:spLocks noGrp="1"/>
+          </p:cNvSpPr>
+          <p:nvPr>
+            <p:ph type="sldNum" sz="quarter" idx="4294967295"/>
+          </p:nvPr>
+        </p:nvSpPr>
+        <p:spPr>
+          <a:xfrm>
+            <a:off x="11155680" y="6446520"/>
+            <a:ext cx="502920" cy="256032"/>
+          </a:xfrm>
+          <a:prstGeom prst="rect">
+            <a:avLst/>
+          </a:prstGeom>
+          <a:extLst>
+            <a:ext uri="{C572A759-6A51-4108-AA02-DFA0A04FC94B}">
+              <ma14:wrappingTextBoxFlag xmlns:ma14="http://schemas.microsoft.com/office/mac/drawingml/2011/main" val="0"/>
+            </a:ext>
+          </a:extLst>
+        </p:spPr>
+        <p:txBody>
+          <a:bodyPr/>
+          <a:lstStyle>
+            <a:lvl1pPr>
+              <a:defRPr sz="1000">
+                <a:solidFill>
+                  <a:srgbClr val="8C96A1"/>
+                </a:solidFill>
+                <a:latin typeface="Noto Sans KR"/>
+                <a:ea typeface="Noto Sans KR"/>
+                <a:cs typeface="Noto Sans KR"/>
+              </a:defRPr>
+            </a:lvl1pPr>
+          </a:lstStyle>
+          <a:p>
+            <a:pPr algn="r"/>
+            <a:fld id="{F7021451-1387-4CA6-816F-3879F97B5CBC}" type="slidenum">
+              <a:rPr b="0" lang="en-US"/>
+              <a:t>3</a:t>
+            </a:fld>
+            <a:endParaRPr lang="en-US"/>
+          </a:p>
+        </p:txBody>
+      </p:sp>
+    </p:spTree>
+  </p:cSld>
+  <p:clrMapOvr>
+    <a:masterClrMapping/>
+  </p:clrMapOvr>
+</p:sld>
+</file>
+
+<file path=ppt/slides/slide4.xml><?xml version="1.0" encoding="utf-8"?>
+<p:sld xmlns:a="http://schemas.openxmlformats.org/drawingml/2006/main" xmlns:r="http://schemas.openxmlformats.org/officeDocument/2006/relationships" xmlns:p="http://schemas.openxmlformats.org/presentationml/2006/main">
+  <p:cSld name="Slide 4">
+    <p:spTree>
+      <p:nvGrpSpPr>
+        <p:cNvPr id="1" name=""/>
+        <p:cNvGrpSpPr/>
+        <p:nvPr/>
+      </p:nvGrpSpPr>
+      <p:grpSpPr>
+        <a:xfrm>
+          <a:off x="0" y="0"/>
+          <a:ext cx="0" cy="0"/>
+          <a:chOff x="0" y="0"/>
+          <a:chExt cx="0" cy="0"/>
+        </a:xfrm>
+      </p:grpSpPr>
+      <p:sp>
+        <p:nvSpPr>
+          <p:cNvPr id="2" name="Text 0"/>
+          <p:cNvSpPr/>
+          <p:nvPr>
+            <p:ph idx="100" type="body" hasCustomPrompt="1"/>
+          </p:nvPr>
+        </p:nvSpPr>
+        <p:spPr>
+          <a:xfrm>
+            <a:off x="548640" y="292608"/>
+            <a:ext cx="8229600" cy="292608"/>
+          </a:xfrm>
+          <a:prstGeom prst="rect">
+            <a:avLst/>
+          </a:prstGeom>
+          <a:noFill/>
+          <a:ln/>
+        </p:spPr>
+        <p:txBody>
+          <a:bodyPr wrap="square" lIns="0" tIns="0" rIns="0" bIns="0" rtlCol="0" anchor="ctr"/>
+          <a:lstStyle/>
+          <a:p>
+            <a:pPr indent="0" marL="0">
+              <a:buNone/>
+            </a:pPr>
+            <a:r>
+              <a:rPr lang="en-US" sz="1200" b="1" dirty="0">
+                <a:solidFill>
+                  <a:srgbClr val="E07A2E"/>
+                </a:solidFill>
+              </a:rPr>
+              <a:t>과제</a:t>
+            </a:r>
+            <a:endParaRPr lang="en-US" sz="1200" dirty="0"/>
+          </a:p>
+        </p:txBody>
+      </p:sp>
+      <p:sp>
+        <p:nvSpPr>
+          <p:cNvPr id="3" name="Text 0"/>
+          <p:cNvSpPr/>
+          <p:nvPr>
+            <p:ph idx="101" type="title" hasCustomPrompt="1"/>
+          </p:nvPr>
+        </p:nvSpPr>
+        <p:spPr>
+          <a:xfrm>
+            <a:off x="548640" y="585216"/>
+            <a:ext cx="11064240" cy="566928"/>
+          </a:xfrm>
+          <a:prstGeom prst="rect">
+            <a:avLst/>
+          </a:prstGeom>
+          <a:noFill/>
+          <a:ln/>
+        </p:spPr>
+        <p:txBody>
+          <a:bodyPr wrap="square" lIns="0" tIns="0" rIns="0" bIns="0" rtlCol="0" anchor="ctr"/>
+          <a:lstStyle/>
+          <a:p>
+            <a:pPr algn="l" indent="0" marL="0">
+              <a:buNone/>
+            </a:pPr>
+            <a:r>
+              <a:rPr lang="en-US" sz="2800" b="1" dirty="0">
+                <a:solidFill>
+                  <a:srgbClr val="1E242B"/>
+                </a:solidFill>
+              </a:rPr>
               <a:t>기말까지의 일정 (계획)</a:t>
             </a:r>
             <a:endParaRPr lang="en-US" sz="2800" dirty="0"/>
@@ -4441,7 +5974,7 @@
       </p:sp>
       <p:graphicFrame>
         <p:nvGraphicFramePr>
-          <p:cNvPr id="4" name="Table 0"/>
+          <p:cNvPr id="5" name="Table 0"/>
           <p:cNvGraphicFramePr>
             <a:graphicFrameLocks noGrp="1"/>
           </p:cNvGraphicFramePr>
@@ -6492,7 +8025,7 @@
             <a:pPr algn="r"/>
             <a:fld id="{F7021451-1387-4CA6-816F-3879F97B5CBC}" type="slidenum">
               <a:rPr b="0" lang="en-US"/>
-              <a:t>3</a:t>
+              <a:t>4</a:t>
             </a:fld>
             <a:endParaRPr lang="en-US"/>
           </a:p>
@@ -6506,9 +8039,9 @@
 </p:sld>
 </file>
 
-<file path=ppt/slides/slide4.xml><?xml version="1.0" encoding="utf-8"?>
+<file path=ppt/slides/slide5.xml><?xml version="1.0" encoding="utf-8"?>
 <p:sld xmlns:a="http://schemas.openxmlformats.org/drawingml/2006/main" xmlns:r="http://schemas.openxmlformats.org/officeDocument/2006/relationships" xmlns:p="http://schemas.openxmlformats.org/presentationml/2006/main">
-  <p:cSld name="Slide 4">
+  <p:cSld name="Slide 5">
     <p:spTree>
       <p:nvGrpSpPr>
         <p:cNvPr id="1" name=""/>
@@ -7610,7 +9143,7 @@
             <a:pPr algn="r"/>
             <a:fld id="{F7021451-1387-4CA6-816F-3879F97B5CBC}" type="slidenum">
               <a:rPr b="0" lang="en-US"/>
-              <a:t>4</a:t>
+              <a:t>5</a:t>
             </a:fld>
             <a:endParaRPr lang="en-US"/>
           </a:p>
@@ -7624,9 +9157,9 @@
 </p:sld>
 </file>
 
-<file path=ppt/slides/slide5.xml><?xml version="1.0" encoding="utf-8"?>
+<file path=ppt/slides/slide6.xml><?xml version="1.0" encoding="utf-8"?>
 <p:sld xmlns:a="http://schemas.openxmlformats.org/drawingml/2006/main" xmlns:r="http://schemas.openxmlformats.org/officeDocument/2006/relationships" xmlns:p="http://schemas.openxmlformats.org/presentationml/2006/main">
-  <p:cSld name="Slide 5">
+  <p:cSld name="Slide 6">
     <p:spTree>
       <p:nvGrpSpPr>
         <p:cNvPr id="1" name=""/>
@@ -7757,7 +9290,7 @@
       </p:sp>
       <p:graphicFrame>
         <p:nvGraphicFramePr>
-          <p:cNvPr id="6" name="Table 0"/>
+          <p:cNvPr id="7" name="Table 0"/>
           <p:cNvGraphicFramePr>
             <a:graphicFrameLocks noGrp="1"/>
           </p:cNvGraphicFramePr>
@@ -9098,7 +10631,7 @@
             <a:pPr algn="r"/>
             <a:fld id="{F7021451-1387-4CA6-816F-3879F97B5CBC}" type="slidenum">
               <a:rPr b="0" lang="en-US"/>
-              <a:t>5</a:t>
+              <a:t>6</a:t>
             </a:fld>
             <a:endParaRPr lang="en-US"/>
           </a:p>
@@ -9112,9 +10645,9 @@
 </p:sld>
 </file>
 
-<file path=ppt/slides/slide6.xml><?xml version="1.0" encoding="utf-8"?>
+<file path=ppt/slides/slide7.xml><?xml version="1.0" encoding="utf-8"?>
 <p:sld xmlns:a="http://schemas.openxmlformats.org/drawingml/2006/main" xmlns:r="http://schemas.openxmlformats.org/officeDocument/2006/relationships" xmlns:p="http://schemas.openxmlformats.org/presentationml/2006/main">
-  <p:cSld name="Slide 6">
+  <p:cSld name="Slide 7">
     <p:spTree>
       <p:nvGrpSpPr>
         <p:cNvPr id="1" name=""/>
@@ -9287,7 +10820,7 @@
       </p:sp>
       <p:graphicFrame>
         <p:nvGraphicFramePr>
-          <p:cNvPr id="7" name="Table 0"/>
+          <p:cNvPr id="8" name="Table 0"/>
           <p:cNvGraphicFramePr>
             <a:graphicFrameLocks noGrp="1"/>
           </p:cNvGraphicFramePr>
@@ -10388,7 +11921,7 @@
       </p:sp>
       <p:graphicFrame>
         <p:nvGraphicFramePr>
-          <p:cNvPr id="13" name="Table 1"/>
+          <p:cNvPr id="15" name="Table 1"/>
           <p:cNvGraphicFramePr>
             <a:graphicFrameLocks noGrp="1"/>
           </p:cNvGraphicFramePr>
@@ -11305,7 +12838,7 @@
             <a:pPr algn="r"/>
             <a:fld id="{F7021451-1387-4CA6-816F-3879F97B5CBC}" type="slidenum">
               <a:rPr b="0" lang="en-US"/>
-              <a:t>6</a:t>
+              <a:t>7</a:t>
             </a:fld>
             <a:endParaRPr lang="en-US"/>
           </a:p>
@@ -11319,9 +12852,9 @@
 </p:sld>
 </file>
 
-<file path=ppt/slides/slide7.xml><?xml version="1.0" encoding="utf-8"?>
+<file path=ppt/slides/slide8.xml><?xml version="1.0" encoding="utf-8"?>
 <p:sld xmlns:a="http://schemas.openxmlformats.org/drawingml/2006/main" xmlns:r="http://schemas.openxmlformats.org/officeDocument/2006/relationships" xmlns:p="http://schemas.openxmlformats.org/presentationml/2006/main">
-  <p:cSld name="Slide 7">
+  <p:cSld name="Slide 8">
     <p:spTree>
       <p:nvGrpSpPr>
         <p:cNvPr id="1" name=""/>
@@ -11655,7 +13188,7 @@
       </p:sp>
       <p:graphicFrame>
         <p:nvGraphicFramePr>
-          <p:cNvPr id="8" name="Table 0"/>
+          <p:cNvPr id="9" name="Table 0"/>
           <p:cNvGraphicFramePr>
             <a:graphicFrameLocks noGrp="1"/>
           </p:cNvGraphicFramePr>
@@ -12527,7 +14060,7 @@
             <a:pPr algn="r"/>
             <a:fld id="{F7021451-1387-4CA6-816F-3879F97B5CBC}" type="slidenum">
               <a:rPr b="0" lang="en-US"/>
-              <a:t>7</a:t>
+              <a:t>8</a:t>
             </a:fld>
             <a:endParaRPr lang="en-US"/>
           </a:p>

--- a/8주차/한국어/게임엔진기초_8주차_오프라인_과제안내.pptx
+++ b/8주차/한국어/게임엔진기초_8주차_오프라인_과제안내.pptx
@@ -13,9 +13,10 @@
     <p:sldId id="261" r:id="rId7"/>
     <p:sldId id="262" r:id="rId8"/>
     <p:sldId id="263" r:id="rId9"/>
+    <p:sldId id="264" r:id="rId10"/>
   </p:sldIdLst>
   <p:notesMasterIdLst>
-    <p:notesMasterId r:id="rId10"/>
+    <p:notesMasterId r:id="rId11"/>
   </p:notesMasterIdLst>
   <p:sldSz cx="12192000" cy="6858000"/>
   <p:notesSz cx="6858000" cy="12192000"/>
@@ -114,7 +115,7 @@
   <p:extLst>
     <p:ext uri="{521415D9-36F7-43E2-AB2F-B90AF26B5E84}">
       <p14:sectionLst xmlns:p14="http://schemas.microsoft.com/office/powerpoint/2010/main">
-        <p14:section name="과제" id="{f81f21bf-e809-4657-79c7-4683813c0671}">
+        <p14:section name="과제" id="{6a7ddd97-7905-5731-da1e-bd116aeaeee0}">
           <p14:sldIdLst>
             <p14:sldId id="256"/>
             <p14:sldId id="257"/>
@@ -124,6 +125,7 @@
             <p14:sldId id="261"/>
             <p14:sldId id="262"/>
             <p14:sldId id="263"/>
+            <p14:sldId id="264"/>
           </p14:sldIdLst>
         </p14:section>
       </p14:sectionLst>
@@ -1170,6 +1172,94 @@
             <a:fld id="{F7021451-1387-4CA6-816F-3879F97B5CBC}" type="slidenum">
               <a:rPr lang="en-US"/>
               <a:t>8</a:t>
+            </a:fld>
+            <a:endParaRPr lang="en-US"/>
+          </a:p>
+        </p:txBody>
+      </p:sp>
+    </p:spTree>
+    <p:extLst>
+      <p:ext uri="{BB962C8B-B14F-4D97-AF65-F5344CB8AC3E}">
+        <p14:creationId xmlns:p14="http://schemas.microsoft.com/office/powerpoint/2010/main" val="1024086991"/>
+      </p:ext>
+    </p:extLst>
+  </p:cSld>
+  <p:clrMapOvr>
+    <a:masterClrMapping/>
+  </p:clrMapOvr>
+</p:notes>
+</file>
+
+<file path=ppt/notesSlides/notesSlide9.xml><?xml version="1.0" encoding="utf-8"?>
+<p:notes xmlns:a="http://schemas.openxmlformats.org/drawingml/2006/main" xmlns:r="http://schemas.openxmlformats.org/officeDocument/2006/relationships" xmlns:p="http://schemas.openxmlformats.org/presentationml/2006/main">
+  <p:cSld>
+    <p:spTree>
+      <p:nvGrpSpPr>
+        <p:cNvPr id="1" name=""/>
+        <p:cNvGrpSpPr/>
+        <p:nvPr/>
+      </p:nvGrpSpPr>
+      <p:grpSpPr>
+        <a:xfrm>
+          <a:off x="0" y="0"/>
+          <a:ext cx="0" cy="0"/>
+          <a:chOff x="0" y="0"/>
+          <a:chExt cx="0" cy="0"/>
+        </a:xfrm>
+      </p:grpSpPr>
+      <p:sp>
+        <p:nvSpPr>
+          <p:cNvPr id="2" name="Slide Image Placeholder 1"/>
+          <p:cNvSpPr>
+            <a:spLocks noGrp="1" noRot="1" noChangeAspect="1"/>
+          </p:cNvSpPr>
+          <p:nvPr>
+            <p:ph type="sldImg"/>
+          </p:nvPr>
+        </p:nvSpPr>
+        <p:spPr/>
+      </p:sp>
+      <p:sp>
+        <p:nvSpPr>
+          <p:cNvPr id="3" name="Notes Placeholder 2"/>
+          <p:cNvSpPr>
+            <a:spLocks noGrp="1"/>
+          </p:cNvSpPr>
+          <p:nvPr>
+            <p:ph type="body" idx="1"/>
+          </p:nvPr>
+        </p:nvSpPr>
+        <p:spPr/>
+        <p:txBody>
+          <a:bodyPr/>
+          <a:lstStyle/>
+          <a:p>
+            <a:r>
+              <a:rPr lang="en-US" dirty="0"/>
+              <a:t/>
+            </a:r>
+            <a:endParaRPr lang="en-US" dirty="0"/>
+          </a:p>
+        </p:txBody>
+      </p:sp>
+      <p:sp>
+        <p:nvSpPr>
+          <p:cNvPr id="4" name="Slide Number Placeholder 3"/>
+          <p:cNvSpPr>
+            <a:spLocks noGrp="1"/>
+          </p:cNvSpPr>
+          <p:nvPr>
+            <p:ph type="sldNum" sz="quarter" idx="10"/>
+          </p:nvPr>
+        </p:nvSpPr>
+        <p:spPr/>
+        <p:txBody>
+          <a:bodyPr/>
+          <a:lstStyle/>
+          <a:p>
+            <a:fld id="{F7021451-1387-4CA6-816F-3879F97B5CBC}" type="slidenum">
+              <a:rPr lang="en-US"/>
+              <a:t>9</a:t>
             </a:fld>
             <a:endParaRPr lang="en-US"/>
           </a:p>
@@ -5928,7 +6018,7 @@
                   <a:srgbClr val="1E242B"/>
                 </a:solidFill>
               </a:rPr>
-              <a:t>기말까지의 일정 (계획)</a:t>
+              <a:t>기본 코스와 도전 코스</a:t>
             </a:r>
             <a:endParaRPr lang="en-US" sz="2800" dirty="0"/>
           </a:p>
@@ -5966,6 +6056,1163 @@
                   <a:srgbClr val="5F6B78"/>
                 </a:solidFill>
               </a:rPr>
+              <a:t>모두 기본 코스부터. 기본이 다 끝난 사람만 도전 코스를 하나씩 더합니다</a:t>
+            </a:r>
+            <a:endParaRPr lang="en-US" sz="1500" dirty="0"/>
+          </a:p>
+        </p:txBody>
+      </p:sp>
+      <p:sp>
+        <p:nvSpPr>
+          <p:cNvPr id="5" name="Shape 3"/>
+          <p:cNvSpPr/>
+          <p:nvPr/>
+        </p:nvSpPr>
+        <p:spPr>
+          <a:xfrm>
+            <a:off x="548640" y="1737360"/>
+            <a:ext cx="5486400" cy="3749040"/>
+          </a:xfrm>
+          <a:prstGeom prst="roundRect">
+            <a:avLst>
+              <a:gd name="adj" fmla="val 2927"/>
+            </a:avLst>
+          </a:prstGeom>
+          <a:solidFill>
+            <a:srgbClr val="FDF0E4"/>
+          </a:solidFill>
+          <a:ln/>
+        </p:spPr>
+      </p:sp>
+      <p:sp>
+        <p:nvSpPr>
+          <p:cNvPr id="6" name="Text 4"/>
+          <p:cNvSpPr txBox="1"/>
+          <p:nvPr/>
+        </p:nvSpPr>
+        <p:spPr>
+          <a:xfrm>
+            <a:off x="777240" y="1828800"/>
+            <a:ext cx="5029200" cy="365760"/>
+          </a:xfrm>
+          <a:prstGeom prst="rect">
+            <a:avLst/>
+          </a:prstGeom>
+          <a:noFill/>
+          <a:ln/>
+        </p:spPr>
+        <p:txBody>
+          <a:bodyPr wrap="square" lIns="0" tIns="0" rIns="0" bIns="0" rtlCol="0" anchor="t"/>
+          <a:lstStyle/>
+          <a:p>
+            <a:pPr algn="l" indent="0" marL="0">
+              <a:lnSpc>
+                <a:spcPct val="115000"/>
+              </a:lnSpc>
+              <a:buNone/>
+            </a:pPr>
+            <a:r>
+              <a:rPr lang="en-US" sz="1700" b="1" dirty="0">
+                <a:solidFill>
+                  <a:srgbClr val="E07A2E"/>
+                </a:solidFill>
+                <a:latin typeface="Noto Sans KR" pitchFamily="34" charset="0"/>
+                <a:ea typeface="Noto Sans KR" pitchFamily="34" charset="-122"/>
+                <a:cs typeface="Noto Sans KR" pitchFamily="34" charset="-120"/>
+              </a:rPr>
+              <a:t>기본 코스 — 모두</a:t>
+            </a:r>
+            <a:endParaRPr lang="en-US" sz="1700" dirty="0"/>
+          </a:p>
+        </p:txBody>
+      </p:sp>
+      <p:sp>
+        <p:nvSpPr>
+          <p:cNvPr id="7" name="Shape 5"/>
+          <p:cNvSpPr/>
+          <p:nvPr/>
+        </p:nvSpPr>
+        <p:spPr>
+          <a:xfrm>
+            <a:off x="804672" y="2363343"/>
+            <a:ext cx="73152" cy="73152"/>
+          </a:xfrm>
+          <a:prstGeom prst="rect">
+            <a:avLst/>
+          </a:prstGeom>
+          <a:solidFill>
+            <a:srgbClr val="E07A2E"/>
+          </a:solidFill>
+          <a:ln/>
+        </p:spPr>
+      </p:sp>
+      <p:sp>
+        <p:nvSpPr>
+          <p:cNvPr id="8" name="Text 6"/>
+          <p:cNvSpPr txBox="1"/>
+          <p:nvPr/>
+        </p:nvSpPr>
+        <p:spPr>
+          <a:xfrm>
+            <a:off x="996696" y="2286000"/>
+            <a:ext cx="4809744" cy="243078"/>
+          </a:xfrm>
+          <a:prstGeom prst="rect">
+            <a:avLst/>
+          </a:prstGeom>
+          <a:noFill/>
+          <a:ln/>
+        </p:spPr>
+        <p:txBody>
+          <a:bodyPr wrap="square" lIns="0" tIns="0" rIns="0" bIns="0" rtlCol="0" anchor="t"/>
+          <a:lstStyle/>
+          <a:p>
+            <a:pPr algn="l" indent="0" marL="0">
+              <a:lnSpc>
+                <a:spcPct val="112000"/>
+              </a:lnSpc>
+              <a:buNone/>
+            </a:pPr>
+            <a:r>
+              <a:rPr lang="en-US" sz="1450" dirty="0">
+                <a:solidFill>
+                  <a:srgbClr val="3A434D"/>
+                </a:solidFill>
+                <a:latin typeface="Noto Sans KR" pitchFamily="34" charset="0"/>
+                <a:ea typeface="Noto Sans KR" pitchFamily="34" charset="-122"/>
+                <a:cs typeface="Noto Sans KR" pitchFamily="34" charset="-120"/>
+              </a:rPr>
+              <a:t>조작 1~2개 · 목표 1개 · 실패 조건 1개</a:t>
+            </a:r>
+            <a:endParaRPr lang="en-US" sz="1450" dirty="0"/>
+          </a:p>
+        </p:txBody>
+      </p:sp>
+      <p:sp>
+        <p:nvSpPr>
+          <p:cNvPr id="9" name="Shape 7"/>
+          <p:cNvSpPr/>
+          <p:nvPr/>
+        </p:nvSpPr>
+        <p:spPr>
+          <a:xfrm>
+            <a:off x="804672" y="2682621"/>
+            <a:ext cx="73152" cy="73152"/>
+          </a:xfrm>
+          <a:prstGeom prst="rect">
+            <a:avLst/>
+          </a:prstGeom>
+          <a:solidFill>
+            <a:srgbClr val="E07A2E"/>
+          </a:solidFill>
+          <a:ln/>
+        </p:spPr>
+      </p:sp>
+      <p:sp>
+        <p:nvSpPr>
+          <p:cNvPr id="10" name="Text 8"/>
+          <p:cNvSpPr txBox="1"/>
+          <p:nvPr/>
+        </p:nvSpPr>
+        <p:spPr>
+          <a:xfrm>
+            <a:off x="996696" y="2605278"/>
+            <a:ext cx="4809744" cy="243078"/>
+          </a:xfrm>
+          <a:prstGeom prst="rect">
+            <a:avLst/>
+          </a:prstGeom>
+          <a:noFill/>
+          <a:ln/>
+        </p:spPr>
+        <p:txBody>
+          <a:bodyPr wrap="square" lIns="0" tIns="0" rIns="0" bIns="0" rtlCol="0" anchor="t"/>
+          <a:lstStyle/>
+          <a:p>
+            <a:pPr algn="l" indent="0" marL="0">
+              <a:lnSpc>
+                <a:spcPct val="112000"/>
+              </a:lnSpc>
+              <a:buNone/>
+            </a:pPr>
+            <a:r>
+              <a:rPr lang="en-US" sz="1450" dirty="0">
+                <a:solidFill>
+                  <a:srgbClr val="3A434D"/>
+                </a:solidFill>
+                <a:latin typeface="Noto Sans KR" pitchFamily="34" charset="0"/>
+                <a:ea typeface="Noto Sans KR" pitchFamily="34" charset="-122"/>
+                <a:cs typeface="Noto Sans KR" pitchFamily="34" charset="-120"/>
+              </a:rPr>
+              <a:t>화면 3개 (타이틀 · HUD · 결과)</a:t>
+            </a:r>
+            <a:endParaRPr lang="en-US" sz="1450" dirty="0"/>
+          </a:p>
+        </p:txBody>
+      </p:sp>
+      <p:sp>
+        <p:nvSpPr>
+          <p:cNvPr id="11" name="Shape 9"/>
+          <p:cNvSpPr/>
+          <p:nvPr/>
+        </p:nvSpPr>
+        <p:spPr>
+          <a:xfrm>
+            <a:off x="804672" y="3001899"/>
+            <a:ext cx="73152" cy="73152"/>
+          </a:xfrm>
+          <a:prstGeom prst="rect">
+            <a:avLst/>
+          </a:prstGeom>
+          <a:solidFill>
+            <a:srgbClr val="E07A2E"/>
+          </a:solidFill>
+          <a:ln/>
+        </p:spPr>
+      </p:sp>
+      <p:sp>
+        <p:nvSpPr>
+          <p:cNvPr id="12" name="Text 10"/>
+          <p:cNvSpPr txBox="1"/>
+          <p:nvPr/>
+        </p:nvSpPr>
+        <p:spPr>
+          <a:xfrm>
+            <a:off x="996696" y="2924556"/>
+            <a:ext cx="4809744" cy="243078"/>
+          </a:xfrm>
+          <a:prstGeom prst="rect">
+            <a:avLst/>
+          </a:prstGeom>
+          <a:noFill/>
+          <a:ln/>
+        </p:spPr>
+        <p:txBody>
+          <a:bodyPr wrap="square" lIns="0" tIns="0" rIns="0" bIns="0" rtlCol="0" anchor="t"/>
+          <a:lstStyle/>
+          <a:p>
+            <a:pPr algn="l" indent="0" marL="0">
+              <a:lnSpc>
+                <a:spcPct val="112000"/>
+              </a:lnSpc>
+              <a:buNone/>
+            </a:pPr>
+            <a:r>
+              <a:rPr lang="en-US" sz="1450" dirty="0">
+                <a:solidFill>
+                  <a:srgbClr val="3A434D"/>
+                </a:solidFill>
+                <a:latin typeface="Noto Sans KR" pitchFamily="34" charset="0"/>
+                <a:ea typeface="Noto Sans KR" pitchFamily="34" charset="-122"/>
+                <a:cs typeface="Noto Sans KR" pitchFamily="34" charset="-120"/>
+              </a:rPr>
+              <a:t>에셋으로 꾸민 맵 · 캐릭터</a:t>
+            </a:r>
+            <a:endParaRPr lang="en-US" sz="1450" dirty="0"/>
+          </a:p>
+        </p:txBody>
+      </p:sp>
+      <p:sp>
+        <p:nvSpPr>
+          <p:cNvPr id="13" name="Shape 11"/>
+          <p:cNvSpPr/>
+          <p:nvPr/>
+        </p:nvSpPr>
+        <p:spPr>
+          <a:xfrm>
+            <a:off x="804672" y="3321177"/>
+            <a:ext cx="73152" cy="73152"/>
+          </a:xfrm>
+          <a:prstGeom prst="rect">
+            <a:avLst/>
+          </a:prstGeom>
+          <a:solidFill>
+            <a:srgbClr val="E07A2E"/>
+          </a:solidFill>
+          <a:ln/>
+        </p:spPr>
+      </p:sp>
+      <p:sp>
+        <p:nvSpPr>
+          <p:cNvPr id="14" name="Text 12"/>
+          <p:cNvSpPr txBox="1"/>
+          <p:nvPr/>
+        </p:nvSpPr>
+        <p:spPr>
+          <a:xfrm>
+            <a:off x="996696" y="3243834"/>
+            <a:ext cx="4809744" cy="243078"/>
+          </a:xfrm>
+          <a:prstGeom prst="rect">
+            <a:avLst/>
+          </a:prstGeom>
+          <a:noFill/>
+          <a:ln/>
+        </p:spPr>
+        <p:txBody>
+          <a:bodyPr wrap="square" lIns="0" tIns="0" rIns="0" bIns="0" rtlCol="0" anchor="t"/>
+          <a:lstStyle/>
+          <a:p>
+            <a:pPr algn="l" indent="0" marL="0">
+              <a:lnSpc>
+                <a:spcPct val="112000"/>
+              </a:lnSpc>
+              <a:buNone/>
+            </a:pPr>
+            <a:r>
+              <a:rPr lang="en-US" sz="1450" dirty="0">
+                <a:solidFill>
+                  <a:srgbClr val="3A434D"/>
+                </a:solidFill>
+                <a:latin typeface="Noto Sans KR" pitchFamily="34" charset="0"/>
+                <a:ea typeface="Noto Sans KR" pitchFamily="34" charset="-122"/>
+                <a:cs typeface="Noto Sans KR" pitchFamily="34" charset="-120"/>
+              </a:rPr>
+              <a:t>조명 · 색을 키 비주얼에 맞추기</a:t>
+            </a:r>
+            <a:endParaRPr lang="en-US" sz="1450" dirty="0"/>
+          </a:p>
+        </p:txBody>
+      </p:sp>
+      <p:sp>
+        <p:nvSpPr>
+          <p:cNvPr id="15" name="Shape 13"/>
+          <p:cNvSpPr/>
+          <p:nvPr/>
+        </p:nvSpPr>
+        <p:spPr>
+          <a:xfrm>
+            <a:off x="804672" y="3640455"/>
+            <a:ext cx="73152" cy="73152"/>
+          </a:xfrm>
+          <a:prstGeom prst="rect">
+            <a:avLst/>
+          </a:prstGeom>
+          <a:solidFill>
+            <a:srgbClr val="E07A2E"/>
+          </a:solidFill>
+          <a:ln/>
+        </p:spPr>
+      </p:sp>
+      <p:sp>
+        <p:nvSpPr>
+          <p:cNvPr id="16" name="Text 14"/>
+          <p:cNvSpPr txBox="1"/>
+          <p:nvPr/>
+        </p:nvSpPr>
+        <p:spPr>
+          <a:xfrm>
+            <a:off x="996696" y="3563112"/>
+            <a:ext cx="4809744" cy="243078"/>
+          </a:xfrm>
+          <a:prstGeom prst="rect">
+            <a:avLst/>
+          </a:prstGeom>
+          <a:noFill/>
+          <a:ln/>
+        </p:spPr>
+        <p:txBody>
+          <a:bodyPr wrap="square" lIns="0" tIns="0" rIns="0" bIns="0" rtlCol="0" anchor="t"/>
+          <a:lstStyle/>
+          <a:p>
+            <a:pPr algn="l" indent="0" marL="0">
+              <a:lnSpc>
+                <a:spcPct val="112000"/>
+              </a:lnSpc>
+              <a:buNone/>
+            </a:pPr>
+            <a:r>
+              <a:rPr lang="en-US" sz="1450" dirty="0">
+                <a:solidFill>
+                  <a:srgbClr val="3A434D"/>
+                </a:solidFill>
+                <a:latin typeface="Noto Sans KR" pitchFamily="34" charset="0"/>
+                <a:ea typeface="Noto Sans KR" pitchFamily="34" charset="-122"/>
+                <a:cs typeface="Noto Sans KR" pitchFamily="34" charset="-120"/>
+              </a:rPr>
+              <a:t>AI 이미지로 꾸민 타이틀 화면</a:t>
+            </a:r>
+            <a:endParaRPr lang="en-US" sz="1450" dirty="0"/>
+          </a:p>
+        </p:txBody>
+      </p:sp>
+      <p:sp>
+        <p:nvSpPr>
+          <p:cNvPr id="17" name="Shape 15"/>
+          <p:cNvSpPr/>
+          <p:nvPr/>
+        </p:nvSpPr>
+        <p:spPr>
+          <a:xfrm>
+            <a:off x="804672" y="3959733"/>
+            <a:ext cx="73152" cy="73152"/>
+          </a:xfrm>
+          <a:prstGeom prst="rect">
+            <a:avLst/>
+          </a:prstGeom>
+          <a:solidFill>
+            <a:srgbClr val="E07A2E"/>
+          </a:solidFill>
+          <a:ln/>
+        </p:spPr>
+      </p:sp>
+      <p:sp>
+        <p:nvSpPr>
+          <p:cNvPr id="18" name="Text 16"/>
+          <p:cNvSpPr txBox="1"/>
+          <p:nvPr/>
+        </p:nvSpPr>
+        <p:spPr>
+          <a:xfrm>
+            <a:off x="996696" y="3882390"/>
+            <a:ext cx="4809744" cy="243078"/>
+          </a:xfrm>
+          <a:prstGeom prst="rect">
+            <a:avLst/>
+          </a:prstGeom>
+          <a:noFill/>
+          <a:ln/>
+        </p:spPr>
+        <p:txBody>
+          <a:bodyPr wrap="square" lIns="0" tIns="0" rIns="0" bIns="0" rtlCol="0" anchor="t"/>
+          <a:lstStyle/>
+          <a:p>
+            <a:pPr algn="l" indent="0" marL="0">
+              <a:lnSpc>
+                <a:spcPct val="112000"/>
+              </a:lnSpc>
+              <a:buNone/>
+            </a:pPr>
+            <a:r>
+              <a:rPr lang="en-US" sz="1450" dirty="0">
+                <a:solidFill>
+                  <a:srgbClr val="3A434D"/>
+                </a:solidFill>
+                <a:latin typeface="Noto Sans KR" pitchFamily="34" charset="0"/>
+                <a:ea typeface="Noto Sans KR" pitchFamily="34" charset="-122"/>
+                <a:cs typeface="Noto Sans KR" pitchFamily="34" charset="-120"/>
+              </a:rPr>
+              <a:t>소리 · 이펙트 · Windows 빌드</a:t>
+            </a:r>
+            <a:endParaRPr lang="en-US" sz="1450" dirty="0"/>
+          </a:p>
+        </p:txBody>
+      </p:sp>
+      <p:sp>
+        <p:nvSpPr>
+          <p:cNvPr id="19" name="Shape 17"/>
+          <p:cNvSpPr/>
+          <p:nvPr/>
+        </p:nvSpPr>
+        <p:spPr>
+          <a:xfrm>
+            <a:off x="6245352" y="1737360"/>
+            <a:ext cx="5394960" cy="3749040"/>
+          </a:xfrm>
+          <a:prstGeom prst="roundRect">
+            <a:avLst>
+              <a:gd name="adj" fmla="val 2927"/>
+            </a:avLst>
+          </a:prstGeom>
+          <a:solidFill>
+            <a:srgbClr val="F3F5F7"/>
+          </a:solidFill>
+          <a:ln/>
+        </p:spPr>
+      </p:sp>
+      <p:sp>
+        <p:nvSpPr>
+          <p:cNvPr id="20" name="Text 18"/>
+          <p:cNvSpPr txBox="1"/>
+          <p:nvPr/>
+        </p:nvSpPr>
+        <p:spPr>
+          <a:xfrm>
+            <a:off x="6473952" y="1828800"/>
+            <a:ext cx="4937760" cy="365760"/>
+          </a:xfrm>
+          <a:prstGeom prst="rect">
+            <a:avLst/>
+          </a:prstGeom>
+          <a:noFill/>
+          <a:ln/>
+        </p:spPr>
+        <p:txBody>
+          <a:bodyPr wrap="square" lIns="0" tIns="0" rIns="0" bIns="0" rtlCol="0" anchor="t"/>
+          <a:lstStyle/>
+          <a:p>
+            <a:pPr algn="l" indent="0" marL="0">
+              <a:lnSpc>
+                <a:spcPct val="115000"/>
+              </a:lnSpc>
+              <a:buNone/>
+            </a:pPr>
+            <a:r>
+              <a:rPr lang="en-US" sz="1700" b="1" dirty="0">
+                <a:solidFill>
+                  <a:srgbClr val="2F6FEB"/>
+                </a:solidFill>
+                <a:latin typeface="Noto Sans KR" pitchFamily="34" charset="0"/>
+                <a:ea typeface="Noto Sans KR" pitchFamily="34" charset="-122"/>
+                <a:cs typeface="Noto Sans KR" pitchFamily="34" charset="-120"/>
+              </a:rPr>
+              <a:t>도전 코스 — 기본이 끝난 사람만</a:t>
+            </a:r>
+            <a:endParaRPr lang="en-US" sz="1700" dirty="0"/>
+          </a:p>
+        </p:txBody>
+      </p:sp>
+      <p:sp>
+        <p:nvSpPr>
+          <p:cNvPr id="21" name="Shape 19"/>
+          <p:cNvSpPr/>
+          <p:nvPr/>
+        </p:nvSpPr>
+        <p:spPr>
+          <a:xfrm>
+            <a:off x="6501384" y="2363343"/>
+            <a:ext cx="73152" cy="73152"/>
+          </a:xfrm>
+          <a:prstGeom prst="rect">
+            <a:avLst/>
+          </a:prstGeom>
+          <a:solidFill>
+            <a:srgbClr val="2F6FEB"/>
+          </a:solidFill>
+          <a:ln/>
+        </p:spPr>
+      </p:sp>
+      <p:sp>
+        <p:nvSpPr>
+          <p:cNvPr id="22" name="Text 20"/>
+          <p:cNvSpPr txBox="1"/>
+          <p:nvPr/>
+        </p:nvSpPr>
+        <p:spPr>
+          <a:xfrm>
+            <a:off x="6693408" y="2286000"/>
+            <a:ext cx="4718304" cy="243078"/>
+          </a:xfrm>
+          <a:prstGeom prst="rect">
+            <a:avLst/>
+          </a:prstGeom>
+          <a:noFill/>
+          <a:ln/>
+        </p:spPr>
+        <p:txBody>
+          <a:bodyPr wrap="square" lIns="0" tIns="0" rIns="0" bIns="0" rtlCol="0" anchor="t"/>
+          <a:lstStyle/>
+          <a:p>
+            <a:pPr algn="l" indent="0" marL="0">
+              <a:lnSpc>
+                <a:spcPct val="112000"/>
+              </a:lnSpc>
+              <a:buNone/>
+            </a:pPr>
+            <a:r>
+              <a:rPr lang="en-US" sz="1450" dirty="0">
+                <a:solidFill>
+                  <a:srgbClr val="3A434D"/>
+                </a:solidFill>
+                <a:latin typeface="Noto Sans KR" pitchFamily="34" charset="0"/>
+                <a:ea typeface="Noto Sans KR" pitchFamily="34" charset="-122"/>
+                <a:cs typeface="Noto Sans KR" pitchFamily="34" charset="-120"/>
+              </a:rPr>
+              <a:t>시간이 갈수록 어려워지기</a:t>
+            </a:r>
+            <a:endParaRPr lang="en-US" sz="1450" dirty="0"/>
+          </a:p>
+        </p:txBody>
+      </p:sp>
+      <p:sp>
+        <p:nvSpPr>
+          <p:cNvPr id="23" name="Shape 21"/>
+          <p:cNvSpPr/>
+          <p:nvPr/>
+        </p:nvSpPr>
+        <p:spPr>
+          <a:xfrm>
+            <a:off x="6501384" y="2682621"/>
+            <a:ext cx="73152" cy="73152"/>
+          </a:xfrm>
+          <a:prstGeom prst="rect">
+            <a:avLst/>
+          </a:prstGeom>
+          <a:solidFill>
+            <a:srgbClr val="2F6FEB"/>
+          </a:solidFill>
+          <a:ln/>
+        </p:spPr>
+      </p:sp>
+      <p:sp>
+        <p:nvSpPr>
+          <p:cNvPr id="24" name="Text 22"/>
+          <p:cNvSpPr txBox="1"/>
+          <p:nvPr/>
+        </p:nvSpPr>
+        <p:spPr>
+          <a:xfrm>
+            <a:off x="6693408" y="2605278"/>
+            <a:ext cx="4718304" cy="243078"/>
+          </a:xfrm>
+          <a:prstGeom prst="rect">
+            <a:avLst/>
+          </a:prstGeom>
+          <a:noFill/>
+          <a:ln/>
+        </p:spPr>
+        <p:txBody>
+          <a:bodyPr wrap="square" lIns="0" tIns="0" rIns="0" bIns="0" rtlCol="0" anchor="t"/>
+          <a:lstStyle/>
+          <a:p>
+            <a:pPr algn="l" indent="0" marL="0">
+              <a:lnSpc>
+                <a:spcPct val="112000"/>
+              </a:lnSpc>
+              <a:buNone/>
+            </a:pPr>
+            <a:r>
+              <a:rPr lang="en-US" sz="1450" dirty="0">
+                <a:solidFill>
+                  <a:srgbClr val="3A434D"/>
+                </a:solidFill>
+                <a:latin typeface="Noto Sans KR" pitchFamily="34" charset="0"/>
+                <a:ea typeface="Noto Sans KR" pitchFamily="34" charset="-122"/>
+                <a:cs typeface="Noto Sans KR" pitchFamily="34" charset="-120"/>
+              </a:rPr>
+              <a:t>움직이는 적 · 장애물</a:t>
+            </a:r>
+            <a:endParaRPr lang="en-US" sz="1450" dirty="0"/>
+          </a:p>
+        </p:txBody>
+      </p:sp>
+      <p:sp>
+        <p:nvSpPr>
+          <p:cNvPr id="25" name="Shape 23"/>
+          <p:cNvSpPr/>
+          <p:nvPr/>
+        </p:nvSpPr>
+        <p:spPr>
+          <a:xfrm>
+            <a:off x="6501384" y="3001899"/>
+            <a:ext cx="73152" cy="73152"/>
+          </a:xfrm>
+          <a:prstGeom prst="rect">
+            <a:avLst/>
+          </a:prstGeom>
+          <a:solidFill>
+            <a:srgbClr val="2F6FEB"/>
+          </a:solidFill>
+          <a:ln/>
+        </p:spPr>
+      </p:sp>
+      <p:sp>
+        <p:nvSpPr>
+          <p:cNvPr id="26" name="Text 24"/>
+          <p:cNvSpPr txBox="1"/>
+          <p:nvPr/>
+        </p:nvSpPr>
+        <p:spPr>
+          <a:xfrm>
+            <a:off x="6693408" y="2924556"/>
+            <a:ext cx="4718304" cy="243078"/>
+          </a:xfrm>
+          <a:prstGeom prst="rect">
+            <a:avLst/>
+          </a:prstGeom>
+          <a:noFill/>
+          <a:ln/>
+        </p:spPr>
+        <p:txBody>
+          <a:bodyPr wrap="square" lIns="0" tIns="0" rIns="0" bIns="0" rtlCol="0" anchor="t"/>
+          <a:lstStyle/>
+          <a:p>
+            <a:pPr algn="l" indent="0" marL="0">
+              <a:lnSpc>
+                <a:spcPct val="112000"/>
+              </a:lnSpc>
+              <a:buNone/>
+            </a:pPr>
+            <a:r>
+              <a:rPr lang="en-US" sz="1450" dirty="0">
+                <a:solidFill>
+                  <a:srgbClr val="3A434D"/>
+                </a:solidFill>
+                <a:latin typeface="Noto Sans KR" pitchFamily="34" charset="0"/>
+                <a:ea typeface="Noto Sans KR" pitchFamily="34" charset="-122"/>
+                <a:cs typeface="Noto Sans KR" pitchFamily="34" charset="-120"/>
+              </a:rPr>
+              <a:t>최고 점수 기록</a:t>
+            </a:r>
+            <a:endParaRPr lang="en-US" sz="1450" dirty="0"/>
+          </a:p>
+        </p:txBody>
+      </p:sp>
+      <p:sp>
+        <p:nvSpPr>
+          <p:cNvPr id="27" name="Shape 25"/>
+          <p:cNvSpPr/>
+          <p:nvPr/>
+        </p:nvSpPr>
+        <p:spPr>
+          <a:xfrm>
+            <a:off x="6501384" y="3321177"/>
+            <a:ext cx="73152" cy="73152"/>
+          </a:xfrm>
+          <a:prstGeom prst="rect">
+            <a:avLst/>
+          </a:prstGeom>
+          <a:solidFill>
+            <a:srgbClr val="2F6FEB"/>
+          </a:solidFill>
+          <a:ln/>
+        </p:spPr>
+      </p:sp>
+      <p:sp>
+        <p:nvSpPr>
+          <p:cNvPr id="28" name="Text 26"/>
+          <p:cNvSpPr txBox="1"/>
+          <p:nvPr/>
+        </p:nvSpPr>
+        <p:spPr>
+          <a:xfrm>
+            <a:off x="6693408" y="3243834"/>
+            <a:ext cx="4718304" cy="243078"/>
+          </a:xfrm>
+          <a:prstGeom prst="rect">
+            <a:avLst/>
+          </a:prstGeom>
+          <a:noFill/>
+          <a:ln/>
+        </p:spPr>
+        <p:txBody>
+          <a:bodyPr wrap="square" lIns="0" tIns="0" rIns="0" bIns="0" rtlCol="0" anchor="t"/>
+          <a:lstStyle/>
+          <a:p>
+            <a:pPr algn="l" indent="0" marL="0">
+              <a:lnSpc>
+                <a:spcPct val="112000"/>
+              </a:lnSpc>
+              <a:buNone/>
+            </a:pPr>
+            <a:r>
+              <a:rPr lang="en-US" sz="1450" dirty="0">
+                <a:solidFill>
+                  <a:srgbClr val="3A434D"/>
+                </a:solidFill>
+                <a:latin typeface="Noto Sans KR" pitchFamily="34" charset="0"/>
+                <a:ea typeface="Noto Sans KR" pitchFamily="34" charset="-122"/>
+                <a:cs typeface="Noto Sans KR" pitchFamily="34" charset="-120"/>
+              </a:rPr>
+              <a:t>카메라 흔들림 · 등장 연출</a:t>
+            </a:r>
+            <a:endParaRPr lang="en-US" sz="1450" dirty="0"/>
+          </a:p>
+        </p:txBody>
+      </p:sp>
+      <p:sp>
+        <p:nvSpPr>
+          <p:cNvPr id="29" name="Shape 27"/>
+          <p:cNvSpPr/>
+          <p:nvPr/>
+        </p:nvSpPr>
+        <p:spPr>
+          <a:xfrm>
+            <a:off x="6501384" y="3640455"/>
+            <a:ext cx="73152" cy="73152"/>
+          </a:xfrm>
+          <a:prstGeom prst="rect">
+            <a:avLst/>
+          </a:prstGeom>
+          <a:solidFill>
+            <a:srgbClr val="2F6FEB"/>
+          </a:solidFill>
+          <a:ln/>
+        </p:spPr>
+      </p:sp>
+      <p:sp>
+        <p:nvSpPr>
+          <p:cNvPr id="30" name="Text 28"/>
+          <p:cNvSpPr txBox="1"/>
+          <p:nvPr/>
+        </p:nvSpPr>
+        <p:spPr>
+          <a:xfrm>
+            <a:off x="6693408" y="3563112"/>
+            <a:ext cx="4718304" cy="243078"/>
+          </a:xfrm>
+          <a:prstGeom prst="rect">
+            <a:avLst/>
+          </a:prstGeom>
+          <a:noFill/>
+          <a:ln/>
+        </p:spPr>
+        <p:txBody>
+          <a:bodyPr wrap="square" lIns="0" tIns="0" rIns="0" bIns="0" rtlCol="0" anchor="t"/>
+          <a:lstStyle/>
+          <a:p>
+            <a:pPr algn="l" indent="0" marL="0">
+              <a:lnSpc>
+                <a:spcPct val="112000"/>
+              </a:lnSpc>
+              <a:buNone/>
+            </a:pPr>
+            <a:r>
+              <a:rPr lang="en-US" sz="1450" dirty="0">
+                <a:solidFill>
+                  <a:srgbClr val="3A434D"/>
+                </a:solidFill>
+                <a:latin typeface="Noto Sans KR" pitchFamily="34" charset="0"/>
+                <a:ea typeface="Noto Sans KR" pitchFamily="34" charset="-122"/>
+                <a:cs typeface="Noto Sans KR" pitchFamily="34" charset="-120"/>
+              </a:rPr>
+              <a:t>배경 꾸미기 더하기 (구름 · 나무 · 파티클)</a:t>
+            </a:r>
+            <a:endParaRPr lang="en-US" sz="1450" dirty="0"/>
+          </a:p>
+        </p:txBody>
+      </p:sp>
+      <p:sp>
+        <p:nvSpPr>
+          <p:cNvPr id="31" name="Shape 29"/>
+          <p:cNvSpPr/>
+          <p:nvPr/>
+        </p:nvSpPr>
+        <p:spPr>
+          <a:xfrm>
+            <a:off x="548640" y="5669280"/>
+            <a:ext cx="11091672" cy="548640"/>
+          </a:xfrm>
+          <a:prstGeom prst="roundRect">
+            <a:avLst>
+              <a:gd name="adj" fmla="val 16667"/>
+            </a:avLst>
+          </a:prstGeom>
+          <a:solidFill>
+            <a:srgbClr val="FDF0E4"/>
+          </a:solidFill>
+          <a:ln/>
+        </p:spPr>
+      </p:sp>
+      <p:sp>
+        <p:nvSpPr>
+          <p:cNvPr id="32" name="Text 30"/>
+          <p:cNvSpPr txBox="1"/>
+          <p:nvPr/>
+        </p:nvSpPr>
+        <p:spPr>
+          <a:xfrm>
+            <a:off x="777240" y="5797296"/>
+            <a:ext cx="1463040" cy="292608"/>
+          </a:xfrm>
+          <a:prstGeom prst="rect">
+            <a:avLst/>
+          </a:prstGeom>
+          <a:noFill/>
+          <a:ln/>
+        </p:spPr>
+        <p:txBody>
+          <a:bodyPr wrap="square" lIns="0" tIns="0" rIns="0" bIns="0" rtlCol="0" anchor="t"/>
+          <a:lstStyle/>
+          <a:p>
+            <a:pPr algn="l" indent="0" marL="0">
+              <a:lnSpc>
+                <a:spcPct val="115000"/>
+              </a:lnSpc>
+              <a:buNone/>
+            </a:pPr>
+            <a:r>
+              <a:rPr lang="en-US" sz="1300" b="1" dirty="0">
+                <a:solidFill>
+                  <a:srgbClr val="E07A2E"/>
+                </a:solidFill>
+                <a:latin typeface="Noto Sans KR" pitchFamily="34" charset="0"/>
+                <a:ea typeface="Noto Sans KR" pitchFamily="34" charset="-122"/>
+                <a:cs typeface="Noto Sans KR" pitchFamily="34" charset="-120"/>
+              </a:rPr>
+              <a:t>핵심 요약</a:t>
+            </a:r>
+            <a:endParaRPr lang="en-US" sz="1300" dirty="0"/>
+          </a:p>
+        </p:txBody>
+      </p:sp>
+      <p:sp>
+        <p:nvSpPr>
+          <p:cNvPr id="33" name="Shape 31"/>
+          <p:cNvSpPr/>
+          <p:nvPr/>
+        </p:nvSpPr>
+        <p:spPr>
+          <a:xfrm>
+            <a:off x="2176272" y="5862828"/>
+            <a:ext cx="73152" cy="73152"/>
+          </a:xfrm>
+          <a:prstGeom prst="rect">
+            <a:avLst/>
+          </a:prstGeom>
+          <a:solidFill>
+            <a:srgbClr val="E07A2E"/>
+          </a:solidFill>
+          <a:ln/>
+        </p:spPr>
+      </p:sp>
+      <p:sp>
+        <p:nvSpPr>
+          <p:cNvPr id="34" name="Text 32"/>
+          <p:cNvSpPr txBox="1"/>
+          <p:nvPr/>
+        </p:nvSpPr>
+        <p:spPr>
+          <a:xfrm>
+            <a:off x="2368296" y="5788152"/>
+            <a:ext cx="9089136" cy="234696"/>
+          </a:xfrm>
+          <a:prstGeom prst="rect">
+            <a:avLst/>
+          </a:prstGeom>
+          <a:noFill/>
+          <a:ln/>
+        </p:spPr>
+        <p:txBody>
+          <a:bodyPr wrap="square" lIns="0" tIns="0" rIns="0" bIns="0" rtlCol="0" anchor="t"/>
+          <a:lstStyle/>
+          <a:p>
+            <a:pPr algn="l" indent="0" marL="0">
+              <a:lnSpc>
+                <a:spcPct val="112000"/>
+              </a:lnSpc>
+              <a:buNone/>
+            </a:pPr>
+            <a:r>
+              <a:rPr lang="en-US" sz="1400" dirty="0">
+                <a:solidFill>
+                  <a:srgbClr val="3A434D"/>
+                </a:solidFill>
+                <a:latin typeface="Noto Sans KR" pitchFamily="34" charset="0"/>
+                <a:ea typeface="Noto Sans KR" pitchFamily="34" charset="-122"/>
+                <a:cs typeface="Noto Sans KR" pitchFamily="34" charset="-120"/>
+              </a:rPr>
+              <a:t>목표는 </a:t>
+            </a:r>
+            <a:pPr algn="l" indent="0" marL="0">
+              <a:lnSpc>
+                <a:spcPct val="112000"/>
+              </a:lnSpc>
+              <a:buNone/>
+            </a:pPr>
+            <a:r>
+              <a:rPr lang="en-US" sz="1400" b="1" dirty="0">
+                <a:solidFill>
+                  <a:srgbClr val="3A434D"/>
+                </a:solidFill>
+                <a:latin typeface="Noto Sans KR" pitchFamily="34" charset="0"/>
+                <a:ea typeface="Noto Sans KR" pitchFamily="34" charset="-122"/>
+                <a:cs typeface="Noto Sans KR" pitchFamily="34" charset="-120"/>
+              </a:rPr>
+              <a:t>기본 코스를 예쁘게 끝내는 것</a:t>
+            </a:r>
+            <a:pPr algn="l" indent="0" marL="0">
+              <a:lnSpc>
+                <a:spcPct val="112000"/>
+              </a:lnSpc>
+              <a:buNone/>
+            </a:pPr>
+            <a:r>
+              <a:rPr lang="en-US" sz="1400" dirty="0">
+                <a:solidFill>
+                  <a:srgbClr val="3A434D"/>
+                </a:solidFill>
+                <a:latin typeface="Noto Sans KR" pitchFamily="34" charset="0"/>
+                <a:ea typeface="Noto Sans KR" pitchFamily="34" charset="-122"/>
+                <a:cs typeface="Noto Sans KR" pitchFamily="34" charset="-120"/>
+              </a:rPr>
+              <a:t>입니다. 도전 코스는 꾸미기를 다 끝낸 뒤에 시간이 남을 때만.</a:t>
+            </a:r>
+            <a:endParaRPr lang="en-US" sz="1400" dirty="0"/>
+          </a:p>
+        </p:txBody>
+      </p:sp>
+      <p:sp>
+        <p:nvSpPr>
+          <p:cNvPr id="25" name="Slide Number Placeholder 0"/>
+          <p:cNvSpPr>
+            <a:spLocks noGrp="1"/>
+          </p:cNvSpPr>
+          <p:nvPr>
+            <p:ph type="sldNum" sz="quarter" idx="4294967295"/>
+          </p:nvPr>
+        </p:nvSpPr>
+        <p:spPr>
+          <a:xfrm>
+            <a:off x="11155680" y="6446520"/>
+            <a:ext cx="502920" cy="256032"/>
+          </a:xfrm>
+          <a:prstGeom prst="rect">
+            <a:avLst/>
+          </a:prstGeom>
+          <a:extLst>
+            <a:ext uri="{C572A759-6A51-4108-AA02-DFA0A04FC94B}">
+              <ma14:wrappingTextBoxFlag xmlns:ma14="http://schemas.microsoft.com/office/mac/drawingml/2011/main" val="0"/>
+            </a:ext>
+          </a:extLst>
+        </p:spPr>
+        <p:txBody>
+          <a:bodyPr/>
+          <a:lstStyle>
+            <a:lvl1pPr>
+              <a:defRPr sz="1000">
+                <a:solidFill>
+                  <a:srgbClr val="8C96A1"/>
+                </a:solidFill>
+                <a:latin typeface="Noto Sans KR"/>
+                <a:ea typeface="Noto Sans KR"/>
+                <a:cs typeface="Noto Sans KR"/>
+              </a:defRPr>
+            </a:lvl1pPr>
+          </a:lstStyle>
+          <a:p>
+            <a:pPr algn="r"/>
+            <a:fld id="{F7021451-1387-4CA6-816F-3879F97B5CBC}" type="slidenum">
+              <a:rPr b="0" lang="en-US"/>
+              <a:t>4</a:t>
+            </a:fld>
+            <a:endParaRPr lang="en-US"/>
+          </a:p>
+        </p:txBody>
+      </p:sp>
+    </p:spTree>
+  </p:cSld>
+  <p:clrMapOvr>
+    <a:masterClrMapping/>
+  </p:clrMapOvr>
+</p:sld>
+</file>
+
+<file path=ppt/slides/slide5.xml><?xml version="1.0" encoding="utf-8"?>
+<p:sld xmlns:a="http://schemas.openxmlformats.org/drawingml/2006/main" xmlns:r="http://schemas.openxmlformats.org/officeDocument/2006/relationships" xmlns:p="http://schemas.openxmlformats.org/presentationml/2006/main">
+  <p:cSld name="Slide 5">
+    <p:spTree>
+      <p:nvGrpSpPr>
+        <p:cNvPr id="1" name=""/>
+        <p:cNvGrpSpPr/>
+        <p:nvPr/>
+      </p:nvGrpSpPr>
+      <p:grpSpPr>
+        <a:xfrm>
+          <a:off x="0" y="0"/>
+          <a:ext cx="0" cy="0"/>
+          <a:chOff x="0" y="0"/>
+          <a:chExt cx="0" cy="0"/>
+        </a:xfrm>
+      </p:grpSpPr>
+      <p:sp>
+        <p:nvSpPr>
+          <p:cNvPr id="2" name="Text 0"/>
+          <p:cNvSpPr/>
+          <p:nvPr>
+            <p:ph idx="100" type="body" hasCustomPrompt="1"/>
+          </p:nvPr>
+        </p:nvSpPr>
+        <p:spPr>
+          <a:xfrm>
+            <a:off x="548640" y="292608"/>
+            <a:ext cx="8229600" cy="292608"/>
+          </a:xfrm>
+          <a:prstGeom prst="rect">
+            <a:avLst/>
+          </a:prstGeom>
+          <a:noFill/>
+          <a:ln/>
+        </p:spPr>
+        <p:txBody>
+          <a:bodyPr wrap="square" lIns="0" tIns="0" rIns="0" bIns="0" rtlCol="0" anchor="ctr"/>
+          <a:lstStyle/>
+          <a:p>
+            <a:pPr indent="0" marL="0">
+              <a:buNone/>
+            </a:pPr>
+            <a:r>
+              <a:rPr lang="en-US" sz="1200" b="1" dirty="0">
+                <a:solidFill>
+                  <a:srgbClr val="E07A2E"/>
+                </a:solidFill>
+              </a:rPr>
+              <a:t>과제</a:t>
+            </a:r>
+            <a:endParaRPr lang="en-US" sz="1200" dirty="0"/>
+          </a:p>
+        </p:txBody>
+      </p:sp>
+      <p:sp>
+        <p:nvSpPr>
+          <p:cNvPr id="3" name="Text 0"/>
+          <p:cNvSpPr/>
+          <p:nvPr>
+            <p:ph idx="101" type="title" hasCustomPrompt="1"/>
+          </p:nvPr>
+        </p:nvSpPr>
+        <p:spPr>
+          <a:xfrm>
+            <a:off x="548640" y="585216"/>
+            <a:ext cx="11064240" cy="566928"/>
+          </a:xfrm>
+          <a:prstGeom prst="rect">
+            <a:avLst/>
+          </a:prstGeom>
+          <a:noFill/>
+          <a:ln/>
+        </p:spPr>
+        <p:txBody>
+          <a:bodyPr wrap="square" lIns="0" tIns="0" rIns="0" bIns="0" rtlCol="0" anchor="ctr"/>
+          <a:lstStyle/>
+          <a:p>
+            <a:pPr algn="l" indent="0" marL="0">
+              <a:buNone/>
+            </a:pPr>
+            <a:r>
+              <a:rPr lang="en-US" sz="2800" b="1" dirty="0">
+                <a:solidFill>
+                  <a:srgbClr val="1E242B"/>
+                </a:solidFill>
+              </a:rPr>
+              <a:t>기말까지의 일정 (계획)</a:t>
+            </a:r>
+            <a:endParaRPr lang="en-US" sz="2800" dirty="0"/>
+          </a:p>
+        </p:txBody>
+      </p:sp>
+      <p:sp>
+        <p:nvSpPr>
+          <p:cNvPr id="4" name="Text 0"/>
+          <p:cNvSpPr/>
+          <p:nvPr>
+            <p:ph idx="102" type="body" hasCustomPrompt="1"/>
+          </p:nvPr>
+        </p:nvSpPr>
+        <p:spPr>
+          <a:xfrm>
+            <a:off x="548640" y="1170432"/>
+            <a:ext cx="11064240" cy="347472"/>
+          </a:xfrm>
+          <a:prstGeom prst="rect">
+            <a:avLst/>
+          </a:prstGeom>
+          <a:noFill/>
+          <a:ln/>
+        </p:spPr>
+        <p:txBody>
+          <a:bodyPr wrap="square" lIns="0" tIns="0" rIns="0" bIns="0" rtlCol="0" anchor="ctr"/>
+          <a:lstStyle/>
+          <a:p>
+            <a:pPr indent="0" marL="0">
+              <a:buNone/>
+            </a:pPr>
+            <a:r>
+              <a:rPr lang="en-US" sz="1500" dirty="0">
+                <a:solidFill>
+                  <a:srgbClr val="5F6B78"/>
+                </a:solidFill>
+              </a:rPr>
               <a:t>한 달 남짓한 여유 — 앞 2주에 '돌아가는 게임', 뒤에는 '예쁜 게임'</a:t>
             </a:r>
             <a:endParaRPr lang="en-US" sz="1500" dirty="0"/>
@@ -5974,7 +7221,7 @@
       </p:sp>
       <p:graphicFrame>
         <p:nvGraphicFramePr>
-          <p:cNvPr id="5" name="Table 0"/>
+          <p:cNvPr id="6" name="Table 0"/>
           <p:cNvGraphicFramePr>
             <a:graphicFrameLocks noGrp="1"/>
           </p:cNvGraphicFramePr>
@@ -8025,1124 +9272,6 @@
             <a:pPr algn="r"/>
             <a:fld id="{F7021451-1387-4CA6-816F-3879F97B5CBC}" type="slidenum">
               <a:rPr b="0" lang="en-US"/>
-              <a:t>4</a:t>
-            </a:fld>
-            <a:endParaRPr lang="en-US"/>
-          </a:p>
-        </p:txBody>
-      </p:sp>
-    </p:spTree>
-  </p:cSld>
-  <p:clrMapOvr>
-    <a:masterClrMapping/>
-  </p:clrMapOvr>
-</p:sld>
-</file>
-
-<file path=ppt/slides/slide5.xml><?xml version="1.0" encoding="utf-8"?>
-<p:sld xmlns:a="http://schemas.openxmlformats.org/drawingml/2006/main" xmlns:r="http://schemas.openxmlformats.org/officeDocument/2006/relationships" xmlns:p="http://schemas.openxmlformats.org/presentationml/2006/main">
-  <p:cSld name="Slide 5">
-    <p:spTree>
-      <p:nvGrpSpPr>
-        <p:cNvPr id="1" name=""/>
-        <p:cNvGrpSpPr/>
-        <p:nvPr/>
-      </p:nvGrpSpPr>
-      <p:grpSpPr>
-        <a:xfrm>
-          <a:off x="0" y="0"/>
-          <a:ext cx="0" cy="0"/>
-          <a:chOff x="0" y="0"/>
-          <a:chExt cx="0" cy="0"/>
-        </a:xfrm>
-      </p:grpSpPr>
-      <p:sp>
-        <p:nvSpPr>
-          <p:cNvPr id="2" name="Text 0"/>
-          <p:cNvSpPr/>
-          <p:nvPr>
-            <p:ph idx="100" type="body" hasCustomPrompt="1"/>
-          </p:nvPr>
-        </p:nvSpPr>
-        <p:spPr>
-          <a:xfrm>
-            <a:off x="548640" y="292608"/>
-            <a:ext cx="8229600" cy="292608"/>
-          </a:xfrm>
-          <a:prstGeom prst="rect">
-            <a:avLst/>
-          </a:prstGeom>
-          <a:noFill/>
-          <a:ln/>
-        </p:spPr>
-        <p:txBody>
-          <a:bodyPr wrap="square" lIns="0" tIns="0" rIns="0" bIns="0" rtlCol="0" anchor="ctr"/>
-          <a:lstStyle/>
-          <a:p>
-            <a:pPr indent="0" marL="0">
-              <a:buNone/>
-            </a:pPr>
-            <a:r>
-              <a:rPr lang="en-US" sz="1200" b="1" dirty="0">
-                <a:solidFill>
-                  <a:srgbClr val="E07A2E"/>
-                </a:solidFill>
-              </a:rPr>
-              <a:t>과제</a:t>
-            </a:r>
-            <a:endParaRPr lang="en-US" sz="1200" dirty="0"/>
-          </a:p>
-        </p:txBody>
-      </p:sp>
-      <p:sp>
-        <p:nvSpPr>
-          <p:cNvPr id="3" name="Text 0"/>
-          <p:cNvSpPr/>
-          <p:nvPr>
-            <p:ph idx="101" type="title" hasCustomPrompt="1"/>
-          </p:nvPr>
-        </p:nvSpPr>
-        <p:spPr>
-          <a:xfrm>
-            <a:off x="548640" y="585216"/>
-            <a:ext cx="11064240" cy="566928"/>
-          </a:xfrm>
-          <a:prstGeom prst="rect">
-            <a:avLst/>
-          </a:prstGeom>
-          <a:noFill/>
-          <a:ln/>
-        </p:spPr>
-        <p:txBody>
-          <a:bodyPr wrap="square" lIns="0" tIns="0" rIns="0" bIns="0" rtlCol="0" anchor="ctr"/>
-          <a:lstStyle/>
-          <a:p>
-            <a:pPr algn="l" indent="0" marL="0">
-              <a:buNone/>
-            </a:pPr>
-            <a:r>
-              <a:rPr lang="en-US" sz="2800" b="1" dirty="0">
-                <a:solidFill>
-                  <a:srgbClr val="1E242B"/>
-                </a:solidFill>
-              </a:rPr>
-              <a:t>기말 완성 기준</a:t>
-            </a:r>
-            <a:endParaRPr lang="en-US" sz="2800" dirty="0"/>
-          </a:p>
-        </p:txBody>
-      </p:sp>
-      <p:sp>
-        <p:nvSpPr>
-          <p:cNvPr id="4" name="Text 0"/>
-          <p:cNvSpPr/>
-          <p:nvPr>
-            <p:ph idx="102" type="body" hasCustomPrompt="1"/>
-          </p:nvPr>
-        </p:nvSpPr>
-        <p:spPr>
-          <a:xfrm>
-            <a:off x="548640" y="1170432"/>
-            <a:ext cx="11064240" cy="347472"/>
-          </a:xfrm>
-          <a:prstGeom prst="rect">
-            <a:avLst/>
-          </a:prstGeom>
-          <a:noFill/>
-          <a:ln/>
-        </p:spPr>
-        <p:txBody>
-          <a:bodyPr wrap="square" lIns="0" tIns="0" rIns="0" bIns="0" rtlCol="0" anchor="ctr"/>
-          <a:lstStyle/>
-          <a:p>
-            <a:pPr indent="0" marL="0">
-              <a:buNone/>
-            </a:pPr>
-            <a:r>
-              <a:rPr lang="en-US" sz="1500" dirty="0">
-                <a:solidFill>
-                  <a:srgbClr val="5F6B78"/>
-                </a:solidFill>
-              </a:rPr>
-              <a:t>중간의 네 가지 위에 '보기 좋은 게임'과 '도구를 잘 쓴 과정'이 더해집니다</a:t>
-            </a:r>
-            <a:endParaRPr lang="en-US" sz="1500" dirty="0"/>
-          </a:p>
-        </p:txBody>
-      </p:sp>
-      <p:sp>
-        <p:nvSpPr>
-          <p:cNvPr id="5" name="Shape 3"/>
-          <p:cNvSpPr/>
-          <p:nvPr/>
-        </p:nvSpPr>
-        <p:spPr>
-          <a:xfrm>
-            <a:off x="548640" y="1737360"/>
-            <a:ext cx="5120640" cy="3657600"/>
-          </a:xfrm>
-          <a:prstGeom prst="roundRect">
-            <a:avLst>
-              <a:gd name="adj" fmla="val 3000"/>
-            </a:avLst>
-          </a:prstGeom>
-          <a:solidFill>
-            <a:srgbClr val="F3F5F7"/>
-          </a:solidFill>
-          <a:ln/>
-        </p:spPr>
-      </p:sp>
-      <p:sp>
-        <p:nvSpPr>
-          <p:cNvPr id="6" name="Text 4"/>
-          <p:cNvSpPr txBox="1"/>
-          <p:nvPr/>
-        </p:nvSpPr>
-        <p:spPr>
-          <a:xfrm>
-            <a:off x="777240" y="1828800"/>
-            <a:ext cx="4663440" cy="365760"/>
-          </a:xfrm>
-          <a:prstGeom prst="rect">
-            <a:avLst/>
-          </a:prstGeom>
-          <a:noFill/>
-          <a:ln/>
-        </p:spPr>
-        <p:txBody>
-          <a:bodyPr wrap="square" lIns="0" tIns="0" rIns="0" bIns="0" rtlCol="0" anchor="t"/>
-          <a:lstStyle/>
-          <a:p>
-            <a:pPr algn="l" indent="0" marL="0">
-              <a:lnSpc>
-                <a:spcPct val="115000"/>
-              </a:lnSpc>
-              <a:buNone/>
-            </a:pPr>
-            <a:r>
-              <a:rPr lang="en-US" sz="1600" b="1" dirty="0">
-                <a:solidFill>
-                  <a:srgbClr val="5F6B78"/>
-                </a:solidFill>
-                <a:latin typeface="Noto Sans KR" pitchFamily="34" charset="0"/>
-                <a:ea typeface="Noto Sans KR" pitchFamily="34" charset="-122"/>
-                <a:cs typeface="Noto Sans KR" pitchFamily="34" charset="-120"/>
-              </a:rPr>
-              <a:t>중간과 같은 것</a:t>
-            </a:r>
-            <a:endParaRPr lang="en-US" sz="1600" dirty="0"/>
-          </a:p>
-        </p:txBody>
-      </p:sp>
-      <p:sp>
-        <p:nvSpPr>
-          <p:cNvPr id="7" name="Shape 5"/>
-          <p:cNvSpPr/>
-          <p:nvPr/>
-        </p:nvSpPr>
-        <p:spPr>
-          <a:xfrm>
-            <a:off x="804672" y="2360676"/>
-            <a:ext cx="73152" cy="73152"/>
-          </a:xfrm>
-          <a:prstGeom prst="rect">
-            <a:avLst/>
-          </a:prstGeom>
-          <a:solidFill>
-            <a:srgbClr val="8C96A1"/>
-          </a:solidFill>
-          <a:ln/>
-        </p:spPr>
-      </p:sp>
-      <p:sp>
-        <p:nvSpPr>
-          <p:cNvPr id="8" name="Text 6"/>
-          <p:cNvSpPr txBox="1"/>
-          <p:nvPr/>
-        </p:nvSpPr>
-        <p:spPr>
-          <a:xfrm>
-            <a:off x="996696" y="2286000"/>
-            <a:ext cx="4443984" cy="469392"/>
-          </a:xfrm>
-          <a:prstGeom prst="rect">
-            <a:avLst/>
-          </a:prstGeom>
-          <a:noFill/>
-          <a:ln/>
-        </p:spPr>
-        <p:txBody>
-          <a:bodyPr wrap="square" lIns="0" tIns="0" rIns="0" bIns="0" rtlCol="0" anchor="t"/>
-          <a:lstStyle/>
-          <a:p>
-            <a:pPr algn="l" indent="0" marL="0">
-              <a:lnSpc>
-                <a:spcPct val="112000"/>
-              </a:lnSpc>
-              <a:buNone/>
-            </a:pPr>
-            <a:r>
-              <a:rPr lang="en-US" sz="1400" dirty="0">
-                <a:solidFill>
-                  <a:srgbClr val="3A434D"/>
-                </a:solidFill>
-                <a:latin typeface="Noto Sans KR" pitchFamily="34" charset="0"/>
-                <a:ea typeface="Noto Sans KR" pitchFamily="34" charset="-122"/>
-                <a:cs typeface="Noto Sans KR" pitchFamily="34" charset="-120"/>
-              </a:rPr>
-              <a:t>한 판 완주 — 타이틀 → 플레이 → 결과 → RETRY</a:t>
-            </a:r>
-            <a:endParaRPr lang="en-US" sz="1400" dirty="0"/>
-          </a:p>
-        </p:txBody>
-      </p:sp>
-      <p:sp>
-        <p:nvSpPr>
-          <p:cNvPr id="9" name="Shape 7"/>
-          <p:cNvSpPr/>
-          <p:nvPr/>
-        </p:nvSpPr>
-        <p:spPr>
-          <a:xfrm>
-            <a:off x="804672" y="2906268"/>
-            <a:ext cx="73152" cy="73152"/>
-          </a:xfrm>
-          <a:prstGeom prst="rect">
-            <a:avLst/>
-          </a:prstGeom>
-          <a:solidFill>
-            <a:srgbClr val="8C96A1"/>
-          </a:solidFill>
-          <a:ln/>
-        </p:spPr>
-      </p:sp>
-      <p:sp>
-        <p:nvSpPr>
-          <p:cNvPr id="10" name="Text 8"/>
-          <p:cNvSpPr txBox="1"/>
-          <p:nvPr/>
-        </p:nvSpPr>
-        <p:spPr>
-          <a:xfrm>
-            <a:off x="996696" y="2831592"/>
-            <a:ext cx="4443984" cy="234696"/>
-          </a:xfrm>
-          <a:prstGeom prst="rect">
-            <a:avLst/>
-          </a:prstGeom>
-          <a:noFill/>
-          <a:ln/>
-        </p:spPr>
-        <p:txBody>
-          <a:bodyPr wrap="square" lIns="0" tIns="0" rIns="0" bIns="0" rtlCol="0" anchor="t"/>
-          <a:lstStyle/>
-          <a:p>
-            <a:pPr algn="l" indent="0" marL="0">
-              <a:lnSpc>
-                <a:spcPct val="112000"/>
-              </a:lnSpc>
-              <a:buNone/>
-            </a:pPr>
-            <a:r>
-              <a:rPr lang="en-US" sz="1400" dirty="0">
-                <a:solidFill>
-                  <a:srgbClr val="3A434D"/>
-                </a:solidFill>
-                <a:latin typeface="Noto Sans KR" pitchFamily="34" charset="0"/>
-                <a:ea typeface="Noto Sans KR" pitchFamily="34" charset="-122"/>
-                <a:cs typeface="Noto Sans KR" pitchFamily="34" charset="-120"/>
-              </a:rPr>
-              <a:t>화면 3개 — 타이틀 · HUD · 결과</a:t>
-            </a:r>
-            <a:endParaRPr lang="en-US" sz="1400" dirty="0"/>
-          </a:p>
-        </p:txBody>
-      </p:sp>
-      <p:sp>
-        <p:nvSpPr>
-          <p:cNvPr id="11" name="Shape 9"/>
-          <p:cNvSpPr/>
-          <p:nvPr/>
-        </p:nvSpPr>
-        <p:spPr>
-          <a:xfrm>
-            <a:off x="804672" y="3217164"/>
-            <a:ext cx="73152" cy="73152"/>
-          </a:xfrm>
-          <a:prstGeom prst="rect">
-            <a:avLst/>
-          </a:prstGeom>
-          <a:solidFill>
-            <a:srgbClr val="8C96A1"/>
-          </a:solidFill>
-          <a:ln/>
-        </p:spPr>
-      </p:sp>
-      <p:sp>
-        <p:nvSpPr>
-          <p:cNvPr id="12" name="Text 10"/>
-          <p:cNvSpPr txBox="1"/>
-          <p:nvPr/>
-        </p:nvSpPr>
-        <p:spPr>
-          <a:xfrm>
-            <a:off x="996696" y="3142488"/>
-            <a:ext cx="4443984" cy="234696"/>
-          </a:xfrm>
-          <a:prstGeom prst="rect">
-            <a:avLst/>
-          </a:prstGeom>
-          <a:noFill/>
-          <a:ln/>
-        </p:spPr>
-        <p:txBody>
-          <a:bodyPr wrap="square" lIns="0" tIns="0" rIns="0" bIns="0" rtlCol="0" anchor="t"/>
-          <a:lstStyle/>
-          <a:p>
-            <a:pPr algn="l" indent="0" marL="0">
-              <a:lnSpc>
-                <a:spcPct val="112000"/>
-              </a:lnSpc>
-              <a:buNone/>
-            </a:pPr>
-            <a:r>
-              <a:rPr lang="en-US" sz="1400" dirty="0">
-                <a:solidFill>
-                  <a:srgbClr val="3A434D"/>
-                </a:solidFill>
-                <a:latin typeface="Noto Sans KR" pitchFamily="34" charset="0"/>
-                <a:ea typeface="Noto Sans KR" pitchFamily="34" charset="-122"/>
-                <a:cs typeface="Noto Sans KR" pitchFamily="34" charset="-120"/>
-              </a:rPr>
-              <a:t>반응 — 득점 · 성공 · 실패에 소리 + 이펙트</a:t>
-            </a:r>
-            <a:endParaRPr lang="en-US" sz="1400" dirty="0"/>
-          </a:p>
-        </p:txBody>
-      </p:sp>
-      <p:sp>
-        <p:nvSpPr>
-          <p:cNvPr id="13" name="Shape 11"/>
-          <p:cNvSpPr/>
-          <p:nvPr/>
-        </p:nvSpPr>
-        <p:spPr>
-          <a:xfrm>
-            <a:off x="804672" y="3528060"/>
-            <a:ext cx="73152" cy="73152"/>
-          </a:xfrm>
-          <a:prstGeom prst="rect">
-            <a:avLst/>
-          </a:prstGeom>
-          <a:solidFill>
-            <a:srgbClr val="8C96A1"/>
-          </a:solidFill>
-          <a:ln/>
-        </p:spPr>
-      </p:sp>
-      <p:sp>
-        <p:nvSpPr>
-          <p:cNvPr id="14" name="Text 12"/>
-          <p:cNvSpPr txBox="1"/>
-          <p:nvPr/>
-        </p:nvSpPr>
-        <p:spPr>
-          <a:xfrm>
-            <a:off x="996696" y="3453384"/>
-            <a:ext cx="4443984" cy="234696"/>
-          </a:xfrm>
-          <a:prstGeom prst="rect">
-            <a:avLst/>
-          </a:prstGeom>
-          <a:noFill/>
-          <a:ln/>
-        </p:spPr>
-        <p:txBody>
-          <a:bodyPr wrap="square" lIns="0" tIns="0" rIns="0" bIns="0" rtlCol="0" anchor="t"/>
-          <a:lstStyle/>
-          <a:p>
-            <a:pPr algn="l" indent="0" marL="0">
-              <a:lnSpc>
-                <a:spcPct val="112000"/>
-              </a:lnSpc>
-              <a:buNone/>
-            </a:pPr>
-            <a:r>
-              <a:rPr lang="en-US" sz="1400" dirty="0">
-                <a:solidFill>
-                  <a:srgbClr val="3A434D"/>
-                </a:solidFill>
-                <a:latin typeface="Noto Sans KR" pitchFamily="34" charset="0"/>
-                <a:ea typeface="Noto Sans KR" pitchFamily="34" charset="-122"/>
-                <a:cs typeface="Noto Sans KR" pitchFamily="34" charset="-120"/>
-              </a:rPr>
-              <a:t>Windows 빌드 — .exe로 시연</a:t>
-            </a:r>
-            <a:endParaRPr lang="en-US" sz="1400" dirty="0"/>
-          </a:p>
-        </p:txBody>
-      </p:sp>
-      <p:sp>
-        <p:nvSpPr>
-          <p:cNvPr id="15" name="Shape 13"/>
-          <p:cNvSpPr/>
-          <p:nvPr/>
-        </p:nvSpPr>
-        <p:spPr>
-          <a:xfrm>
-            <a:off x="5879592" y="1737360"/>
-            <a:ext cx="5760720" cy="3657600"/>
-          </a:xfrm>
-          <a:prstGeom prst="roundRect">
-            <a:avLst>
-              <a:gd name="adj" fmla="val 3000"/>
-            </a:avLst>
-          </a:prstGeom>
-          <a:solidFill>
-            <a:srgbClr val="FDF0E4"/>
-          </a:solidFill>
-          <a:ln/>
-        </p:spPr>
-      </p:sp>
-      <p:sp>
-        <p:nvSpPr>
-          <p:cNvPr id="16" name="Text 14"/>
-          <p:cNvSpPr txBox="1"/>
-          <p:nvPr/>
-        </p:nvSpPr>
-        <p:spPr>
-          <a:xfrm>
-            <a:off x="6108192" y="1828800"/>
-            <a:ext cx="5303520" cy="365760"/>
-          </a:xfrm>
-          <a:prstGeom prst="rect">
-            <a:avLst/>
-          </a:prstGeom>
-          <a:noFill/>
-          <a:ln/>
-        </p:spPr>
-        <p:txBody>
-          <a:bodyPr wrap="square" lIns="0" tIns="0" rIns="0" bIns="0" rtlCol="0" anchor="t"/>
-          <a:lstStyle/>
-          <a:p>
-            <a:pPr algn="l" indent="0" marL="0">
-              <a:lnSpc>
-                <a:spcPct val="115000"/>
-              </a:lnSpc>
-              <a:buNone/>
-            </a:pPr>
-            <a:r>
-              <a:rPr lang="en-US" sz="1600" b="1" dirty="0">
-                <a:solidFill>
-                  <a:srgbClr val="E07A2E"/>
-                </a:solidFill>
-                <a:latin typeface="Noto Sans KR" pitchFamily="34" charset="0"/>
-                <a:ea typeface="Noto Sans KR" pitchFamily="34" charset="-122"/>
-                <a:cs typeface="Noto Sans KR" pitchFamily="34" charset="-120"/>
-              </a:rPr>
-              <a:t>이번에 더해지는 것</a:t>
-            </a:r>
-            <a:endParaRPr lang="en-US" sz="1600" dirty="0"/>
-          </a:p>
-        </p:txBody>
-      </p:sp>
-      <p:sp>
-        <p:nvSpPr>
-          <p:cNvPr id="17" name="Shape 15"/>
-          <p:cNvSpPr/>
-          <p:nvPr/>
-        </p:nvSpPr>
-        <p:spPr>
-          <a:xfrm>
-            <a:off x="6135624" y="2360676"/>
-            <a:ext cx="73152" cy="73152"/>
-          </a:xfrm>
-          <a:prstGeom prst="rect">
-            <a:avLst/>
-          </a:prstGeom>
-          <a:solidFill>
-            <a:srgbClr val="E07A2E"/>
-          </a:solidFill>
-          <a:ln/>
-        </p:spPr>
-      </p:sp>
-      <p:sp>
-        <p:nvSpPr>
-          <p:cNvPr id="18" name="Text 16"/>
-          <p:cNvSpPr txBox="1"/>
-          <p:nvPr/>
-        </p:nvSpPr>
-        <p:spPr>
-          <a:xfrm>
-            <a:off x="6327648" y="2286000"/>
-            <a:ext cx="5084064" cy="234696"/>
-          </a:xfrm>
-          <a:prstGeom prst="rect">
-            <a:avLst/>
-          </a:prstGeom>
-          <a:noFill/>
-          <a:ln/>
-        </p:spPr>
-        <p:txBody>
-          <a:bodyPr wrap="square" lIns="0" tIns="0" rIns="0" bIns="0" rtlCol="0" anchor="t"/>
-          <a:lstStyle/>
-          <a:p>
-            <a:pPr algn="l" indent="0" marL="0">
-              <a:lnSpc>
-                <a:spcPct val="112000"/>
-              </a:lnSpc>
-              <a:buNone/>
-            </a:pPr>
-            <a:r>
-              <a:rPr lang="en-US" sz="1400" b="1" dirty="0">
-                <a:solidFill>
-                  <a:srgbClr val="3A434D"/>
-                </a:solidFill>
-                <a:latin typeface="Noto Sans KR" pitchFamily="34" charset="0"/>
-                <a:ea typeface="Noto Sans KR" pitchFamily="34" charset="-122"/>
-                <a:cs typeface="Noto Sans KR" pitchFamily="34" charset="-120"/>
-              </a:rPr>
-              <a:t>새 게임</a:t>
-            </a:r>
-            <a:pPr algn="l" indent="0" marL="0">
-              <a:lnSpc>
-                <a:spcPct val="112000"/>
-              </a:lnSpc>
-              <a:buNone/>
-            </a:pPr>
-            <a:r>
-              <a:rPr lang="en-US" sz="1400" dirty="0">
-                <a:solidFill>
-                  <a:srgbClr val="3A434D"/>
-                </a:solidFill>
-                <a:latin typeface="Noto Sans KR" pitchFamily="34" charset="0"/>
-                <a:ea typeface="Noto Sans KR" pitchFamily="34" charset="-122"/>
-                <a:cs typeface="Noto Sans KR" pitchFamily="34" charset="-120"/>
-              </a:rPr>
-              <a:t> — 중간과 다른 새 프로젝트</a:t>
-            </a:r>
-            <a:endParaRPr lang="en-US" sz="1400" dirty="0"/>
-          </a:p>
-        </p:txBody>
-      </p:sp>
-      <p:sp>
-        <p:nvSpPr>
-          <p:cNvPr id="19" name="Shape 17"/>
-          <p:cNvSpPr/>
-          <p:nvPr/>
-        </p:nvSpPr>
-        <p:spPr>
-          <a:xfrm>
-            <a:off x="6135624" y="2671572"/>
-            <a:ext cx="73152" cy="73152"/>
-          </a:xfrm>
-          <a:prstGeom prst="rect">
-            <a:avLst/>
-          </a:prstGeom>
-          <a:solidFill>
-            <a:srgbClr val="E07A2E"/>
-          </a:solidFill>
-          <a:ln/>
-        </p:spPr>
-      </p:sp>
-      <p:sp>
-        <p:nvSpPr>
-          <p:cNvPr id="20" name="Text 18"/>
-          <p:cNvSpPr txBox="1"/>
-          <p:nvPr/>
-        </p:nvSpPr>
-        <p:spPr>
-          <a:xfrm>
-            <a:off x="6327648" y="2596896"/>
-            <a:ext cx="5084064" cy="469392"/>
-          </a:xfrm>
-          <a:prstGeom prst="rect">
-            <a:avLst/>
-          </a:prstGeom>
-          <a:noFill/>
-          <a:ln/>
-        </p:spPr>
-        <p:txBody>
-          <a:bodyPr wrap="square" lIns="0" tIns="0" rIns="0" bIns="0" rtlCol="0" anchor="t"/>
-          <a:lstStyle/>
-          <a:p>
-            <a:pPr algn="l" indent="0" marL="0">
-              <a:lnSpc>
-                <a:spcPct val="112000"/>
-              </a:lnSpc>
-              <a:buNone/>
-            </a:pPr>
-            <a:r>
-              <a:rPr lang="en-US" sz="1400" b="1" dirty="0">
-                <a:solidFill>
-                  <a:srgbClr val="3A434D"/>
-                </a:solidFill>
-                <a:latin typeface="Noto Sans KR" pitchFamily="34" charset="0"/>
-                <a:ea typeface="Noto Sans KR" pitchFamily="34" charset="-122"/>
-                <a:cs typeface="Noto Sans KR" pitchFamily="34" charset="-120"/>
-              </a:rPr>
-              <a:t>보기 좋은 그래픽</a:t>
-            </a:r>
-            <a:pPr algn="l" indent="0" marL="0">
-              <a:lnSpc>
-                <a:spcPct val="112000"/>
-              </a:lnSpc>
-              <a:buNone/>
-            </a:pPr>
-            <a:r>
-              <a:rPr lang="en-US" sz="1400" dirty="0">
-                <a:solidFill>
-                  <a:srgbClr val="3A434D"/>
-                </a:solidFill>
-                <a:latin typeface="Noto Sans KR" pitchFamily="34" charset="0"/>
-                <a:ea typeface="Noto Sans KR" pitchFamily="34" charset="-122"/>
-                <a:cs typeface="Noto Sans KR" pitchFamily="34" charset="-120"/>
-              </a:rPr>
-              <a:t> — 에셋 · 조명으로 스타일이 통일된 화면</a:t>
-            </a:r>
-            <a:endParaRPr lang="en-US" sz="1400" dirty="0"/>
-          </a:p>
-        </p:txBody>
-      </p:sp>
-      <p:sp>
-        <p:nvSpPr>
-          <p:cNvPr id="21" name="Shape 19"/>
-          <p:cNvSpPr/>
-          <p:nvPr/>
-        </p:nvSpPr>
-        <p:spPr>
-          <a:xfrm>
-            <a:off x="6135624" y="3217164"/>
-            <a:ext cx="73152" cy="73152"/>
-          </a:xfrm>
-          <a:prstGeom prst="rect">
-            <a:avLst/>
-          </a:prstGeom>
-          <a:solidFill>
-            <a:srgbClr val="E07A2E"/>
-          </a:solidFill>
-          <a:ln/>
-        </p:spPr>
-      </p:sp>
-      <p:sp>
-        <p:nvSpPr>
-          <p:cNvPr id="22" name="Text 20"/>
-          <p:cNvSpPr txBox="1"/>
-          <p:nvPr/>
-        </p:nvSpPr>
-        <p:spPr>
-          <a:xfrm>
-            <a:off x="6327648" y="3142488"/>
-            <a:ext cx="5084064" cy="469392"/>
-          </a:xfrm>
-          <a:prstGeom prst="rect">
-            <a:avLst/>
-          </a:prstGeom>
-          <a:noFill/>
-          <a:ln/>
-        </p:spPr>
-        <p:txBody>
-          <a:bodyPr wrap="square" lIns="0" tIns="0" rIns="0" bIns="0" rtlCol="0" anchor="t"/>
-          <a:lstStyle/>
-          <a:p>
-            <a:pPr algn="l" indent="0" marL="0">
-              <a:lnSpc>
-                <a:spcPct val="112000"/>
-              </a:lnSpc>
-              <a:buNone/>
-            </a:pPr>
-            <a:r>
-              <a:rPr lang="en-US" sz="1400" b="1" dirty="0">
-                <a:solidFill>
-                  <a:srgbClr val="3A434D"/>
-                </a:solidFill>
-                <a:latin typeface="Noto Sans KR" pitchFamily="34" charset="0"/>
-                <a:ea typeface="Noto Sans KR" pitchFamily="34" charset="-122"/>
-                <a:cs typeface="Noto Sans KR" pitchFamily="34" charset="-120"/>
-              </a:rPr>
-              <a:t>꾸민 타이틀 화면</a:t>
-            </a:r>
-            <a:pPr algn="l" indent="0" marL="0">
-              <a:lnSpc>
-                <a:spcPct val="112000"/>
-              </a:lnSpc>
-              <a:buNone/>
-            </a:pPr>
-            <a:r>
-              <a:rPr lang="en-US" sz="1400" dirty="0">
-                <a:solidFill>
-                  <a:srgbClr val="3A434D"/>
-                </a:solidFill>
-                <a:latin typeface="Noto Sans KR" pitchFamily="34" charset="0"/>
-                <a:ea typeface="Noto Sans KR" pitchFamily="34" charset="-122"/>
-                <a:cs typeface="Noto Sans KR" pitchFamily="34" charset="-120"/>
-              </a:rPr>
-              <a:t> — AI 이미지 등을 활용해 첫인상 만들기</a:t>
-            </a:r>
-            <a:endParaRPr lang="en-US" sz="1400" dirty="0"/>
-          </a:p>
-        </p:txBody>
-      </p:sp>
-      <p:sp>
-        <p:nvSpPr>
-          <p:cNvPr id="23" name="Shape 21"/>
-          <p:cNvSpPr/>
-          <p:nvPr/>
-        </p:nvSpPr>
-        <p:spPr>
-          <a:xfrm>
-            <a:off x="6135624" y="3762756"/>
-            <a:ext cx="73152" cy="73152"/>
-          </a:xfrm>
-          <a:prstGeom prst="rect">
-            <a:avLst/>
-          </a:prstGeom>
-          <a:solidFill>
-            <a:srgbClr val="E07A2E"/>
-          </a:solidFill>
-          <a:ln/>
-        </p:spPr>
-      </p:sp>
-      <p:sp>
-        <p:nvSpPr>
-          <p:cNvPr id="24" name="Text 22"/>
-          <p:cNvSpPr txBox="1"/>
-          <p:nvPr/>
-        </p:nvSpPr>
-        <p:spPr>
-          <a:xfrm>
-            <a:off x="6327648" y="3688080"/>
-            <a:ext cx="5084064" cy="234696"/>
-          </a:xfrm>
-          <a:prstGeom prst="rect">
-            <a:avLst/>
-          </a:prstGeom>
-          <a:noFill/>
-          <a:ln/>
-        </p:spPr>
-        <p:txBody>
-          <a:bodyPr wrap="square" lIns="0" tIns="0" rIns="0" bIns="0" rtlCol="0" anchor="t"/>
-          <a:lstStyle/>
-          <a:p>
-            <a:pPr algn="l" indent="0" marL="0">
-              <a:lnSpc>
-                <a:spcPct val="112000"/>
-              </a:lnSpc>
-              <a:buNone/>
-            </a:pPr>
-            <a:r>
-              <a:rPr lang="en-US" sz="1400" b="1" dirty="0">
-                <a:solidFill>
-                  <a:srgbClr val="3A434D"/>
-                </a:solidFill>
-                <a:latin typeface="Noto Sans KR" pitchFamily="34" charset="0"/>
-                <a:ea typeface="Noto Sans KR" pitchFamily="34" charset="-122"/>
-                <a:cs typeface="Noto Sans KR" pitchFamily="34" charset="-120"/>
-              </a:rPr>
-              <a:t>기록 2종</a:t>
-            </a:r>
-            <a:pPr algn="l" indent="0" marL="0">
-              <a:lnSpc>
-                <a:spcPct val="112000"/>
-              </a:lnSpc>
-              <a:buNone/>
-            </a:pPr>
-            <a:r>
-              <a:rPr lang="en-US" sz="1400" dirty="0">
-                <a:solidFill>
-                  <a:srgbClr val="3A434D"/>
-                </a:solidFill>
-                <a:latin typeface="Noto Sans KR" pitchFamily="34" charset="0"/>
-                <a:ea typeface="Noto Sans KR" pitchFamily="34" charset="-122"/>
-                <a:cs typeface="Noto Sans KR" pitchFamily="34" charset="-120"/>
-              </a:rPr>
-              <a:t> — 에셋 목록 · AI 사용 기록</a:t>
-            </a:r>
-            <a:endParaRPr lang="en-US" sz="1400" dirty="0"/>
-          </a:p>
-        </p:txBody>
-      </p:sp>
-      <p:sp>
-        <p:nvSpPr>
-          <p:cNvPr id="25" name="Shape 23"/>
-          <p:cNvSpPr/>
-          <p:nvPr/>
-        </p:nvSpPr>
-        <p:spPr>
-          <a:xfrm>
-            <a:off x="6135624" y="4073652"/>
-            <a:ext cx="73152" cy="73152"/>
-          </a:xfrm>
-          <a:prstGeom prst="rect">
-            <a:avLst/>
-          </a:prstGeom>
-          <a:solidFill>
-            <a:srgbClr val="E07A2E"/>
-          </a:solidFill>
-          <a:ln/>
-        </p:spPr>
-      </p:sp>
-      <p:sp>
-        <p:nvSpPr>
-          <p:cNvPr id="26" name="Text 24"/>
-          <p:cNvSpPr txBox="1"/>
-          <p:nvPr/>
-        </p:nvSpPr>
-        <p:spPr>
-          <a:xfrm>
-            <a:off x="6327648" y="3998976"/>
-            <a:ext cx="5084064" cy="469392"/>
-          </a:xfrm>
-          <a:prstGeom prst="rect">
-            <a:avLst/>
-          </a:prstGeom>
-          <a:noFill/>
-          <a:ln/>
-        </p:spPr>
-        <p:txBody>
-          <a:bodyPr wrap="square" lIns="0" tIns="0" rIns="0" bIns="0" rtlCol="0" anchor="t"/>
-          <a:lstStyle/>
-          <a:p>
-            <a:pPr algn="l" indent="0" marL="0">
-              <a:lnSpc>
-                <a:spcPct val="112000"/>
-              </a:lnSpc>
-              <a:buNone/>
-            </a:pPr>
-            <a:r>
-              <a:rPr lang="en-US" sz="1400" b="1" dirty="0">
-                <a:solidFill>
-                  <a:srgbClr val="3A434D"/>
-                </a:solidFill>
-                <a:latin typeface="Noto Sans KR" pitchFamily="34" charset="0"/>
-                <a:ea typeface="Noto Sans KR" pitchFamily="34" charset="-122"/>
-                <a:cs typeface="Noto Sans KR" pitchFamily="34" charset="-120"/>
-              </a:rPr>
-              <a:t>과정 설명</a:t>
-            </a:r>
-            <a:pPr algn="l" indent="0" marL="0">
-              <a:lnSpc>
-                <a:spcPct val="112000"/>
-              </a:lnSpc>
-              <a:buNone/>
-            </a:pPr>
-            <a:r>
-              <a:rPr lang="en-US" sz="1400" dirty="0">
-                <a:solidFill>
-                  <a:srgbClr val="3A434D"/>
-                </a:solidFill>
-                <a:latin typeface="Noto Sans KR" pitchFamily="34" charset="0"/>
-                <a:ea typeface="Noto Sans KR" pitchFamily="34" charset="-122"/>
-                <a:cs typeface="Noto Sans KR" pitchFamily="34" charset="-120"/>
-              </a:rPr>
-              <a:t> — 무엇을 어떤 도구로 만들었는지 + 내 스크립트 한 부분</a:t>
-            </a:r>
-            <a:endParaRPr lang="en-US" sz="1400" dirty="0"/>
-          </a:p>
-        </p:txBody>
-      </p:sp>
-      <p:sp>
-        <p:nvSpPr>
-          <p:cNvPr id="27" name="Shape 25"/>
-          <p:cNvSpPr/>
-          <p:nvPr/>
-        </p:nvSpPr>
-        <p:spPr>
-          <a:xfrm>
-            <a:off x="548640" y="5577840"/>
-            <a:ext cx="11091672" cy="548640"/>
-          </a:xfrm>
-          <a:prstGeom prst="roundRect">
-            <a:avLst>
-              <a:gd name="adj" fmla="val 16667"/>
-            </a:avLst>
-          </a:prstGeom>
-          <a:solidFill>
-            <a:srgbClr val="FDF0E4"/>
-          </a:solidFill>
-          <a:ln/>
-        </p:spPr>
-      </p:sp>
-      <p:sp>
-        <p:nvSpPr>
-          <p:cNvPr id="28" name="Text 26"/>
-          <p:cNvSpPr txBox="1"/>
-          <p:nvPr/>
-        </p:nvSpPr>
-        <p:spPr>
-          <a:xfrm>
-            <a:off x="777240" y="5705856"/>
-            <a:ext cx="1463040" cy="292608"/>
-          </a:xfrm>
-          <a:prstGeom prst="rect">
-            <a:avLst/>
-          </a:prstGeom>
-          <a:noFill/>
-          <a:ln/>
-        </p:spPr>
-        <p:txBody>
-          <a:bodyPr wrap="square" lIns="0" tIns="0" rIns="0" bIns="0" rtlCol="0" anchor="t"/>
-          <a:lstStyle/>
-          <a:p>
-            <a:pPr algn="l" indent="0" marL="0">
-              <a:lnSpc>
-                <a:spcPct val="115000"/>
-              </a:lnSpc>
-              <a:buNone/>
-            </a:pPr>
-            <a:r>
-              <a:rPr lang="en-US" sz="1300" b="1" dirty="0">
-                <a:solidFill>
-                  <a:srgbClr val="E07A2E"/>
-                </a:solidFill>
-                <a:latin typeface="Noto Sans KR" pitchFamily="34" charset="0"/>
-                <a:ea typeface="Noto Sans KR" pitchFamily="34" charset="-122"/>
-                <a:cs typeface="Noto Sans KR" pitchFamily="34" charset="-120"/>
-              </a:rPr>
-              <a:t>핵심 요약</a:t>
-            </a:r>
-            <a:endParaRPr lang="en-US" sz="1300" dirty="0"/>
-          </a:p>
-        </p:txBody>
-      </p:sp>
-      <p:sp>
-        <p:nvSpPr>
-          <p:cNvPr id="29" name="Shape 27"/>
-          <p:cNvSpPr/>
-          <p:nvPr/>
-        </p:nvSpPr>
-        <p:spPr>
-          <a:xfrm>
-            <a:off x="2176272" y="5771388"/>
-            <a:ext cx="73152" cy="73152"/>
-          </a:xfrm>
-          <a:prstGeom prst="rect">
-            <a:avLst/>
-          </a:prstGeom>
-          <a:solidFill>
-            <a:srgbClr val="E07A2E"/>
-          </a:solidFill>
-          <a:ln/>
-        </p:spPr>
-      </p:sp>
-      <p:sp>
-        <p:nvSpPr>
-          <p:cNvPr id="30" name="Text 28"/>
-          <p:cNvSpPr txBox="1"/>
-          <p:nvPr/>
-        </p:nvSpPr>
-        <p:spPr>
-          <a:xfrm>
-            <a:off x="2368296" y="5696712"/>
-            <a:ext cx="9089136" cy="234696"/>
-          </a:xfrm>
-          <a:prstGeom prst="rect">
-            <a:avLst/>
-          </a:prstGeom>
-          <a:noFill/>
-          <a:ln/>
-        </p:spPr>
-        <p:txBody>
-          <a:bodyPr wrap="square" lIns="0" tIns="0" rIns="0" bIns="0" rtlCol="0" anchor="t"/>
-          <a:lstStyle/>
-          <a:p>
-            <a:pPr algn="l" indent="0" marL="0">
-              <a:lnSpc>
-                <a:spcPct val="112000"/>
-              </a:lnSpc>
-              <a:buNone/>
-            </a:pPr>
-            <a:r>
-              <a:rPr lang="en-US" sz="1400" dirty="0">
-                <a:solidFill>
-                  <a:srgbClr val="3A434D"/>
-                </a:solidFill>
-                <a:latin typeface="Noto Sans KR" pitchFamily="34" charset="0"/>
-                <a:ea typeface="Noto Sans KR" pitchFamily="34" charset="-122"/>
-                <a:cs typeface="Noto Sans KR" pitchFamily="34" charset="-120"/>
-              </a:rPr>
-              <a:t>평가는 위 항목을 </a:t>
-            </a:r>
-            <a:pPr algn="l" indent="0" marL="0">
-              <a:lnSpc>
-                <a:spcPct val="112000"/>
-              </a:lnSpc>
-              <a:buNone/>
-            </a:pPr>
-            <a:r>
-              <a:rPr lang="en-US" sz="1400" b="1" dirty="0">
-                <a:solidFill>
-                  <a:srgbClr val="3A434D"/>
-                </a:solidFill>
-                <a:latin typeface="Noto Sans KR" pitchFamily="34" charset="0"/>
-                <a:ea typeface="Noto Sans KR" pitchFamily="34" charset="-122"/>
-                <a:cs typeface="Noto Sans KR" pitchFamily="34" charset="-120"/>
-              </a:rPr>
-              <a:t>보는 관점</a:t>
-            </a:r>
-            <a:pPr algn="l" indent="0" marL="0">
-              <a:lnSpc>
-                <a:spcPct val="112000"/>
-              </a:lnSpc>
-              <a:buNone/>
-            </a:pPr>
-            <a:r>
-              <a:rPr lang="en-US" sz="1400" dirty="0">
-                <a:solidFill>
-                  <a:srgbClr val="3A434D"/>
-                </a:solidFill>
-                <a:latin typeface="Noto Sans KR" pitchFamily="34" charset="0"/>
-                <a:ea typeface="Noto Sans KR" pitchFamily="34" charset="-122"/>
-                <a:cs typeface="Noto Sans KR" pitchFamily="34" charset="-120"/>
-              </a:rPr>
-              <a:t>으로 합니다. 게임 종류로 점수를 나누지 않습니다.</a:t>
-            </a:r>
-            <a:endParaRPr lang="en-US" sz="1400" dirty="0"/>
-          </a:p>
-        </p:txBody>
-      </p:sp>
-      <p:sp>
-        <p:nvSpPr>
-          <p:cNvPr id="25" name="Slide Number Placeholder 0"/>
-          <p:cNvSpPr>
-            <a:spLocks noGrp="1"/>
-          </p:cNvSpPr>
-          <p:nvPr>
-            <p:ph type="sldNum" sz="quarter" idx="4294967295"/>
-          </p:nvPr>
-        </p:nvSpPr>
-        <p:spPr>
-          <a:xfrm>
-            <a:off x="11155680" y="6446520"/>
-            <a:ext cx="502920" cy="256032"/>
-          </a:xfrm>
-          <a:prstGeom prst="rect">
-            <a:avLst/>
-          </a:prstGeom>
-          <a:extLst>
-            <a:ext uri="{C572A759-6A51-4108-AA02-DFA0A04FC94B}">
-              <ma14:wrappingTextBoxFlag xmlns:ma14="http://schemas.microsoft.com/office/mac/drawingml/2011/main" val="0"/>
-            </a:ext>
-          </a:extLst>
-        </p:spPr>
-        <p:txBody>
-          <a:bodyPr/>
-          <a:lstStyle>
-            <a:lvl1pPr>
-              <a:defRPr sz="1000">
-                <a:solidFill>
-                  <a:srgbClr val="8C96A1"/>
-                </a:solidFill>
-                <a:latin typeface="Noto Sans KR"/>
-                <a:ea typeface="Noto Sans KR"/>
-                <a:cs typeface="Noto Sans KR"/>
-              </a:defRPr>
-            </a:lvl1pPr>
-          </a:lstStyle>
-          <a:p>
-            <a:pPr algn="r"/>
-            <a:fld id="{F7021451-1387-4CA6-816F-3879F97B5CBC}" type="slidenum">
-              <a:rPr b="0" lang="en-US"/>
               <a:t>5</a:t>
             </a:fld>
             <a:endParaRPr lang="en-US"/>
@@ -9244,7 +9373,7 @@
                   <a:srgbClr val="1E242B"/>
                 </a:solidFill>
               </a:rPr>
-              <a:t>AI를 잘 쓰는 것도 실력입니다</a:t>
+              <a:t>기말 완성 기준</a:t>
             </a:r>
             <a:endParaRPr lang="en-US" sz="2800" dirty="0"/>
           </a:p>
@@ -9282,6 +9411,1124 @@
                   <a:srgbClr val="5F6B78"/>
                 </a:solidFill>
               </a:rPr>
+              <a:t>중간의 네 가지 위에 '보기 좋은 게임'과 '도구를 잘 쓴 과정'이 더해집니다</a:t>
+            </a:r>
+            <a:endParaRPr lang="en-US" sz="1500" dirty="0"/>
+          </a:p>
+        </p:txBody>
+      </p:sp>
+      <p:sp>
+        <p:nvSpPr>
+          <p:cNvPr id="5" name="Shape 3"/>
+          <p:cNvSpPr/>
+          <p:nvPr/>
+        </p:nvSpPr>
+        <p:spPr>
+          <a:xfrm>
+            <a:off x="548640" y="1737360"/>
+            <a:ext cx="5120640" cy="3657600"/>
+          </a:xfrm>
+          <a:prstGeom prst="roundRect">
+            <a:avLst>
+              <a:gd name="adj" fmla="val 3000"/>
+            </a:avLst>
+          </a:prstGeom>
+          <a:solidFill>
+            <a:srgbClr val="F3F5F7"/>
+          </a:solidFill>
+          <a:ln/>
+        </p:spPr>
+      </p:sp>
+      <p:sp>
+        <p:nvSpPr>
+          <p:cNvPr id="6" name="Text 4"/>
+          <p:cNvSpPr txBox="1"/>
+          <p:nvPr/>
+        </p:nvSpPr>
+        <p:spPr>
+          <a:xfrm>
+            <a:off x="777240" y="1828800"/>
+            <a:ext cx="4663440" cy="365760"/>
+          </a:xfrm>
+          <a:prstGeom prst="rect">
+            <a:avLst/>
+          </a:prstGeom>
+          <a:noFill/>
+          <a:ln/>
+        </p:spPr>
+        <p:txBody>
+          <a:bodyPr wrap="square" lIns="0" tIns="0" rIns="0" bIns="0" rtlCol="0" anchor="t"/>
+          <a:lstStyle/>
+          <a:p>
+            <a:pPr algn="l" indent="0" marL="0">
+              <a:lnSpc>
+                <a:spcPct val="115000"/>
+              </a:lnSpc>
+              <a:buNone/>
+            </a:pPr>
+            <a:r>
+              <a:rPr lang="en-US" sz="1600" b="1" dirty="0">
+                <a:solidFill>
+                  <a:srgbClr val="5F6B78"/>
+                </a:solidFill>
+                <a:latin typeface="Noto Sans KR" pitchFamily="34" charset="0"/>
+                <a:ea typeface="Noto Sans KR" pitchFamily="34" charset="-122"/>
+                <a:cs typeface="Noto Sans KR" pitchFamily="34" charset="-120"/>
+              </a:rPr>
+              <a:t>중간과 같은 것</a:t>
+            </a:r>
+            <a:endParaRPr lang="en-US" sz="1600" dirty="0"/>
+          </a:p>
+        </p:txBody>
+      </p:sp>
+      <p:sp>
+        <p:nvSpPr>
+          <p:cNvPr id="7" name="Shape 5"/>
+          <p:cNvSpPr/>
+          <p:nvPr/>
+        </p:nvSpPr>
+        <p:spPr>
+          <a:xfrm>
+            <a:off x="804672" y="2360676"/>
+            <a:ext cx="73152" cy="73152"/>
+          </a:xfrm>
+          <a:prstGeom prst="rect">
+            <a:avLst/>
+          </a:prstGeom>
+          <a:solidFill>
+            <a:srgbClr val="8C96A1"/>
+          </a:solidFill>
+          <a:ln/>
+        </p:spPr>
+      </p:sp>
+      <p:sp>
+        <p:nvSpPr>
+          <p:cNvPr id="8" name="Text 6"/>
+          <p:cNvSpPr txBox="1"/>
+          <p:nvPr/>
+        </p:nvSpPr>
+        <p:spPr>
+          <a:xfrm>
+            <a:off x="996696" y="2286000"/>
+            <a:ext cx="4443984" cy="469392"/>
+          </a:xfrm>
+          <a:prstGeom prst="rect">
+            <a:avLst/>
+          </a:prstGeom>
+          <a:noFill/>
+          <a:ln/>
+        </p:spPr>
+        <p:txBody>
+          <a:bodyPr wrap="square" lIns="0" tIns="0" rIns="0" bIns="0" rtlCol="0" anchor="t"/>
+          <a:lstStyle/>
+          <a:p>
+            <a:pPr algn="l" indent="0" marL="0">
+              <a:lnSpc>
+                <a:spcPct val="112000"/>
+              </a:lnSpc>
+              <a:buNone/>
+            </a:pPr>
+            <a:r>
+              <a:rPr lang="en-US" sz="1400" dirty="0">
+                <a:solidFill>
+                  <a:srgbClr val="3A434D"/>
+                </a:solidFill>
+                <a:latin typeface="Noto Sans KR" pitchFamily="34" charset="0"/>
+                <a:ea typeface="Noto Sans KR" pitchFamily="34" charset="-122"/>
+                <a:cs typeface="Noto Sans KR" pitchFamily="34" charset="-120"/>
+              </a:rPr>
+              <a:t>한 판 완주 — 타이틀 → 플레이 → 결과 → RETRY</a:t>
+            </a:r>
+            <a:endParaRPr lang="en-US" sz="1400" dirty="0"/>
+          </a:p>
+        </p:txBody>
+      </p:sp>
+      <p:sp>
+        <p:nvSpPr>
+          <p:cNvPr id="9" name="Shape 7"/>
+          <p:cNvSpPr/>
+          <p:nvPr/>
+        </p:nvSpPr>
+        <p:spPr>
+          <a:xfrm>
+            <a:off x="804672" y="2906268"/>
+            <a:ext cx="73152" cy="73152"/>
+          </a:xfrm>
+          <a:prstGeom prst="rect">
+            <a:avLst/>
+          </a:prstGeom>
+          <a:solidFill>
+            <a:srgbClr val="8C96A1"/>
+          </a:solidFill>
+          <a:ln/>
+        </p:spPr>
+      </p:sp>
+      <p:sp>
+        <p:nvSpPr>
+          <p:cNvPr id="10" name="Text 8"/>
+          <p:cNvSpPr txBox="1"/>
+          <p:nvPr/>
+        </p:nvSpPr>
+        <p:spPr>
+          <a:xfrm>
+            <a:off x="996696" y="2831592"/>
+            <a:ext cx="4443984" cy="234696"/>
+          </a:xfrm>
+          <a:prstGeom prst="rect">
+            <a:avLst/>
+          </a:prstGeom>
+          <a:noFill/>
+          <a:ln/>
+        </p:spPr>
+        <p:txBody>
+          <a:bodyPr wrap="square" lIns="0" tIns="0" rIns="0" bIns="0" rtlCol="0" anchor="t"/>
+          <a:lstStyle/>
+          <a:p>
+            <a:pPr algn="l" indent="0" marL="0">
+              <a:lnSpc>
+                <a:spcPct val="112000"/>
+              </a:lnSpc>
+              <a:buNone/>
+            </a:pPr>
+            <a:r>
+              <a:rPr lang="en-US" sz="1400" dirty="0">
+                <a:solidFill>
+                  <a:srgbClr val="3A434D"/>
+                </a:solidFill>
+                <a:latin typeface="Noto Sans KR" pitchFamily="34" charset="0"/>
+                <a:ea typeface="Noto Sans KR" pitchFamily="34" charset="-122"/>
+                <a:cs typeface="Noto Sans KR" pitchFamily="34" charset="-120"/>
+              </a:rPr>
+              <a:t>화면 3개 — 타이틀 · HUD · 결과</a:t>
+            </a:r>
+            <a:endParaRPr lang="en-US" sz="1400" dirty="0"/>
+          </a:p>
+        </p:txBody>
+      </p:sp>
+      <p:sp>
+        <p:nvSpPr>
+          <p:cNvPr id="11" name="Shape 9"/>
+          <p:cNvSpPr/>
+          <p:nvPr/>
+        </p:nvSpPr>
+        <p:spPr>
+          <a:xfrm>
+            <a:off x="804672" y="3217164"/>
+            <a:ext cx="73152" cy="73152"/>
+          </a:xfrm>
+          <a:prstGeom prst="rect">
+            <a:avLst/>
+          </a:prstGeom>
+          <a:solidFill>
+            <a:srgbClr val="8C96A1"/>
+          </a:solidFill>
+          <a:ln/>
+        </p:spPr>
+      </p:sp>
+      <p:sp>
+        <p:nvSpPr>
+          <p:cNvPr id="12" name="Text 10"/>
+          <p:cNvSpPr txBox="1"/>
+          <p:nvPr/>
+        </p:nvSpPr>
+        <p:spPr>
+          <a:xfrm>
+            <a:off x="996696" y="3142488"/>
+            <a:ext cx="4443984" cy="234696"/>
+          </a:xfrm>
+          <a:prstGeom prst="rect">
+            <a:avLst/>
+          </a:prstGeom>
+          <a:noFill/>
+          <a:ln/>
+        </p:spPr>
+        <p:txBody>
+          <a:bodyPr wrap="square" lIns="0" tIns="0" rIns="0" bIns="0" rtlCol="0" anchor="t"/>
+          <a:lstStyle/>
+          <a:p>
+            <a:pPr algn="l" indent="0" marL="0">
+              <a:lnSpc>
+                <a:spcPct val="112000"/>
+              </a:lnSpc>
+              <a:buNone/>
+            </a:pPr>
+            <a:r>
+              <a:rPr lang="en-US" sz="1400" dirty="0">
+                <a:solidFill>
+                  <a:srgbClr val="3A434D"/>
+                </a:solidFill>
+                <a:latin typeface="Noto Sans KR" pitchFamily="34" charset="0"/>
+                <a:ea typeface="Noto Sans KR" pitchFamily="34" charset="-122"/>
+                <a:cs typeface="Noto Sans KR" pitchFamily="34" charset="-120"/>
+              </a:rPr>
+              <a:t>반응 — 득점 · 성공 · 실패에 소리 + 이펙트</a:t>
+            </a:r>
+            <a:endParaRPr lang="en-US" sz="1400" dirty="0"/>
+          </a:p>
+        </p:txBody>
+      </p:sp>
+      <p:sp>
+        <p:nvSpPr>
+          <p:cNvPr id="13" name="Shape 11"/>
+          <p:cNvSpPr/>
+          <p:nvPr/>
+        </p:nvSpPr>
+        <p:spPr>
+          <a:xfrm>
+            <a:off x="804672" y="3528060"/>
+            <a:ext cx="73152" cy="73152"/>
+          </a:xfrm>
+          <a:prstGeom prst="rect">
+            <a:avLst/>
+          </a:prstGeom>
+          <a:solidFill>
+            <a:srgbClr val="8C96A1"/>
+          </a:solidFill>
+          <a:ln/>
+        </p:spPr>
+      </p:sp>
+      <p:sp>
+        <p:nvSpPr>
+          <p:cNvPr id="14" name="Text 12"/>
+          <p:cNvSpPr txBox="1"/>
+          <p:nvPr/>
+        </p:nvSpPr>
+        <p:spPr>
+          <a:xfrm>
+            <a:off x="996696" y="3453384"/>
+            <a:ext cx="4443984" cy="234696"/>
+          </a:xfrm>
+          <a:prstGeom prst="rect">
+            <a:avLst/>
+          </a:prstGeom>
+          <a:noFill/>
+          <a:ln/>
+        </p:spPr>
+        <p:txBody>
+          <a:bodyPr wrap="square" lIns="0" tIns="0" rIns="0" bIns="0" rtlCol="0" anchor="t"/>
+          <a:lstStyle/>
+          <a:p>
+            <a:pPr algn="l" indent="0" marL="0">
+              <a:lnSpc>
+                <a:spcPct val="112000"/>
+              </a:lnSpc>
+              <a:buNone/>
+            </a:pPr>
+            <a:r>
+              <a:rPr lang="en-US" sz="1400" dirty="0">
+                <a:solidFill>
+                  <a:srgbClr val="3A434D"/>
+                </a:solidFill>
+                <a:latin typeface="Noto Sans KR" pitchFamily="34" charset="0"/>
+                <a:ea typeface="Noto Sans KR" pitchFamily="34" charset="-122"/>
+                <a:cs typeface="Noto Sans KR" pitchFamily="34" charset="-120"/>
+              </a:rPr>
+              <a:t>Windows 빌드 — .exe로 시연</a:t>
+            </a:r>
+            <a:endParaRPr lang="en-US" sz="1400" dirty="0"/>
+          </a:p>
+        </p:txBody>
+      </p:sp>
+      <p:sp>
+        <p:nvSpPr>
+          <p:cNvPr id="15" name="Shape 13"/>
+          <p:cNvSpPr/>
+          <p:nvPr/>
+        </p:nvSpPr>
+        <p:spPr>
+          <a:xfrm>
+            <a:off x="5879592" y="1737360"/>
+            <a:ext cx="5760720" cy="3657600"/>
+          </a:xfrm>
+          <a:prstGeom prst="roundRect">
+            <a:avLst>
+              <a:gd name="adj" fmla="val 3000"/>
+            </a:avLst>
+          </a:prstGeom>
+          <a:solidFill>
+            <a:srgbClr val="FDF0E4"/>
+          </a:solidFill>
+          <a:ln/>
+        </p:spPr>
+      </p:sp>
+      <p:sp>
+        <p:nvSpPr>
+          <p:cNvPr id="16" name="Text 14"/>
+          <p:cNvSpPr txBox="1"/>
+          <p:nvPr/>
+        </p:nvSpPr>
+        <p:spPr>
+          <a:xfrm>
+            <a:off x="6108192" y="1828800"/>
+            <a:ext cx="5303520" cy="365760"/>
+          </a:xfrm>
+          <a:prstGeom prst="rect">
+            <a:avLst/>
+          </a:prstGeom>
+          <a:noFill/>
+          <a:ln/>
+        </p:spPr>
+        <p:txBody>
+          <a:bodyPr wrap="square" lIns="0" tIns="0" rIns="0" bIns="0" rtlCol="0" anchor="t"/>
+          <a:lstStyle/>
+          <a:p>
+            <a:pPr algn="l" indent="0" marL="0">
+              <a:lnSpc>
+                <a:spcPct val="115000"/>
+              </a:lnSpc>
+              <a:buNone/>
+            </a:pPr>
+            <a:r>
+              <a:rPr lang="en-US" sz="1600" b="1" dirty="0">
+                <a:solidFill>
+                  <a:srgbClr val="E07A2E"/>
+                </a:solidFill>
+                <a:latin typeface="Noto Sans KR" pitchFamily="34" charset="0"/>
+                <a:ea typeface="Noto Sans KR" pitchFamily="34" charset="-122"/>
+                <a:cs typeface="Noto Sans KR" pitchFamily="34" charset="-120"/>
+              </a:rPr>
+              <a:t>이번에 더해지는 것</a:t>
+            </a:r>
+            <a:endParaRPr lang="en-US" sz="1600" dirty="0"/>
+          </a:p>
+        </p:txBody>
+      </p:sp>
+      <p:sp>
+        <p:nvSpPr>
+          <p:cNvPr id="17" name="Shape 15"/>
+          <p:cNvSpPr/>
+          <p:nvPr/>
+        </p:nvSpPr>
+        <p:spPr>
+          <a:xfrm>
+            <a:off x="6135624" y="2360676"/>
+            <a:ext cx="73152" cy="73152"/>
+          </a:xfrm>
+          <a:prstGeom prst="rect">
+            <a:avLst/>
+          </a:prstGeom>
+          <a:solidFill>
+            <a:srgbClr val="E07A2E"/>
+          </a:solidFill>
+          <a:ln/>
+        </p:spPr>
+      </p:sp>
+      <p:sp>
+        <p:nvSpPr>
+          <p:cNvPr id="18" name="Text 16"/>
+          <p:cNvSpPr txBox="1"/>
+          <p:nvPr/>
+        </p:nvSpPr>
+        <p:spPr>
+          <a:xfrm>
+            <a:off x="6327648" y="2286000"/>
+            <a:ext cx="5084064" cy="234696"/>
+          </a:xfrm>
+          <a:prstGeom prst="rect">
+            <a:avLst/>
+          </a:prstGeom>
+          <a:noFill/>
+          <a:ln/>
+        </p:spPr>
+        <p:txBody>
+          <a:bodyPr wrap="square" lIns="0" tIns="0" rIns="0" bIns="0" rtlCol="0" anchor="t"/>
+          <a:lstStyle/>
+          <a:p>
+            <a:pPr algn="l" indent="0" marL="0">
+              <a:lnSpc>
+                <a:spcPct val="112000"/>
+              </a:lnSpc>
+              <a:buNone/>
+            </a:pPr>
+            <a:r>
+              <a:rPr lang="en-US" sz="1400" b="1" dirty="0">
+                <a:solidFill>
+                  <a:srgbClr val="3A434D"/>
+                </a:solidFill>
+                <a:latin typeface="Noto Sans KR" pitchFamily="34" charset="0"/>
+                <a:ea typeface="Noto Sans KR" pitchFamily="34" charset="-122"/>
+                <a:cs typeface="Noto Sans KR" pitchFamily="34" charset="-120"/>
+              </a:rPr>
+              <a:t>새 게임</a:t>
+            </a:r>
+            <a:pPr algn="l" indent="0" marL="0">
+              <a:lnSpc>
+                <a:spcPct val="112000"/>
+              </a:lnSpc>
+              <a:buNone/>
+            </a:pPr>
+            <a:r>
+              <a:rPr lang="en-US" sz="1400" dirty="0">
+                <a:solidFill>
+                  <a:srgbClr val="3A434D"/>
+                </a:solidFill>
+                <a:latin typeface="Noto Sans KR" pitchFamily="34" charset="0"/>
+                <a:ea typeface="Noto Sans KR" pitchFamily="34" charset="-122"/>
+                <a:cs typeface="Noto Sans KR" pitchFamily="34" charset="-120"/>
+              </a:rPr>
+              <a:t> — 중간과 다른 새 프로젝트</a:t>
+            </a:r>
+            <a:endParaRPr lang="en-US" sz="1400" dirty="0"/>
+          </a:p>
+        </p:txBody>
+      </p:sp>
+      <p:sp>
+        <p:nvSpPr>
+          <p:cNvPr id="19" name="Shape 17"/>
+          <p:cNvSpPr/>
+          <p:nvPr/>
+        </p:nvSpPr>
+        <p:spPr>
+          <a:xfrm>
+            <a:off x="6135624" y="2671572"/>
+            <a:ext cx="73152" cy="73152"/>
+          </a:xfrm>
+          <a:prstGeom prst="rect">
+            <a:avLst/>
+          </a:prstGeom>
+          <a:solidFill>
+            <a:srgbClr val="E07A2E"/>
+          </a:solidFill>
+          <a:ln/>
+        </p:spPr>
+      </p:sp>
+      <p:sp>
+        <p:nvSpPr>
+          <p:cNvPr id="20" name="Text 18"/>
+          <p:cNvSpPr txBox="1"/>
+          <p:nvPr/>
+        </p:nvSpPr>
+        <p:spPr>
+          <a:xfrm>
+            <a:off x="6327648" y="2596896"/>
+            <a:ext cx="5084064" cy="469392"/>
+          </a:xfrm>
+          <a:prstGeom prst="rect">
+            <a:avLst/>
+          </a:prstGeom>
+          <a:noFill/>
+          <a:ln/>
+        </p:spPr>
+        <p:txBody>
+          <a:bodyPr wrap="square" lIns="0" tIns="0" rIns="0" bIns="0" rtlCol="0" anchor="t"/>
+          <a:lstStyle/>
+          <a:p>
+            <a:pPr algn="l" indent="0" marL="0">
+              <a:lnSpc>
+                <a:spcPct val="112000"/>
+              </a:lnSpc>
+              <a:buNone/>
+            </a:pPr>
+            <a:r>
+              <a:rPr lang="en-US" sz="1400" b="1" dirty="0">
+                <a:solidFill>
+                  <a:srgbClr val="3A434D"/>
+                </a:solidFill>
+                <a:latin typeface="Noto Sans KR" pitchFamily="34" charset="0"/>
+                <a:ea typeface="Noto Sans KR" pitchFamily="34" charset="-122"/>
+                <a:cs typeface="Noto Sans KR" pitchFamily="34" charset="-120"/>
+              </a:rPr>
+              <a:t>보기 좋은 그래픽</a:t>
+            </a:r>
+            <a:pPr algn="l" indent="0" marL="0">
+              <a:lnSpc>
+                <a:spcPct val="112000"/>
+              </a:lnSpc>
+              <a:buNone/>
+            </a:pPr>
+            <a:r>
+              <a:rPr lang="en-US" sz="1400" dirty="0">
+                <a:solidFill>
+                  <a:srgbClr val="3A434D"/>
+                </a:solidFill>
+                <a:latin typeface="Noto Sans KR" pitchFamily="34" charset="0"/>
+                <a:ea typeface="Noto Sans KR" pitchFamily="34" charset="-122"/>
+                <a:cs typeface="Noto Sans KR" pitchFamily="34" charset="-120"/>
+              </a:rPr>
+              <a:t> — 에셋 · 조명으로 스타일이 통일된 화면</a:t>
+            </a:r>
+            <a:endParaRPr lang="en-US" sz="1400" dirty="0"/>
+          </a:p>
+        </p:txBody>
+      </p:sp>
+      <p:sp>
+        <p:nvSpPr>
+          <p:cNvPr id="21" name="Shape 19"/>
+          <p:cNvSpPr/>
+          <p:nvPr/>
+        </p:nvSpPr>
+        <p:spPr>
+          <a:xfrm>
+            <a:off x="6135624" y="3217164"/>
+            <a:ext cx="73152" cy="73152"/>
+          </a:xfrm>
+          <a:prstGeom prst="rect">
+            <a:avLst/>
+          </a:prstGeom>
+          <a:solidFill>
+            <a:srgbClr val="E07A2E"/>
+          </a:solidFill>
+          <a:ln/>
+        </p:spPr>
+      </p:sp>
+      <p:sp>
+        <p:nvSpPr>
+          <p:cNvPr id="22" name="Text 20"/>
+          <p:cNvSpPr txBox="1"/>
+          <p:nvPr/>
+        </p:nvSpPr>
+        <p:spPr>
+          <a:xfrm>
+            <a:off x="6327648" y="3142488"/>
+            <a:ext cx="5084064" cy="469392"/>
+          </a:xfrm>
+          <a:prstGeom prst="rect">
+            <a:avLst/>
+          </a:prstGeom>
+          <a:noFill/>
+          <a:ln/>
+        </p:spPr>
+        <p:txBody>
+          <a:bodyPr wrap="square" lIns="0" tIns="0" rIns="0" bIns="0" rtlCol="0" anchor="t"/>
+          <a:lstStyle/>
+          <a:p>
+            <a:pPr algn="l" indent="0" marL="0">
+              <a:lnSpc>
+                <a:spcPct val="112000"/>
+              </a:lnSpc>
+              <a:buNone/>
+            </a:pPr>
+            <a:r>
+              <a:rPr lang="en-US" sz="1400" b="1" dirty="0">
+                <a:solidFill>
+                  <a:srgbClr val="3A434D"/>
+                </a:solidFill>
+                <a:latin typeface="Noto Sans KR" pitchFamily="34" charset="0"/>
+                <a:ea typeface="Noto Sans KR" pitchFamily="34" charset="-122"/>
+                <a:cs typeface="Noto Sans KR" pitchFamily="34" charset="-120"/>
+              </a:rPr>
+              <a:t>꾸민 타이틀 화면</a:t>
+            </a:r>
+            <a:pPr algn="l" indent="0" marL="0">
+              <a:lnSpc>
+                <a:spcPct val="112000"/>
+              </a:lnSpc>
+              <a:buNone/>
+            </a:pPr>
+            <a:r>
+              <a:rPr lang="en-US" sz="1400" dirty="0">
+                <a:solidFill>
+                  <a:srgbClr val="3A434D"/>
+                </a:solidFill>
+                <a:latin typeface="Noto Sans KR" pitchFamily="34" charset="0"/>
+                <a:ea typeface="Noto Sans KR" pitchFamily="34" charset="-122"/>
+                <a:cs typeface="Noto Sans KR" pitchFamily="34" charset="-120"/>
+              </a:rPr>
+              <a:t> — AI 이미지 등을 활용해 첫인상 만들기</a:t>
+            </a:r>
+            <a:endParaRPr lang="en-US" sz="1400" dirty="0"/>
+          </a:p>
+        </p:txBody>
+      </p:sp>
+      <p:sp>
+        <p:nvSpPr>
+          <p:cNvPr id="23" name="Shape 21"/>
+          <p:cNvSpPr/>
+          <p:nvPr/>
+        </p:nvSpPr>
+        <p:spPr>
+          <a:xfrm>
+            <a:off x="6135624" y="3762756"/>
+            <a:ext cx="73152" cy="73152"/>
+          </a:xfrm>
+          <a:prstGeom prst="rect">
+            <a:avLst/>
+          </a:prstGeom>
+          <a:solidFill>
+            <a:srgbClr val="E07A2E"/>
+          </a:solidFill>
+          <a:ln/>
+        </p:spPr>
+      </p:sp>
+      <p:sp>
+        <p:nvSpPr>
+          <p:cNvPr id="24" name="Text 22"/>
+          <p:cNvSpPr txBox="1"/>
+          <p:nvPr/>
+        </p:nvSpPr>
+        <p:spPr>
+          <a:xfrm>
+            <a:off x="6327648" y="3688080"/>
+            <a:ext cx="5084064" cy="234696"/>
+          </a:xfrm>
+          <a:prstGeom prst="rect">
+            <a:avLst/>
+          </a:prstGeom>
+          <a:noFill/>
+          <a:ln/>
+        </p:spPr>
+        <p:txBody>
+          <a:bodyPr wrap="square" lIns="0" tIns="0" rIns="0" bIns="0" rtlCol="0" anchor="t"/>
+          <a:lstStyle/>
+          <a:p>
+            <a:pPr algn="l" indent="0" marL="0">
+              <a:lnSpc>
+                <a:spcPct val="112000"/>
+              </a:lnSpc>
+              <a:buNone/>
+            </a:pPr>
+            <a:r>
+              <a:rPr lang="en-US" sz="1400" b="1" dirty="0">
+                <a:solidFill>
+                  <a:srgbClr val="3A434D"/>
+                </a:solidFill>
+                <a:latin typeface="Noto Sans KR" pitchFamily="34" charset="0"/>
+                <a:ea typeface="Noto Sans KR" pitchFamily="34" charset="-122"/>
+                <a:cs typeface="Noto Sans KR" pitchFamily="34" charset="-120"/>
+              </a:rPr>
+              <a:t>기록 2종</a:t>
+            </a:r>
+            <a:pPr algn="l" indent="0" marL="0">
+              <a:lnSpc>
+                <a:spcPct val="112000"/>
+              </a:lnSpc>
+              <a:buNone/>
+            </a:pPr>
+            <a:r>
+              <a:rPr lang="en-US" sz="1400" dirty="0">
+                <a:solidFill>
+                  <a:srgbClr val="3A434D"/>
+                </a:solidFill>
+                <a:latin typeface="Noto Sans KR" pitchFamily="34" charset="0"/>
+                <a:ea typeface="Noto Sans KR" pitchFamily="34" charset="-122"/>
+                <a:cs typeface="Noto Sans KR" pitchFamily="34" charset="-120"/>
+              </a:rPr>
+              <a:t> — 에셋 목록 · AI 사용 기록</a:t>
+            </a:r>
+            <a:endParaRPr lang="en-US" sz="1400" dirty="0"/>
+          </a:p>
+        </p:txBody>
+      </p:sp>
+      <p:sp>
+        <p:nvSpPr>
+          <p:cNvPr id="25" name="Shape 23"/>
+          <p:cNvSpPr/>
+          <p:nvPr/>
+        </p:nvSpPr>
+        <p:spPr>
+          <a:xfrm>
+            <a:off x="6135624" y="4073652"/>
+            <a:ext cx="73152" cy="73152"/>
+          </a:xfrm>
+          <a:prstGeom prst="rect">
+            <a:avLst/>
+          </a:prstGeom>
+          <a:solidFill>
+            <a:srgbClr val="E07A2E"/>
+          </a:solidFill>
+          <a:ln/>
+        </p:spPr>
+      </p:sp>
+      <p:sp>
+        <p:nvSpPr>
+          <p:cNvPr id="26" name="Text 24"/>
+          <p:cNvSpPr txBox="1"/>
+          <p:nvPr/>
+        </p:nvSpPr>
+        <p:spPr>
+          <a:xfrm>
+            <a:off x="6327648" y="3998976"/>
+            <a:ext cx="5084064" cy="469392"/>
+          </a:xfrm>
+          <a:prstGeom prst="rect">
+            <a:avLst/>
+          </a:prstGeom>
+          <a:noFill/>
+          <a:ln/>
+        </p:spPr>
+        <p:txBody>
+          <a:bodyPr wrap="square" lIns="0" tIns="0" rIns="0" bIns="0" rtlCol="0" anchor="t"/>
+          <a:lstStyle/>
+          <a:p>
+            <a:pPr algn="l" indent="0" marL="0">
+              <a:lnSpc>
+                <a:spcPct val="112000"/>
+              </a:lnSpc>
+              <a:buNone/>
+            </a:pPr>
+            <a:r>
+              <a:rPr lang="en-US" sz="1400" b="1" dirty="0">
+                <a:solidFill>
+                  <a:srgbClr val="3A434D"/>
+                </a:solidFill>
+                <a:latin typeface="Noto Sans KR" pitchFamily="34" charset="0"/>
+                <a:ea typeface="Noto Sans KR" pitchFamily="34" charset="-122"/>
+                <a:cs typeface="Noto Sans KR" pitchFamily="34" charset="-120"/>
+              </a:rPr>
+              <a:t>과정 설명</a:t>
+            </a:r>
+            <a:pPr algn="l" indent="0" marL="0">
+              <a:lnSpc>
+                <a:spcPct val="112000"/>
+              </a:lnSpc>
+              <a:buNone/>
+            </a:pPr>
+            <a:r>
+              <a:rPr lang="en-US" sz="1400" dirty="0">
+                <a:solidFill>
+                  <a:srgbClr val="3A434D"/>
+                </a:solidFill>
+                <a:latin typeface="Noto Sans KR" pitchFamily="34" charset="0"/>
+                <a:ea typeface="Noto Sans KR" pitchFamily="34" charset="-122"/>
+                <a:cs typeface="Noto Sans KR" pitchFamily="34" charset="-120"/>
+              </a:rPr>
+              <a:t> — 무엇을 어떤 도구로 만들었는지 + 내 스크립트 한 부분</a:t>
+            </a:r>
+            <a:endParaRPr lang="en-US" sz="1400" dirty="0"/>
+          </a:p>
+        </p:txBody>
+      </p:sp>
+      <p:sp>
+        <p:nvSpPr>
+          <p:cNvPr id="27" name="Shape 25"/>
+          <p:cNvSpPr/>
+          <p:nvPr/>
+        </p:nvSpPr>
+        <p:spPr>
+          <a:xfrm>
+            <a:off x="548640" y="5577840"/>
+            <a:ext cx="11091672" cy="548640"/>
+          </a:xfrm>
+          <a:prstGeom prst="roundRect">
+            <a:avLst>
+              <a:gd name="adj" fmla="val 16667"/>
+            </a:avLst>
+          </a:prstGeom>
+          <a:solidFill>
+            <a:srgbClr val="FDF0E4"/>
+          </a:solidFill>
+          <a:ln/>
+        </p:spPr>
+      </p:sp>
+      <p:sp>
+        <p:nvSpPr>
+          <p:cNvPr id="28" name="Text 26"/>
+          <p:cNvSpPr txBox="1"/>
+          <p:nvPr/>
+        </p:nvSpPr>
+        <p:spPr>
+          <a:xfrm>
+            <a:off x="777240" y="5705856"/>
+            <a:ext cx="1463040" cy="292608"/>
+          </a:xfrm>
+          <a:prstGeom prst="rect">
+            <a:avLst/>
+          </a:prstGeom>
+          <a:noFill/>
+          <a:ln/>
+        </p:spPr>
+        <p:txBody>
+          <a:bodyPr wrap="square" lIns="0" tIns="0" rIns="0" bIns="0" rtlCol="0" anchor="t"/>
+          <a:lstStyle/>
+          <a:p>
+            <a:pPr algn="l" indent="0" marL="0">
+              <a:lnSpc>
+                <a:spcPct val="115000"/>
+              </a:lnSpc>
+              <a:buNone/>
+            </a:pPr>
+            <a:r>
+              <a:rPr lang="en-US" sz="1300" b="1" dirty="0">
+                <a:solidFill>
+                  <a:srgbClr val="E07A2E"/>
+                </a:solidFill>
+                <a:latin typeface="Noto Sans KR" pitchFamily="34" charset="0"/>
+                <a:ea typeface="Noto Sans KR" pitchFamily="34" charset="-122"/>
+                <a:cs typeface="Noto Sans KR" pitchFamily="34" charset="-120"/>
+              </a:rPr>
+              <a:t>핵심 요약</a:t>
+            </a:r>
+            <a:endParaRPr lang="en-US" sz="1300" dirty="0"/>
+          </a:p>
+        </p:txBody>
+      </p:sp>
+      <p:sp>
+        <p:nvSpPr>
+          <p:cNvPr id="29" name="Shape 27"/>
+          <p:cNvSpPr/>
+          <p:nvPr/>
+        </p:nvSpPr>
+        <p:spPr>
+          <a:xfrm>
+            <a:off x="2176272" y="5771388"/>
+            <a:ext cx="73152" cy="73152"/>
+          </a:xfrm>
+          <a:prstGeom prst="rect">
+            <a:avLst/>
+          </a:prstGeom>
+          <a:solidFill>
+            <a:srgbClr val="E07A2E"/>
+          </a:solidFill>
+          <a:ln/>
+        </p:spPr>
+      </p:sp>
+      <p:sp>
+        <p:nvSpPr>
+          <p:cNvPr id="30" name="Text 28"/>
+          <p:cNvSpPr txBox="1"/>
+          <p:nvPr/>
+        </p:nvSpPr>
+        <p:spPr>
+          <a:xfrm>
+            <a:off x="2368296" y="5696712"/>
+            <a:ext cx="9089136" cy="234696"/>
+          </a:xfrm>
+          <a:prstGeom prst="rect">
+            <a:avLst/>
+          </a:prstGeom>
+          <a:noFill/>
+          <a:ln/>
+        </p:spPr>
+        <p:txBody>
+          <a:bodyPr wrap="square" lIns="0" tIns="0" rIns="0" bIns="0" rtlCol="0" anchor="t"/>
+          <a:lstStyle/>
+          <a:p>
+            <a:pPr algn="l" indent="0" marL="0">
+              <a:lnSpc>
+                <a:spcPct val="112000"/>
+              </a:lnSpc>
+              <a:buNone/>
+            </a:pPr>
+            <a:r>
+              <a:rPr lang="en-US" sz="1400" dirty="0">
+                <a:solidFill>
+                  <a:srgbClr val="3A434D"/>
+                </a:solidFill>
+                <a:latin typeface="Noto Sans KR" pitchFamily="34" charset="0"/>
+                <a:ea typeface="Noto Sans KR" pitchFamily="34" charset="-122"/>
+                <a:cs typeface="Noto Sans KR" pitchFamily="34" charset="-120"/>
+              </a:rPr>
+              <a:t>평가는 위 항목을 </a:t>
+            </a:r>
+            <a:pPr algn="l" indent="0" marL="0">
+              <a:lnSpc>
+                <a:spcPct val="112000"/>
+              </a:lnSpc>
+              <a:buNone/>
+            </a:pPr>
+            <a:r>
+              <a:rPr lang="en-US" sz="1400" b="1" dirty="0">
+                <a:solidFill>
+                  <a:srgbClr val="3A434D"/>
+                </a:solidFill>
+                <a:latin typeface="Noto Sans KR" pitchFamily="34" charset="0"/>
+                <a:ea typeface="Noto Sans KR" pitchFamily="34" charset="-122"/>
+                <a:cs typeface="Noto Sans KR" pitchFamily="34" charset="-120"/>
+              </a:rPr>
+              <a:t>보는 관점</a:t>
+            </a:r>
+            <a:pPr algn="l" indent="0" marL="0">
+              <a:lnSpc>
+                <a:spcPct val="112000"/>
+              </a:lnSpc>
+              <a:buNone/>
+            </a:pPr>
+            <a:r>
+              <a:rPr lang="en-US" sz="1400" dirty="0">
+                <a:solidFill>
+                  <a:srgbClr val="3A434D"/>
+                </a:solidFill>
+                <a:latin typeface="Noto Sans KR" pitchFamily="34" charset="0"/>
+                <a:ea typeface="Noto Sans KR" pitchFamily="34" charset="-122"/>
+                <a:cs typeface="Noto Sans KR" pitchFamily="34" charset="-120"/>
+              </a:rPr>
+              <a:t>으로 합니다. 게임 종류로 점수를 나누지 않습니다.</a:t>
+            </a:r>
+            <a:endParaRPr lang="en-US" sz="1400" dirty="0"/>
+          </a:p>
+        </p:txBody>
+      </p:sp>
+      <p:sp>
+        <p:nvSpPr>
+          <p:cNvPr id="25" name="Slide Number Placeholder 0"/>
+          <p:cNvSpPr>
+            <a:spLocks noGrp="1"/>
+          </p:cNvSpPr>
+          <p:nvPr>
+            <p:ph type="sldNum" sz="quarter" idx="4294967295"/>
+          </p:nvPr>
+        </p:nvSpPr>
+        <p:spPr>
+          <a:xfrm>
+            <a:off x="11155680" y="6446520"/>
+            <a:ext cx="502920" cy="256032"/>
+          </a:xfrm>
+          <a:prstGeom prst="rect">
+            <a:avLst/>
+          </a:prstGeom>
+          <a:extLst>
+            <a:ext uri="{C572A759-6A51-4108-AA02-DFA0A04FC94B}">
+              <ma14:wrappingTextBoxFlag xmlns:ma14="http://schemas.microsoft.com/office/mac/drawingml/2011/main" val="0"/>
+            </a:ext>
+          </a:extLst>
+        </p:spPr>
+        <p:txBody>
+          <a:bodyPr/>
+          <a:lstStyle>
+            <a:lvl1pPr>
+              <a:defRPr sz="1000">
+                <a:solidFill>
+                  <a:srgbClr val="8C96A1"/>
+                </a:solidFill>
+                <a:latin typeface="Noto Sans KR"/>
+                <a:ea typeface="Noto Sans KR"/>
+                <a:cs typeface="Noto Sans KR"/>
+              </a:defRPr>
+            </a:lvl1pPr>
+          </a:lstStyle>
+          <a:p>
+            <a:pPr algn="r"/>
+            <a:fld id="{F7021451-1387-4CA6-816F-3879F97B5CBC}" type="slidenum">
+              <a:rPr b="0" lang="en-US"/>
+              <a:t>6</a:t>
+            </a:fld>
+            <a:endParaRPr lang="en-US"/>
+          </a:p>
+        </p:txBody>
+      </p:sp>
+    </p:spTree>
+  </p:cSld>
+  <p:clrMapOvr>
+    <a:masterClrMapping/>
+  </p:clrMapOvr>
+</p:sld>
+</file>
+
+<file path=ppt/slides/slide7.xml><?xml version="1.0" encoding="utf-8"?>
+<p:sld xmlns:a="http://schemas.openxmlformats.org/drawingml/2006/main" xmlns:r="http://schemas.openxmlformats.org/officeDocument/2006/relationships" xmlns:p="http://schemas.openxmlformats.org/presentationml/2006/main">
+  <p:cSld name="Slide 7">
+    <p:spTree>
+      <p:nvGrpSpPr>
+        <p:cNvPr id="1" name=""/>
+        <p:cNvGrpSpPr/>
+        <p:nvPr/>
+      </p:nvGrpSpPr>
+      <p:grpSpPr>
+        <a:xfrm>
+          <a:off x="0" y="0"/>
+          <a:ext cx="0" cy="0"/>
+          <a:chOff x="0" y="0"/>
+          <a:chExt cx="0" cy="0"/>
+        </a:xfrm>
+      </p:grpSpPr>
+      <p:sp>
+        <p:nvSpPr>
+          <p:cNvPr id="2" name="Text 0"/>
+          <p:cNvSpPr/>
+          <p:nvPr>
+            <p:ph idx="100" type="body" hasCustomPrompt="1"/>
+          </p:nvPr>
+        </p:nvSpPr>
+        <p:spPr>
+          <a:xfrm>
+            <a:off x="548640" y="292608"/>
+            <a:ext cx="8229600" cy="292608"/>
+          </a:xfrm>
+          <a:prstGeom prst="rect">
+            <a:avLst/>
+          </a:prstGeom>
+          <a:noFill/>
+          <a:ln/>
+        </p:spPr>
+        <p:txBody>
+          <a:bodyPr wrap="square" lIns="0" tIns="0" rIns="0" bIns="0" rtlCol="0" anchor="ctr"/>
+          <a:lstStyle/>
+          <a:p>
+            <a:pPr indent="0" marL="0">
+              <a:buNone/>
+            </a:pPr>
+            <a:r>
+              <a:rPr lang="en-US" sz="1200" b="1" dirty="0">
+                <a:solidFill>
+                  <a:srgbClr val="E07A2E"/>
+                </a:solidFill>
+              </a:rPr>
+              <a:t>과제</a:t>
+            </a:r>
+            <a:endParaRPr lang="en-US" sz="1200" dirty="0"/>
+          </a:p>
+        </p:txBody>
+      </p:sp>
+      <p:sp>
+        <p:nvSpPr>
+          <p:cNvPr id="3" name="Text 0"/>
+          <p:cNvSpPr/>
+          <p:nvPr>
+            <p:ph idx="101" type="title" hasCustomPrompt="1"/>
+          </p:nvPr>
+        </p:nvSpPr>
+        <p:spPr>
+          <a:xfrm>
+            <a:off x="548640" y="585216"/>
+            <a:ext cx="11064240" cy="566928"/>
+          </a:xfrm>
+          <a:prstGeom prst="rect">
+            <a:avLst/>
+          </a:prstGeom>
+          <a:noFill/>
+          <a:ln/>
+        </p:spPr>
+        <p:txBody>
+          <a:bodyPr wrap="square" lIns="0" tIns="0" rIns="0" bIns="0" rtlCol="0" anchor="ctr"/>
+          <a:lstStyle/>
+          <a:p>
+            <a:pPr algn="l" indent="0" marL="0">
+              <a:buNone/>
+            </a:pPr>
+            <a:r>
+              <a:rPr lang="en-US" sz="2800" b="1" dirty="0">
+                <a:solidFill>
+                  <a:srgbClr val="1E242B"/>
+                </a:solidFill>
+              </a:rPr>
+              <a:t>AI를 잘 쓰는 것도 실력입니다</a:t>
+            </a:r>
+            <a:endParaRPr lang="en-US" sz="2800" dirty="0"/>
+          </a:p>
+        </p:txBody>
+      </p:sp>
+      <p:sp>
+        <p:nvSpPr>
+          <p:cNvPr id="4" name="Text 0"/>
+          <p:cNvSpPr/>
+          <p:nvPr>
+            <p:ph idx="102" type="body" hasCustomPrompt="1"/>
+          </p:nvPr>
+        </p:nvSpPr>
+        <p:spPr>
+          <a:xfrm>
+            <a:off x="548640" y="1170432"/>
+            <a:ext cx="11064240" cy="347472"/>
+          </a:xfrm>
+          <a:prstGeom prst="rect">
+            <a:avLst/>
+          </a:prstGeom>
+          <a:noFill/>
+          <a:ln/>
+        </p:spPr>
+        <p:txBody>
+          <a:bodyPr wrap="square" lIns="0" tIns="0" rIns="0" bIns="0" rtlCol="0" anchor="ctr"/>
+          <a:lstStyle/>
+          <a:p>
+            <a:pPr indent="0" marL="0">
+              <a:buNone/>
+            </a:pPr>
+            <a:r>
+              <a:rPr lang="en-US" sz="1500" dirty="0">
+                <a:solidFill>
+                  <a:srgbClr val="5F6B78"/>
+                </a:solidFill>
+              </a:rPr>
               <a:t>도구는 마음껏. 대신 '감독'은 내가 합니다</a:t>
             </a:r>
             <a:endParaRPr lang="en-US" sz="1500" dirty="0"/>
@@ -9290,7 +10537,7 @@
       </p:sp>
       <p:graphicFrame>
         <p:nvGraphicFramePr>
-          <p:cNvPr id="7" name="Table 0"/>
+          <p:cNvPr id="8" name="Table 0"/>
           <p:cNvGraphicFramePr>
             <a:graphicFrameLocks noGrp="1"/>
           </p:cNvGraphicFramePr>
@@ -10631,7 +11878,7 @@
             <a:pPr algn="r"/>
             <a:fld id="{F7021451-1387-4CA6-816F-3879F97B5CBC}" type="slidenum">
               <a:rPr b="0" lang="en-US"/>
-              <a:t>6</a:t>
+              <a:t>7</a:t>
             </a:fld>
             <a:endParaRPr lang="en-US"/>
           </a:p>
@@ -10645,9 +11892,9 @@
 </p:sld>
 </file>
 
-<file path=ppt/slides/slide7.xml><?xml version="1.0" encoding="utf-8"?>
+<file path=ppt/slides/slide8.xml><?xml version="1.0" encoding="utf-8"?>
 <p:sld xmlns:a="http://schemas.openxmlformats.org/drawingml/2006/main" xmlns:r="http://schemas.openxmlformats.org/officeDocument/2006/relationships" xmlns:p="http://schemas.openxmlformats.org/presentationml/2006/main">
-  <p:cSld name="Slide 7">
+  <p:cSld name="Slide 8">
     <p:spTree>
       <p:nvGrpSpPr>
         <p:cNvPr id="1" name=""/>
@@ -10820,7 +12067,7 @@
       </p:sp>
       <p:graphicFrame>
         <p:nvGraphicFramePr>
-          <p:cNvPr id="8" name="Table 0"/>
+          <p:cNvPr id="9" name="Table 0"/>
           <p:cNvGraphicFramePr>
             <a:graphicFrameLocks noGrp="1"/>
           </p:cNvGraphicFramePr>
@@ -11921,7 +13168,7 @@
       </p:sp>
       <p:graphicFrame>
         <p:nvGraphicFramePr>
-          <p:cNvPr id="15" name="Table 1"/>
+          <p:cNvPr id="17" name="Table 1"/>
           <p:cNvGraphicFramePr>
             <a:graphicFrameLocks noGrp="1"/>
           </p:cNvGraphicFramePr>
@@ -12838,7 +14085,7 @@
             <a:pPr algn="r"/>
             <a:fld id="{F7021451-1387-4CA6-816F-3879F97B5CBC}" type="slidenum">
               <a:rPr b="0" lang="en-US"/>
-              <a:t>7</a:t>
+              <a:t>8</a:t>
             </a:fld>
             <a:endParaRPr lang="en-US"/>
           </a:p>
@@ -12852,9 +14099,9 @@
 </p:sld>
 </file>
 
-<file path=ppt/slides/slide8.xml><?xml version="1.0" encoding="utf-8"?>
+<file path=ppt/slides/slide9.xml><?xml version="1.0" encoding="utf-8"?>
 <p:sld xmlns:a="http://schemas.openxmlformats.org/drawingml/2006/main" xmlns:r="http://schemas.openxmlformats.org/officeDocument/2006/relationships" xmlns:p="http://schemas.openxmlformats.org/presentationml/2006/main">
-  <p:cSld name="Slide 8">
+  <p:cSld name="Slide 9">
     <p:spTree>
       <p:nvGrpSpPr>
         <p:cNvPr id="1" name=""/>
@@ -13188,7 +14435,7 @@
       </p:sp>
       <p:graphicFrame>
         <p:nvGraphicFramePr>
-          <p:cNvPr id="9" name="Table 0"/>
+          <p:cNvPr id="10" name="Table 0"/>
           <p:cNvGraphicFramePr>
             <a:graphicFrameLocks noGrp="1"/>
           </p:cNvGraphicFramePr>
@@ -14060,7 +15307,7 @@
             <a:pPr algn="r"/>
             <a:fld id="{F7021451-1387-4CA6-816F-3879F97B5CBC}" type="slidenum">
               <a:rPr b="0" lang="en-US"/>
-              <a:t>8</a:t>
+              <a:t>9</a:t>
             </a:fld>
             <a:endParaRPr lang="en-US"/>
           </a:p>

--- a/8주차/한국어/게임엔진기초_8주차_오프라인_과제안내.pptx
+++ b/8주차/한국어/게임엔진기초_8주차_오프라인_과제안내.pptx
@@ -115,7 +115,7 @@
   <p:extLst>
     <p:ext uri="{521415D9-36F7-43E2-AB2F-B90AF26B5E84}">
       <p14:sectionLst xmlns:p14="http://schemas.microsoft.com/office/powerpoint/2010/main">
-        <p14:section name="과제" id="{6a7ddd97-7905-5731-da1e-bd116aeaeee0}">
+        <p14:section name="과제" id="{0f5d17ab-c8cf-e6b7-f904-56240523a2cc}">
           <p14:sldIdLst>
             <p14:sldId id="256"/>
             <p14:sldId id="257"/>
